--- a/docs/deck/servicedesk-capstone.pptx
+++ b/docs/deck/servicedesk-capstone.pptx
@@ -1,36 +1,36 @@
 
 <file path=ppt/presentation.xml><?xml version="1.0" encoding="utf-8"?>
-<p:presentation xmlns:a="http://schemas.openxmlformats.org/drawingml/2006/main" xmlns:r="http://schemas.openxmlformats.org/officeDocument/2006/relationships" xmlns:p="http://schemas.openxmlformats.org/presentationml/2006/main" saveSubsetFonts="1" autoCompressPictures="0">
+<p:presentation xmlns:a="http://schemas.openxmlformats.org/drawingml/2006/main" xmlns:r="http://schemas.openxmlformats.org/officeDocument/2006/relationships" xmlns:p="http://schemas.openxmlformats.org/presentationml/2006/main" autoCompressPictures="0">
   <p:sldMasterIdLst>
     <p:sldMasterId id="2147483648" r:id="rId1"/>
   </p:sldMasterIdLst>
+  <p:notesMasterIdLst>
+    <p:notesMasterId r:id="rId4"/>
+  </p:notesMasterIdLst>
   <p:sldIdLst>
-    <p:sldId id="256" r:id="rId2"/>
-    <p:sldId id="257" r:id="rId3"/>
-    <p:sldId id="258" r:id="rId4"/>
-    <p:sldId id="259" r:id="rId5"/>
-    <p:sldId id="260" r:id="rId6"/>
-    <p:sldId id="261" r:id="rId7"/>
-    <p:sldId id="262" r:id="rId8"/>
-    <p:sldId id="263" r:id="rId9"/>
-    <p:sldId id="264" r:id="rId10"/>
-    <p:sldId id="265" r:id="rId11"/>
-    <p:sldId id="266" r:id="rId12"/>
-    <p:sldId id="267" r:id="rId13"/>
-    <p:sldId id="268" r:id="rId14"/>
-    <p:sldId id="269" r:id="rId15"/>
-    <p:sldId id="270" r:id="rId16"/>
-    <p:sldId id="271" r:id="rId17"/>
-    <p:sldId id="272" r:id="rId18"/>
-    <p:sldId id="273" r:id="rId19"/>
-    <p:sldId id="274" r:id="rId20"/>
-    <p:sldId id="275" r:id="rId21"/>
-    <p:sldId id="276" r:id="rId22"/>
-    <p:sldId id="277" r:id="rId23"/>
+    <p:sldId id="256" r:id="rId3"/>
+    <p:sldId id="257" r:id="rId5"/>
+    <p:sldId id="258" r:id="rId6"/>
+    <p:sldId id="259" r:id="rId7"/>
+    <p:sldId id="260" r:id="rId8"/>
+    <p:sldId id="261" r:id="rId9"/>
+    <p:sldId id="262" r:id="rId10"/>
+    <p:sldId id="263" r:id="rId11"/>
+    <p:sldId id="264" r:id="rId12"/>
+    <p:sldId id="265" r:id="rId13"/>
+    <p:sldId id="266" r:id="rId14"/>
+    <p:sldId id="267" r:id="rId15"/>
+    <p:sldId id="268" r:id="rId16"/>
+    <p:sldId id="269" r:id="rId17"/>
+    <p:sldId id="270" r:id="rId18"/>
+    <p:sldId id="271" r:id="rId19"/>
+    <p:sldId id="272" r:id="rId20"/>
+    <p:sldId id="273" r:id="rId21"/>
+    <p:sldId id="274" r:id="rId22"/>
+    <p:sldId id="275" r:id="rId23"/>
+    <p:sldId id="276" r:id="rId24"/>
+    <p:sldId id="277" r:id="rId25"/>
   </p:sldIdLst>
-  <p:notesMasterIdLst>
-    <p:notesMasterId r:id="rId24"/>
-  </p:notesMasterIdLst>
   <p:sldSz cx="12192000" cy="6858000"/>
   <p:notesSz cx="6858000" cy="12192000"/>
   <p:defaultTextStyle>
@@ -172,9 +172,6 @@
         </p14:section>
       </p14:sectionLst>
     </p:ext>
-    <p:ext uri="{EFAFB233-063F-42B5-8137-9DF3F51BA10A}">
-      <p15:sldGuideLst xmlns:p15="http://schemas.microsoft.com/office/powerpoint/2012/main"/>
-    </p:ext>
   </p:extLst>
 </p:presentation>
 </file>
@@ -261,7 +258,6 @@
           <a:p>
             <a:fld id="{5282F153-3F37-0F45-9E97-73ACFA13230C}" type="datetimeFigureOut">
               <a:rPr lang="en-US"/>
-              <a:t>7/23/19</a:t>
             </a:fld>
             <a:endParaRPr lang="en-US"/>
           </a:p>
@@ -328,6 +324,7 @@
               <a:rPr lang="en-US"/>
               <a:t>Click to edit Master text styles</a:t>
             </a:r>
+            <a:endParaRPr lang="en-US"/>
           </a:p>
           <a:p>
             <a:pPr lvl="1"/>
@@ -335,6 +332,7 @@
               <a:rPr lang="en-US"/>
               <a:t>Second level</a:t>
             </a:r>
+            <a:endParaRPr lang="en-US"/>
           </a:p>
           <a:p>
             <a:pPr lvl="2"/>
@@ -342,6 +340,7 @@
               <a:rPr lang="en-US"/>
               <a:t>Third level</a:t>
             </a:r>
+            <a:endParaRPr lang="en-US"/>
           </a:p>
           <a:p>
             <a:pPr lvl="3"/>
@@ -349,6 +348,7 @@
               <a:rPr lang="en-US"/>
               <a:t>Fourth level</a:t>
             </a:r>
+            <a:endParaRPr lang="en-US"/>
           </a:p>
           <a:p>
             <a:pPr lvl="4"/>
@@ -356,6 +356,7 @@
               <a:rPr lang="en-US"/>
               <a:t>Fifth level</a:t>
             </a:r>
+            <a:endParaRPr lang="en-US"/>
           </a:p>
         </p:txBody>
       </p:sp>
@@ -419,18 +420,12 @@
           <a:p>
             <a:fld id="{CE5E9CC1-C706-0F49-92D6-E571CC5EEA8F}" type="slidenum">
               <a:rPr lang="en-US"/>
-              <a:t>‹#›</a:t>
             </a:fld>
             <a:endParaRPr lang="en-US"/>
           </a:p>
         </p:txBody>
       </p:sp>
     </p:spTree>
-    <p:extLst>
-      <p:ext uri="{BB962C8B-B14F-4D97-AF65-F5344CB8AC3E}">
-        <p14:creationId xmlns:p14="http://schemas.microsoft.com/office/powerpoint/2010/main" val="1024086991"/>
-      </p:ext>
-    </p:extLst>
   </p:cSld>
   <p:clrMap bg1="lt1" tx1="dk1" bg2="lt2" tx2="dk2" accent1="accent1" accent2="accent2" accent3="accent3" accent4="accent4" accent5="accent5" accent6="accent6" hlink="hlink" folHlink="folHlink"/>
   <p:notesStyle>
@@ -597,18 +592,12 @@
           <a:p>
             <a:fld id="{F7021451-1387-4CA6-816F-3879F97B5CBC}" type="slidenum">
               <a:rPr lang="en-US"/>
-              <a:t>1</a:t>
             </a:fld>
             <a:endParaRPr lang="en-US"/>
           </a:p>
         </p:txBody>
       </p:sp>
     </p:spTree>
-    <p:extLst>
-      <p:ext uri="{BB962C8B-B14F-4D97-AF65-F5344CB8AC3E}">
-        <p14:creationId xmlns:p14="http://schemas.microsoft.com/office/powerpoint/2010/main" val="1024086991"/>
-      </p:ext>
-    </p:extLst>
   </p:cSld>
   <p:clrMapOvr>
     <a:masterClrMapping/>
@@ -685,18 +674,12 @@
           <a:p>
             <a:fld id="{F7021451-1387-4CA6-816F-3879F97B5CBC}" type="slidenum">
               <a:rPr lang="en-US"/>
-              <a:t>10</a:t>
             </a:fld>
             <a:endParaRPr lang="en-US"/>
           </a:p>
         </p:txBody>
       </p:sp>
     </p:spTree>
-    <p:extLst>
-      <p:ext uri="{BB962C8B-B14F-4D97-AF65-F5344CB8AC3E}">
-        <p14:creationId xmlns:p14="http://schemas.microsoft.com/office/powerpoint/2010/main" val="1024086991"/>
-      </p:ext>
-    </p:extLst>
   </p:cSld>
   <p:clrMapOvr>
     <a:masterClrMapping/>
@@ -773,18 +756,12 @@
           <a:p>
             <a:fld id="{F7021451-1387-4CA6-816F-3879F97B5CBC}" type="slidenum">
               <a:rPr lang="en-US"/>
-              <a:t>11</a:t>
             </a:fld>
             <a:endParaRPr lang="en-US"/>
           </a:p>
         </p:txBody>
       </p:sp>
     </p:spTree>
-    <p:extLst>
-      <p:ext uri="{BB962C8B-B14F-4D97-AF65-F5344CB8AC3E}">
-        <p14:creationId xmlns:p14="http://schemas.microsoft.com/office/powerpoint/2010/main" val="1024086991"/>
-      </p:ext>
-    </p:extLst>
   </p:cSld>
   <p:clrMapOvr>
     <a:masterClrMapping/>
@@ -861,18 +838,12 @@
           <a:p>
             <a:fld id="{F7021451-1387-4CA6-816F-3879F97B5CBC}" type="slidenum">
               <a:rPr lang="en-US"/>
-              <a:t>12</a:t>
             </a:fld>
             <a:endParaRPr lang="en-US"/>
           </a:p>
         </p:txBody>
       </p:sp>
     </p:spTree>
-    <p:extLst>
-      <p:ext uri="{BB962C8B-B14F-4D97-AF65-F5344CB8AC3E}">
-        <p14:creationId xmlns:p14="http://schemas.microsoft.com/office/powerpoint/2010/main" val="1024086991"/>
-      </p:ext>
-    </p:extLst>
   </p:cSld>
   <p:clrMapOvr>
     <a:masterClrMapping/>
@@ -949,18 +920,12 @@
           <a:p>
             <a:fld id="{F7021451-1387-4CA6-816F-3879F97B5CBC}" type="slidenum">
               <a:rPr lang="en-US"/>
-              <a:t>13</a:t>
             </a:fld>
             <a:endParaRPr lang="en-US"/>
           </a:p>
         </p:txBody>
       </p:sp>
     </p:spTree>
-    <p:extLst>
-      <p:ext uri="{BB962C8B-B14F-4D97-AF65-F5344CB8AC3E}">
-        <p14:creationId xmlns:p14="http://schemas.microsoft.com/office/powerpoint/2010/main" val="1024086991"/>
-      </p:ext>
-    </p:extLst>
   </p:cSld>
   <p:clrMapOvr>
     <a:masterClrMapping/>
@@ -1037,18 +1002,12 @@
           <a:p>
             <a:fld id="{F7021451-1387-4CA6-816F-3879F97B5CBC}" type="slidenum">
               <a:rPr lang="en-US"/>
-              <a:t>14</a:t>
             </a:fld>
             <a:endParaRPr lang="en-US"/>
           </a:p>
         </p:txBody>
       </p:sp>
     </p:spTree>
-    <p:extLst>
-      <p:ext uri="{BB962C8B-B14F-4D97-AF65-F5344CB8AC3E}">
-        <p14:creationId xmlns:p14="http://schemas.microsoft.com/office/powerpoint/2010/main" val="1024086991"/>
-      </p:ext>
-    </p:extLst>
   </p:cSld>
   <p:clrMapOvr>
     <a:masterClrMapping/>
@@ -1125,18 +1084,12 @@
           <a:p>
             <a:fld id="{F7021451-1387-4CA6-816F-3879F97B5CBC}" type="slidenum">
               <a:rPr lang="en-US"/>
-              <a:t>15</a:t>
             </a:fld>
             <a:endParaRPr lang="en-US"/>
           </a:p>
         </p:txBody>
       </p:sp>
     </p:spTree>
-    <p:extLst>
-      <p:ext uri="{BB962C8B-B14F-4D97-AF65-F5344CB8AC3E}">
-        <p14:creationId xmlns:p14="http://schemas.microsoft.com/office/powerpoint/2010/main" val="1024086991"/>
-      </p:ext>
-    </p:extLst>
   </p:cSld>
   <p:clrMapOvr>
     <a:masterClrMapping/>
@@ -1213,18 +1166,12 @@
           <a:p>
             <a:fld id="{F7021451-1387-4CA6-816F-3879F97B5CBC}" type="slidenum">
               <a:rPr lang="en-US"/>
-              <a:t>16</a:t>
             </a:fld>
             <a:endParaRPr lang="en-US"/>
           </a:p>
         </p:txBody>
       </p:sp>
     </p:spTree>
-    <p:extLst>
-      <p:ext uri="{BB962C8B-B14F-4D97-AF65-F5344CB8AC3E}">
-        <p14:creationId xmlns:p14="http://schemas.microsoft.com/office/powerpoint/2010/main" val="1024086991"/>
-      </p:ext>
-    </p:extLst>
   </p:cSld>
   <p:clrMapOvr>
     <a:masterClrMapping/>
@@ -1301,18 +1248,12 @@
           <a:p>
             <a:fld id="{F7021451-1387-4CA6-816F-3879F97B5CBC}" type="slidenum">
               <a:rPr lang="en-US"/>
-              <a:t>17</a:t>
             </a:fld>
             <a:endParaRPr lang="en-US"/>
           </a:p>
         </p:txBody>
       </p:sp>
     </p:spTree>
-    <p:extLst>
-      <p:ext uri="{BB962C8B-B14F-4D97-AF65-F5344CB8AC3E}">
-        <p14:creationId xmlns:p14="http://schemas.microsoft.com/office/powerpoint/2010/main" val="1024086991"/>
-      </p:ext>
-    </p:extLst>
   </p:cSld>
   <p:clrMapOvr>
     <a:masterClrMapping/>
@@ -1389,18 +1330,12 @@
           <a:p>
             <a:fld id="{F7021451-1387-4CA6-816F-3879F97B5CBC}" type="slidenum">
               <a:rPr lang="en-US"/>
-              <a:t>18</a:t>
             </a:fld>
             <a:endParaRPr lang="en-US"/>
           </a:p>
         </p:txBody>
       </p:sp>
     </p:spTree>
-    <p:extLst>
-      <p:ext uri="{BB962C8B-B14F-4D97-AF65-F5344CB8AC3E}">
-        <p14:creationId xmlns:p14="http://schemas.microsoft.com/office/powerpoint/2010/main" val="1024086991"/>
-      </p:ext>
-    </p:extLst>
   </p:cSld>
   <p:clrMapOvr>
     <a:masterClrMapping/>
@@ -1477,18 +1412,12 @@
           <a:p>
             <a:fld id="{F7021451-1387-4CA6-816F-3879F97B5CBC}" type="slidenum">
               <a:rPr lang="en-US"/>
-              <a:t>19</a:t>
             </a:fld>
             <a:endParaRPr lang="en-US"/>
           </a:p>
         </p:txBody>
       </p:sp>
     </p:spTree>
-    <p:extLst>
-      <p:ext uri="{BB962C8B-B14F-4D97-AF65-F5344CB8AC3E}">
-        <p14:creationId xmlns:p14="http://schemas.microsoft.com/office/powerpoint/2010/main" val="1024086991"/>
-      </p:ext>
-    </p:extLst>
   </p:cSld>
   <p:clrMapOvr>
     <a:masterClrMapping/>
@@ -1565,18 +1494,12 @@
           <a:p>
             <a:fld id="{F7021451-1387-4CA6-816F-3879F97B5CBC}" type="slidenum">
               <a:rPr lang="en-US"/>
-              <a:t>2</a:t>
             </a:fld>
             <a:endParaRPr lang="en-US"/>
           </a:p>
         </p:txBody>
       </p:sp>
     </p:spTree>
-    <p:extLst>
-      <p:ext uri="{BB962C8B-B14F-4D97-AF65-F5344CB8AC3E}">
-        <p14:creationId xmlns:p14="http://schemas.microsoft.com/office/powerpoint/2010/main" val="1024086991"/>
-      </p:ext>
-    </p:extLst>
   </p:cSld>
   <p:clrMapOvr>
     <a:masterClrMapping/>
@@ -1653,18 +1576,12 @@
           <a:p>
             <a:fld id="{F7021451-1387-4CA6-816F-3879F97B5CBC}" type="slidenum">
               <a:rPr lang="en-US"/>
-              <a:t>20</a:t>
             </a:fld>
             <a:endParaRPr lang="en-US"/>
           </a:p>
         </p:txBody>
       </p:sp>
     </p:spTree>
-    <p:extLst>
-      <p:ext uri="{BB962C8B-B14F-4D97-AF65-F5344CB8AC3E}">
-        <p14:creationId xmlns:p14="http://schemas.microsoft.com/office/powerpoint/2010/main" val="1024086991"/>
-      </p:ext>
-    </p:extLst>
   </p:cSld>
   <p:clrMapOvr>
     <a:masterClrMapping/>
@@ -1741,18 +1658,12 @@
           <a:p>
             <a:fld id="{F7021451-1387-4CA6-816F-3879F97B5CBC}" type="slidenum">
               <a:rPr lang="en-US"/>
-              <a:t>21</a:t>
             </a:fld>
             <a:endParaRPr lang="en-US"/>
           </a:p>
         </p:txBody>
       </p:sp>
     </p:spTree>
-    <p:extLst>
-      <p:ext uri="{BB962C8B-B14F-4D97-AF65-F5344CB8AC3E}">
-        <p14:creationId xmlns:p14="http://schemas.microsoft.com/office/powerpoint/2010/main" val="1024086991"/>
-      </p:ext>
-    </p:extLst>
   </p:cSld>
   <p:clrMapOvr>
     <a:masterClrMapping/>
@@ -1829,18 +1740,12 @@
           <a:p>
             <a:fld id="{F7021451-1387-4CA6-816F-3879F97B5CBC}" type="slidenum">
               <a:rPr lang="en-US"/>
-              <a:t>22</a:t>
             </a:fld>
             <a:endParaRPr lang="en-US"/>
           </a:p>
         </p:txBody>
       </p:sp>
     </p:spTree>
-    <p:extLst>
-      <p:ext uri="{BB962C8B-B14F-4D97-AF65-F5344CB8AC3E}">
-        <p14:creationId xmlns:p14="http://schemas.microsoft.com/office/powerpoint/2010/main" val="1024086991"/>
-      </p:ext>
-    </p:extLst>
   </p:cSld>
   <p:clrMapOvr>
     <a:masterClrMapping/>
@@ -1917,18 +1822,12 @@
           <a:p>
             <a:fld id="{F7021451-1387-4CA6-816F-3879F97B5CBC}" type="slidenum">
               <a:rPr lang="en-US"/>
-              <a:t>3</a:t>
             </a:fld>
             <a:endParaRPr lang="en-US"/>
           </a:p>
         </p:txBody>
       </p:sp>
     </p:spTree>
-    <p:extLst>
-      <p:ext uri="{BB962C8B-B14F-4D97-AF65-F5344CB8AC3E}">
-        <p14:creationId xmlns:p14="http://schemas.microsoft.com/office/powerpoint/2010/main" val="1024086991"/>
-      </p:ext>
-    </p:extLst>
   </p:cSld>
   <p:clrMapOvr>
     <a:masterClrMapping/>
@@ -2005,18 +1904,12 @@
           <a:p>
             <a:fld id="{F7021451-1387-4CA6-816F-3879F97B5CBC}" type="slidenum">
               <a:rPr lang="en-US"/>
-              <a:t>4</a:t>
             </a:fld>
             <a:endParaRPr lang="en-US"/>
           </a:p>
         </p:txBody>
       </p:sp>
     </p:spTree>
-    <p:extLst>
-      <p:ext uri="{BB962C8B-B14F-4D97-AF65-F5344CB8AC3E}">
-        <p14:creationId xmlns:p14="http://schemas.microsoft.com/office/powerpoint/2010/main" val="1024086991"/>
-      </p:ext>
-    </p:extLst>
   </p:cSld>
   <p:clrMapOvr>
     <a:masterClrMapping/>
@@ -2093,18 +1986,12 @@
           <a:p>
             <a:fld id="{F7021451-1387-4CA6-816F-3879F97B5CBC}" type="slidenum">
               <a:rPr lang="en-US"/>
-              <a:t>5</a:t>
             </a:fld>
             <a:endParaRPr lang="en-US"/>
           </a:p>
         </p:txBody>
       </p:sp>
     </p:spTree>
-    <p:extLst>
-      <p:ext uri="{BB962C8B-B14F-4D97-AF65-F5344CB8AC3E}">
-        <p14:creationId xmlns:p14="http://schemas.microsoft.com/office/powerpoint/2010/main" val="1024086991"/>
-      </p:ext>
-    </p:extLst>
   </p:cSld>
   <p:clrMapOvr>
     <a:masterClrMapping/>
@@ -2181,18 +2068,12 @@
           <a:p>
             <a:fld id="{F7021451-1387-4CA6-816F-3879F97B5CBC}" type="slidenum">
               <a:rPr lang="en-US"/>
-              <a:t>6</a:t>
             </a:fld>
             <a:endParaRPr lang="en-US"/>
           </a:p>
         </p:txBody>
       </p:sp>
     </p:spTree>
-    <p:extLst>
-      <p:ext uri="{BB962C8B-B14F-4D97-AF65-F5344CB8AC3E}">
-        <p14:creationId xmlns:p14="http://schemas.microsoft.com/office/powerpoint/2010/main" val="1024086991"/>
-      </p:ext>
-    </p:extLst>
   </p:cSld>
   <p:clrMapOvr>
     <a:masterClrMapping/>
@@ -2269,18 +2150,12 @@
           <a:p>
             <a:fld id="{F7021451-1387-4CA6-816F-3879F97B5CBC}" type="slidenum">
               <a:rPr lang="en-US"/>
-              <a:t>7</a:t>
             </a:fld>
             <a:endParaRPr lang="en-US"/>
           </a:p>
         </p:txBody>
       </p:sp>
     </p:spTree>
-    <p:extLst>
-      <p:ext uri="{BB962C8B-B14F-4D97-AF65-F5344CB8AC3E}">
-        <p14:creationId xmlns:p14="http://schemas.microsoft.com/office/powerpoint/2010/main" val="1024086991"/>
-      </p:ext>
-    </p:extLst>
   </p:cSld>
   <p:clrMapOvr>
     <a:masterClrMapping/>
@@ -2357,18 +2232,12 @@
           <a:p>
             <a:fld id="{F7021451-1387-4CA6-816F-3879F97B5CBC}" type="slidenum">
               <a:rPr lang="en-US"/>
-              <a:t>8</a:t>
             </a:fld>
             <a:endParaRPr lang="en-US"/>
           </a:p>
         </p:txBody>
       </p:sp>
     </p:spTree>
-    <p:extLst>
-      <p:ext uri="{BB962C8B-B14F-4D97-AF65-F5344CB8AC3E}">
-        <p14:creationId xmlns:p14="http://schemas.microsoft.com/office/powerpoint/2010/main" val="1024086991"/>
-      </p:ext>
-    </p:extLst>
   </p:cSld>
   <p:clrMapOvr>
     <a:masterClrMapping/>
@@ -2445,18 +2314,12 @@
           <a:p>
             <a:fld id="{F7021451-1387-4CA6-816F-3879F97B5CBC}" type="slidenum">
               <a:rPr lang="en-US"/>
-              <a:t>9</a:t>
             </a:fld>
             <a:endParaRPr lang="en-US"/>
           </a:p>
         </p:txBody>
       </p:sp>
     </p:spTree>
-    <p:extLst>
-      <p:ext uri="{BB962C8B-B14F-4D97-AF65-F5344CB8AC3E}">
-        <p14:creationId xmlns:p14="http://schemas.microsoft.com/office/powerpoint/2010/main" val="1024086991"/>
-      </p:ext>
-    </p:extLst>
   </p:cSld>
   <p:clrMapOvr>
     <a:masterClrMapping/>
@@ -2502,6 +2365,7 @@
         <a:solidFill>
           <a:srgbClr val="0F172A"/>
         </a:solidFill>
+        <a:effectLst/>
       </p:bgPr>
     </p:bg>
     <p:spTree>
@@ -2523,7 +2387,7 @@
           <p:cNvPr id="2" name="Text 0"/>
           <p:cNvSpPr/>
           <p:nvPr>
-            <p:ph idx="100" type="title" hasCustomPrompt="1"/>
+            <p:ph type="title" idx="100" hasCustomPrompt="1"/>
           </p:nvPr>
         </p:nvSpPr>
         <p:spPr>
@@ -2535,12 +2399,11 @@
             <a:avLst/>
           </a:prstGeom>
           <a:noFill/>
-          <a:ln/>
         </p:spPr>
         <p:txBody>
           <a:bodyPr wrap="square" rtlCol="0"/>
           <a:lstStyle>
-            <a:lvl1pPr algn="l" indent="0" marL="0">
+            <a:lvl1pPr marL="0" indent="0" algn="l">
               <a:buNone/>
               <a:defRPr lang="en-US" sz="4800" b="1" dirty="0">
                 <a:solidFill>
@@ -2550,7 +2413,7 @@
             </a:lvl1pPr>
           </a:lstStyle>
           <a:p>
-            <a:pPr algn="l" indent="0" marL="0">
+            <a:pPr marL="0" indent="0" algn="l">
               <a:buNone/>
             </a:pPr>
             <a:endParaRPr lang="en-US" sz="4800" dirty="0"/>
@@ -2562,7 +2425,7 @@
           <p:cNvPr id="3" name="Text 0"/>
           <p:cNvSpPr/>
           <p:nvPr>
-            <p:ph idx="101" type="body" hasCustomPrompt="1"/>
+            <p:ph type="body" idx="101" hasCustomPrompt="1"/>
           </p:nvPr>
         </p:nvSpPr>
         <p:spPr>
@@ -2574,12 +2437,11 @@
             <a:avLst/>
           </a:prstGeom>
           <a:noFill/>
-          <a:ln/>
         </p:spPr>
         <p:txBody>
           <a:bodyPr wrap="square" rtlCol="0"/>
           <a:lstStyle>
-            <a:lvl1pPr indent="0" marL="0">
+            <a:lvl1pPr marL="0" indent="0">
               <a:buNone/>
               <a:defRPr lang="en-US" sz="1700" dirty="0">
                 <a:solidFill>
@@ -2589,7 +2451,7 @@
             </a:lvl1pPr>
           </a:lstStyle>
           <a:p>
-            <a:pPr indent="0" marL="0">
+            <a:pPr marL="0" indent="0">
               <a:buNone/>
             </a:pPr>
             <a:endParaRPr lang="en-US" sz="1700" dirty="0"/>
@@ -2612,6 +2474,7 @@
         <a:solidFill>
           <a:srgbClr val="0F172A"/>
         </a:solidFill>
+        <a:effectLst/>
       </p:bgPr>
     </p:bg>
     <p:spTree>
@@ -2633,7 +2496,7 @@
           <p:cNvPr id="2" name="Text 0"/>
           <p:cNvSpPr/>
           <p:nvPr>
-            <p:ph idx="100" type="title" hasCustomPrompt="1"/>
+            <p:ph type="title" idx="100" hasCustomPrompt="1"/>
           </p:nvPr>
         </p:nvSpPr>
         <p:spPr>
@@ -2645,12 +2508,11 @@
             <a:avLst/>
           </a:prstGeom>
           <a:noFill/>
-          <a:ln/>
         </p:spPr>
         <p:txBody>
           <a:bodyPr wrap="square" rtlCol="0"/>
           <a:lstStyle>
-            <a:lvl1pPr algn="l" indent="0" marL="0">
+            <a:lvl1pPr marL="0" indent="0" algn="l">
               <a:buNone/>
               <a:defRPr lang="en-US" sz="4000" b="1" dirty="0">
                 <a:solidFill>
@@ -2660,7 +2522,7 @@
             </a:lvl1pPr>
           </a:lstStyle>
           <a:p>
-            <a:pPr algn="l" indent="0" marL="0">
+            <a:pPr marL="0" indent="0" algn="l">
               <a:buNone/>
             </a:pPr>
             <a:endParaRPr lang="en-US" sz="4000" dirty="0"/>
@@ -2672,7 +2534,7 @@
           <p:cNvPr id="3" name="Text 0"/>
           <p:cNvSpPr/>
           <p:nvPr>
-            <p:ph idx="101" type="body" hasCustomPrompt="1"/>
+            <p:ph type="body" idx="101" hasCustomPrompt="1"/>
           </p:nvPr>
         </p:nvSpPr>
         <p:spPr>
@@ -2684,12 +2546,11 @@
             <a:avLst/>
           </a:prstGeom>
           <a:noFill/>
-          <a:ln/>
         </p:spPr>
         <p:txBody>
           <a:bodyPr wrap="square" rtlCol="0"/>
           <a:lstStyle>
-            <a:lvl1pPr indent="0" marL="0">
+            <a:lvl1pPr marL="0" indent="0">
               <a:buNone/>
               <a:defRPr lang="en-US" sz="1600" dirty="0">
                 <a:solidFill>
@@ -2699,7 +2560,7 @@
             </a:lvl1pPr>
           </a:lstStyle>
           <a:p>
-            <a:pPr indent="0" marL="0">
+            <a:pPr marL="0" indent="0">
               <a:buNone/>
             </a:pPr>
             <a:endParaRPr lang="en-US" sz="1600" dirty="0"/>
@@ -2722,6 +2583,7 @@
         <a:solidFill>
           <a:schemeClr val="bg1"/>
         </a:solidFill>
+        <a:effectLst/>
       </p:bgPr>
     </p:bg>
     <p:spTree>
@@ -2743,7 +2605,7 @@
           <p:cNvPr id="2" name="Text 0"/>
           <p:cNvSpPr/>
           <p:nvPr>
-            <p:ph idx="100" type="title" hasCustomPrompt="1"/>
+            <p:ph type="title" idx="100" hasCustomPrompt="1"/>
           </p:nvPr>
         </p:nvSpPr>
         <p:spPr>
@@ -2755,12 +2617,11 @@
             <a:avLst/>
           </a:prstGeom>
           <a:noFill/>
-          <a:ln/>
         </p:spPr>
         <p:txBody>
           <a:bodyPr wrap="square" rtlCol="0"/>
           <a:lstStyle>
-            <a:lvl1pPr algn="l" indent="0" marL="0">
+            <a:lvl1pPr marL="0" indent="0" algn="l">
               <a:buNone/>
               <a:defRPr lang="en-US" sz="3400" b="1" dirty="0">
                 <a:solidFill>
@@ -2770,7 +2631,7 @@
             </a:lvl1pPr>
           </a:lstStyle>
           <a:p>
-            <a:pPr algn="l" indent="0" marL="0">
+            <a:pPr marL="0" indent="0" algn="l">
               <a:buNone/>
             </a:pPr>
             <a:endParaRPr lang="en-US" sz="3400" dirty="0"/>
@@ -2792,13 +2653,12 @@
             <a:avLst/>
           </a:prstGeom>
           <a:noFill/>
-          <a:ln/>
         </p:spPr>
         <p:txBody>
           <a:bodyPr wrap="square" rtlCol="0" anchor="ctr"/>
           <a:lstStyle/>
           <a:p>
-            <a:pPr indent="0" marL="0">
+            <a:pPr marL="0" indent="0">
               <a:buNone/>
             </a:pPr>
             <a:r>
@@ -2818,7 +2678,7 @@
           <p:cNvPr id="4" name="Text 1"/>
           <p:cNvSpPr/>
           <p:nvPr>
-            <p:ph idx="102" type="body" hasCustomPrompt="1"/>
+            <p:ph type="body" idx="102" hasCustomPrompt="1"/>
           </p:nvPr>
         </p:nvSpPr>
         <p:spPr>
@@ -2830,12 +2690,11 @@
             <a:avLst/>
           </a:prstGeom>
           <a:noFill/>
-          <a:ln/>
         </p:spPr>
         <p:txBody>
           <a:bodyPr wrap="square" rtlCol="0"/>
           <a:lstStyle>
-            <a:lvl1pPr indent="0" marL="0">
+            <a:lvl1pPr marL="0" indent="0">
               <a:buNone/>
               <a:defRPr lang="en-US" sz="1500" dirty="0">
                 <a:solidFill>
@@ -2845,7 +2704,7 @@
             </a:lvl1pPr>
           </a:lstStyle>
           <a:p>
-            <a:pPr indent="0" marL="0">
+            <a:pPr marL="0" indent="0">
               <a:buNone/>
             </a:pPr>
             <a:endParaRPr lang="en-US" sz="1500" dirty="0"/>
@@ -2870,11 +2729,6 @@
           <a:prstGeom prst="rect">
             <a:avLst/>
           </a:prstGeom>
-          <a:extLst>
-            <a:ext uri="{C572A759-6A51-4108-AA02-DFA0A04FC94B}">
-              <ma14:wrappingTextBoxFlag xmlns:ma14="http://schemas.microsoft.com/office/mac/drawingml/2011/main" val="0"/>
-            </a:ext>
-          </a:extLst>
         </p:spPr>
         <p:txBody>
           <a:bodyPr/>
@@ -2890,8 +2744,7 @@
           <a:p>
             <a:pPr algn="l"/>
             <a:fld id="{F7021451-1387-4CA6-816F-3879F97B5CBC}" type="slidenum">
-              <a:rPr b="0" lang="en-US"/>
-              <a:t>1004</a:t>
+              <a:rPr lang="en-US" b="0"/>
             </a:fld>
             <a:endParaRPr lang="en-US"/>
           </a:p>
@@ -2913,6 +2766,7 @@
         <a:solidFill>
           <a:schemeClr val="bg1"/>
         </a:solidFill>
+        <a:effectLst/>
       </p:bgPr>
     </p:bg>
     <p:spTree>
@@ -2934,7 +2788,7 @@
           <p:cNvPr id="2" name="Text 0"/>
           <p:cNvSpPr/>
           <p:nvPr>
-            <p:ph idx="100" type="title" hasCustomPrompt="1"/>
+            <p:ph type="title" idx="100" hasCustomPrompt="1"/>
           </p:nvPr>
         </p:nvSpPr>
         <p:spPr>
@@ -2946,12 +2800,11 @@
             <a:avLst/>
           </a:prstGeom>
           <a:noFill/>
-          <a:ln/>
         </p:spPr>
         <p:txBody>
           <a:bodyPr wrap="square" rtlCol="0"/>
           <a:lstStyle>
-            <a:lvl1pPr algn="l" indent="0" marL="0">
+            <a:lvl1pPr marL="0" indent="0" algn="l">
               <a:buNone/>
               <a:defRPr lang="en-US" sz="3400" b="1" dirty="0">
                 <a:solidFill>
@@ -2961,7 +2814,7 @@
             </a:lvl1pPr>
           </a:lstStyle>
           <a:p>
-            <a:pPr algn="l" indent="0" marL="0">
+            <a:pPr marL="0" indent="0" algn="l">
               <a:buNone/>
             </a:pPr>
             <a:endParaRPr lang="en-US" sz="3400" dirty="0"/>
@@ -2983,13 +2836,12 @@
             <a:avLst/>
           </a:prstGeom>
           <a:noFill/>
-          <a:ln/>
         </p:spPr>
         <p:txBody>
           <a:bodyPr wrap="square" rtlCol="0" anchor="ctr"/>
           <a:lstStyle/>
           <a:p>
-            <a:pPr indent="0" marL="0">
+            <a:pPr marL="0" indent="0">
               <a:buNone/>
             </a:pPr>
             <a:r>
@@ -3022,11 +2874,6 @@
           <a:prstGeom prst="rect">
             <a:avLst/>
           </a:prstGeom>
-          <a:extLst>
-            <a:ext uri="{C572A759-6A51-4108-AA02-DFA0A04FC94B}">
-              <ma14:wrappingTextBoxFlag xmlns:ma14="http://schemas.microsoft.com/office/mac/drawingml/2011/main" val="0"/>
-            </a:ext>
-          </a:extLst>
         </p:spPr>
         <p:txBody>
           <a:bodyPr/>
@@ -3042,8 +2889,7 @@
           <a:p>
             <a:pPr algn="l"/>
             <a:fld id="{F7021451-1387-4CA6-816F-3879F97B5CBC}" type="slidenum">
-              <a:rPr b="0" lang="en-US"/>
-              <a:t>1005</a:t>
+              <a:rPr lang="en-US" b="0"/>
             </a:fld>
             <a:endParaRPr lang="en-US"/>
           </a:p>
@@ -3060,6 +2906,11 @@
 <file path=ppt/slideMasters/slideMaster1.xml><?xml version="1.0" encoding="utf-8"?>
 <p:sldMaster xmlns:a="http://schemas.openxmlformats.org/drawingml/2006/main" xmlns:r="http://schemas.openxmlformats.org/officeDocument/2006/relationships" xmlns:p="http://schemas.openxmlformats.org/presentationml/2006/main">
   <p:cSld>
+    <p:bg>
+      <p:bgRef idx="1001">
+        <a:schemeClr val="bg1"/>
+      </p:bgRef>
+    </p:bg>
     <p:spTree>
       <p:nvGrpSpPr>
         <p:cNvPr id="1" name=""/>
@@ -3092,11 +2943,6 @@
           <a:prstGeom prst="rect">
             <a:avLst/>
           </a:prstGeom>
-          <a:extLst>
-            <a:ext uri="{C572A759-6A51-4108-AA02-DFA0A04FC94B}">
-              <ma14:wrappingTextBoxFlag xmlns:ma14="http://schemas.microsoft.com/office/mac/drawingml/2011/main" val="0"/>
-            </a:ext>
-          </a:extLst>
         </p:spPr>
         <p:txBody>
           <a:bodyPr/>
@@ -3112,8 +2958,7 @@
           <a:p>
             <a:pPr algn="l"/>
             <a:fld id="{F7021451-1387-4CA6-816F-3879F97B5CBC}" type="slidenum">
-              <a:rPr b="0" lang="en-US"/>
-              <a:t>null</a:t>
+              <a:rPr lang="en-US" b="0"/>
             </a:fld>
             <a:endParaRPr lang="en-US"/>
           </a:p>
@@ -3152,7 +2997,7 @@
         <a:spcBef>
           <a:spcPct val="20000"/>
         </a:spcBef>
-        <a:buFont typeface="Arial" pitchFamily="34" charset="0"/>
+        <a:buFont typeface="Arial" panose="020B0704020202020204" pitchFamily="34" charset="0"/>
         <a:buChar char="•"/>
         <a:defRPr sz="3200" kern="1200">
           <a:solidFill>
@@ -3167,7 +3012,7 @@
         <a:spcBef>
           <a:spcPct val="20000"/>
         </a:spcBef>
-        <a:buFont typeface="Arial" pitchFamily="34" charset="0"/>
+        <a:buFont typeface="Arial" panose="020B0704020202020204" pitchFamily="34" charset="0"/>
         <a:buChar char="–"/>
         <a:defRPr sz="2800" kern="1200">
           <a:solidFill>
@@ -3182,7 +3027,7 @@
         <a:spcBef>
           <a:spcPct val="20000"/>
         </a:spcBef>
-        <a:buFont typeface="Arial" pitchFamily="34" charset="0"/>
+        <a:buFont typeface="Arial" panose="020B0704020202020204" pitchFamily="34" charset="0"/>
         <a:buChar char="•"/>
         <a:defRPr sz="2400" kern="1200">
           <a:solidFill>
@@ -3197,7 +3042,7 @@
         <a:spcBef>
           <a:spcPct val="20000"/>
         </a:spcBef>
-        <a:buFont typeface="Arial" pitchFamily="34" charset="0"/>
+        <a:buFont typeface="Arial" panose="020B0704020202020204" pitchFamily="34" charset="0"/>
         <a:buChar char="–"/>
         <a:defRPr sz="2000" kern="1200">
           <a:solidFill>
@@ -3212,7 +3057,7 @@
         <a:spcBef>
           <a:spcPct val="20000"/>
         </a:spcBef>
-        <a:buFont typeface="Arial" pitchFamily="34" charset="0"/>
+        <a:buFont typeface="Arial" panose="020B0704020202020204" pitchFamily="34" charset="0"/>
         <a:buChar char="»"/>
         <a:defRPr sz="2000" kern="1200">
           <a:solidFill>
@@ -3227,7 +3072,7 @@
         <a:spcBef>
           <a:spcPct val="20000"/>
         </a:spcBef>
-        <a:buFont typeface="Arial" pitchFamily="34" charset="0"/>
+        <a:buFont typeface="Arial" panose="020B0704020202020204" pitchFamily="34" charset="0"/>
         <a:buChar char="•"/>
         <a:defRPr sz="2000" kern="1200">
           <a:solidFill>
@@ -3242,7 +3087,7 @@
         <a:spcBef>
           <a:spcPct val="20000"/>
         </a:spcBef>
-        <a:buFont typeface="Arial" pitchFamily="34" charset="0"/>
+        <a:buFont typeface="Arial" panose="020B0704020202020204" pitchFamily="34" charset="0"/>
         <a:buChar char="•"/>
         <a:defRPr sz="2000" kern="1200">
           <a:solidFill>
@@ -3257,7 +3102,7 @@
         <a:spcBef>
           <a:spcPct val="20000"/>
         </a:spcBef>
-        <a:buFont typeface="Arial" pitchFamily="34" charset="0"/>
+        <a:buFont typeface="Arial" panose="020B0704020202020204" pitchFamily="34" charset="0"/>
         <a:buChar char="•"/>
         <a:defRPr sz="2000" kern="1200">
           <a:solidFill>
@@ -3272,7 +3117,7 @@
         <a:spcBef>
           <a:spcPct val="20000"/>
         </a:spcBef>
-        <a:buFont typeface="Arial" pitchFamily="34" charset="0"/>
+        <a:buFont typeface="Arial" panose="020B0704020202020204" pitchFamily="34" charset="0"/>
         <a:buChar char="•"/>
         <a:defRPr sz="2000" kern="1200">
           <a:solidFill>
@@ -3385,7 +3230,7 @@
 
 <file path=ppt/slides/slide1.xml><?xml version="1.0" encoding="utf-8"?>
 <p:sld xmlns:a="http://schemas.openxmlformats.org/drawingml/2006/main" xmlns:r="http://schemas.openxmlformats.org/officeDocument/2006/relationships" xmlns:p="http://schemas.openxmlformats.org/presentationml/2006/main">
-  <p:cSld name="Slide 1">
+  <p:cSld>
     <p:spTree>
       <p:nvGrpSpPr>
         <p:cNvPr id="1" name=""/>
@@ -3405,7 +3250,7 @@
           <p:cNvPr id="2" name="Text 0"/>
           <p:cNvSpPr/>
           <p:nvPr>
-            <p:ph idx="100" type="title" hasCustomPrompt="1"/>
+            <p:ph type="title" idx="100" hasCustomPrompt="1"/>
           </p:nvPr>
         </p:nvSpPr>
         <p:spPr>
@@ -3417,13 +3262,12 @@
             <a:avLst/>
           </a:prstGeom>
           <a:noFill/>
-          <a:ln/>
         </p:spPr>
         <p:txBody>
           <a:bodyPr wrap="square" rtlCol="0"/>
           <a:lstStyle/>
           <a:p>
-            <a:pPr algn="l" indent="0" marL="0">
+            <a:pPr marL="0" indent="0" algn="l">
               <a:buNone/>
             </a:pPr>
             <a:r>
@@ -3443,7 +3287,7 @@
           <p:cNvPr id="3" name="Text 0"/>
           <p:cNvSpPr/>
           <p:nvPr>
-            <p:ph idx="101" type="body" hasCustomPrompt="1"/>
+            <p:ph type="body" idx="101" hasCustomPrompt="1"/>
           </p:nvPr>
         </p:nvSpPr>
         <p:spPr>
@@ -3455,13 +3299,12 @@
             <a:avLst/>
           </a:prstGeom>
           <a:noFill/>
-          <a:ln/>
         </p:spPr>
         <p:txBody>
           <a:bodyPr wrap="square" rtlCol="0"/>
           <a:lstStyle/>
           <a:p>
-            <a:pPr indent="0" marL="0">
+            <a:pPr marL="0" indent="0">
               <a:buNone/>
             </a:pPr>
             <a:r>
@@ -3475,7 +3318,7 @@
             <a:endParaRPr lang="en-US" sz="1700" dirty="0"/>
           </a:p>
           <a:p>
-            <a:pPr indent="0" marL="0">
+            <a:pPr marL="0" indent="0">
               <a:buNone/>
             </a:pPr>
             <a:r>
@@ -3532,17 +3375,16 @@
             <a:avLst/>
           </a:prstGeom>
           <a:noFill/>
-          <a:ln/>
-        </p:spPr>
-        <p:txBody>
-          <a:bodyPr wrap="square" lIns="0" tIns="0" rIns="0" bIns="0" rtlCol="0" anchor="ctr"/>
-          <a:lstStyle/>
-          <a:p>
-            <a:pPr algn="ctr" indent="0" marL="0">
-              <a:buNone/>
-            </a:pPr>
-            <a:r>
-              <a:rPr lang="en-US" sz="1000" b="1" spc="100" kern="0" dirty="0">
+        </p:spPr>
+        <p:txBody>
+          <a:bodyPr wrap="square" lIns="0" tIns="0" rIns="0" bIns="0" rtlCol="0" anchor="ctr"/>
+          <a:lstStyle/>
+          <a:p>
+            <a:pPr marL="0" indent="0" algn="ctr">
+              <a:buNone/>
+            </a:pPr>
+            <a:r>
+              <a:rPr lang="en-US" sz="1000" b="1" kern="0" spc="100" dirty="0">
                 <a:solidFill>
                   <a:srgbClr val="0F172A"/>
                 </a:solidFill>
@@ -3563,7 +3405,7 @@
 
 <file path=ppt/slides/slide10.xml><?xml version="1.0" encoding="utf-8"?>
 <p:sld xmlns:a="http://schemas.openxmlformats.org/drawingml/2006/main" xmlns:r="http://schemas.openxmlformats.org/officeDocument/2006/relationships" xmlns:p="http://schemas.openxmlformats.org/presentationml/2006/main">
-  <p:cSld name="Slide 10">
+  <p:cSld>
     <p:spTree>
       <p:nvGrpSpPr>
         <p:cNvPr id="1" name=""/>
@@ -3583,7 +3425,7 @@
           <p:cNvPr id="2" name="Text 0"/>
           <p:cNvSpPr/>
           <p:nvPr>
-            <p:ph idx="100" type="title" hasCustomPrompt="1"/>
+            <p:ph type="title" idx="100" hasCustomPrompt="1"/>
           </p:nvPr>
         </p:nvSpPr>
         <p:spPr>
@@ -3595,13 +3437,12 @@
             <a:avLst/>
           </a:prstGeom>
           <a:noFill/>
-          <a:ln/>
         </p:spPr>
         <p:txBody>
           <a:bodyPr wrap="square" rtlCol="0"/>
           <a:lstStyle/>
           <a:p>
-            <a:pPr algn="l" indent="0" marL="0">
+            <a:pPr marL="0" indent="0" algn="l">
               <a:buNone/>
             </a:pPr>
             <a:r>
@@ -3621,7 +3462,7 @@
           <p:cNvPr id="3" name="Text 0"/>
           <p:cNvSpPr/>
           <p:nvPr>
-            <p:ph idx="101" type="body" hasCustomPrompt="1"/>
+            <p:ph type="body" idx="101" hasCustomPrompt="1"/>
           </p:nvPr>
         </p:nvSpPr>
         <p:spPr>
@@ -3633,13 +3474,12 @@
             <a:avLst/>
           </a:prstGeom>
           <a:noFill/>
-          <a:ln/>
         </p:spPr>
         <p:txBody>
           <a:bodyPr wrap="square" rtlCol="0"/>
           <a:lstStyle/>
           <a:p>
-            <a:pPr indent="0" marL="0">
+            <a:pPr marL="0" indent="0">
               <a:buNone/>
             </a:pPr>
             <a:r>
@@ -3664,7 +3504,7 @@
 
 <file path=ppt/slides/slide11.xml><?xml version="1.0" encoding="utf-8"?>
 <p:sld xmlns:a="http://schemas.openxmlformats.org/drawingml/2006/main" xmlns:r="http://schemas.openxmlformats.org/officeDocument/2006/relationships" xmlns:p="http://schemas.openxmlformats.org/presentationml/2006/main">
-  <p:cSld name="Slide 11">
+  <p:cSld>
     <p:spTree>
       <p:nvGrpSpPr>
         <p:cNvPr id="1" name=""/>
@@ -3684,7 +3524,7 @@
           <p:cNvPr id="2" name="Text 0"/>
           <p:cNvSpPr/>
           <p:nvPr>
-            <p:ph idx="100" type="title" hasCustomPrompt="1"/>
+            <p:ph type="title" idx="100" hasCustomPrompt="1"/>
           </p:nvPr>
         </p:nvSpPr>
         <p:spPr>
@@ -3696,13 +3536,12 @@
             <a:avLst/>
           </a:prstGeom>
           <a:noFill/>
-          <a:ln/>
         </p:spPr>
         <p:txBody>
           <a:bodyPr wrap="square" rtlCol="0"/>
           <a:lstStyle/>
           <a:p>
-            <a:pPr algn="l" indent="0" marL="0">
+            <a:pPr marL="0" indent="0" algn="l">
               <a:buNone/>
             </a:pPr>
             <a:r>
@@ -3732,13 +3571,12 @@
             <a:avLst/>
           </a:prstGeom>
           <a:noFill/>
-          <a:ln/>
-        </p:spPr>
-        <p:txBody>
-          <a:bodyPr wrap="square" lIns="0" tIns="0" rIns="0" bIns="0" rtlCol="0" anchor="ctr"/>
-          <a:lstStyle/>
-          <a:p>
-            <a:pPr indent="0" marL="0">
+        </p:spPr>
+        <p:txBody>
+          <a:bodyPr wrap="square" lIns="0" tIns="0" rIns="0" bIns="0" rtlCol="0" anchor="ctr"/>
+          <a:lstStyle/>
+          <a:p>
+            <a:pPr marL="0" indent="0">
               <a:buNone/>
             </a:pPr>
             <a:r>
@@ -3795,13 +3633,12 @@
             <a:avLst/>
           </a:prstGeom>
           <a:noFill/>
-          <a:ln/>
-        </p:spPr>
-        <p:txBody>
-          <a:bodyPr wrap="square" lIns="0" tIns="0" rIns="0" bIns="0" rtlCol="0" anchor="ctr"/>
-          <a:lstStyle/>
-          <a:p>
-            <a:pPr indent="0" marL="0">
+        </p:spPr>
+        <p:txBody>
+          <a:bodyPr wrap="square" lIns="0" tIns="0" rIns="0" bIns="0" rtlCol="0" anchor="ctr"/>
+          <a:lstStyle/>
+          <a:p>
+            <a:pPr marL="0" indent="0">
               <a:buNone/>
             </a:pPr>
             <a:r>
@@ -3831,13 +3668,12 @@
             <a:avLst/>
           </a:prstGeom>
           <a:noFill/>
-          <a:ln/>
-        </p:spPr>
-        <p:txBody>
-          <a:bodyPr wrap="square" lIns="0" tIns="0" rIns="0" bIns="0" rtlCol="0" anchor="ctr"/>
-          <a:lstStyle/>
-          <a:p>
-            <a:pPr algn="r" indent="0" marL="0">
+        </p:spPr>
+        <p:txBody>
+          <a:bodyPr wrap="square" lIns="0" tIns="0" rIns="0" bIns="0" rtlCol="0" anchor="ctr"/>
+          <a:lstStyle/>
+          <a:p>
+            <a:pPr marL="0" indent="0" algn="r">
               <a:buNone/>
             </a:pPr>
             <a:r>
@@ -3894,13 +3730,12 @@
             <a:avLst/>
           </a:prstGeom>
           <a:noFill/>
-          <a:ln/>
-        </p:spPr>
-        <p:txBody>
-          <a:bodyPr wrap="square" lIns="0" tIns="0" rIns="0" bIns="0" rtlCol="0" anchor="ctr"/>
-          <a:lstStyle/>
-          <a:p>
-            <a:pPr indent="0" marL="0">
+        </p:spPr>
+        <p:txBody>
+          <a:bodyPr wrap="square" lIns="0" tIns="0" rIns="0" bIns="0" rtlCol="0" anchor="ctr"/>
+          <a:lstStyle/>
+          <a:p>
+            <a:pPr marL="0" indent="0">
               <a:buNone/>
             </a:pPr>
             <a:r>
@@ -3930,13 +3765,12 @@
             <a:avLst/>
           </a:prstGeom>
           <a:noFill/>
-          <a:ln/>
-        </p:spPr>
-        <p:txBody>
-          <a:bodyPr wrap="square" lIns="0" tIns="0" rIns="0" bIns="0" rtlCol="0" anchor="ctr"/>
-          <a:lstStyle/>
-          <a:p>
-            <a:pPr algn="r" indent="0" marL="0">
+        </p:spPr>
+        <p:txBody>
+          <a:bodyPr wrap="square" lIns="0" tIns="0" rIns="0" bIns="0" rtlCol="0" anchor="ctr"/>
+          <a:lstStyle/>
+          <a:p>
+            <a:pPr marL="0" indent="0" algn="r">
               <a:buNone/>
             </a:pPr>
             <a:r>
@@ -3993,13 +3827,12 @@
             <a:avLst/>
           </a:prstGeom>
           <a:noFill/>
-          <a:ln/>
-        </p:spPr>
-        <p:txBody>
-          <a:bodyPr wrap="square" lIns="0" tIns="0" rIns="0" bIns="0" rtlCol="0" anchor="ctr"/>
-          <a:lstStyle/>
-          <a:p>
-            <a:pPr indent="0" marL="0">
+        </p:spPr>
+        <p:txBody>
+          <a:bodyPr wrap="square" lIns="0" tIns="0" rIns="0" bIns="0" rtlCol="0" anchor="ctr"/>
+          <a:lstStyle/>
+          <a:p>
+            <a:pPr marL="0" indent="0">
               <a:buNone/>
             </a:pPr>
             <a:r>
@@ -4029,13 +3862,12 @@
             <a:avLst/>
           </a:prstGeom>
           <a:noFill/>
-          <a:ln/>
-        </p:spPr>
-        <p:txBody>
-          <a:bodyPr wrap="square" lIns="0" tIns="0" rIns="0" bIns="0" rtlCol="0" anchor="ctr"/>
-          <a:lstStyle/>
-          <a:p>
-            <a:pPr algn="r" indent="0" marL="0">
+        </p:spPr>
+        <p:txBody>
+          <a:bodyPr wrap="square" lIns="0" tIns="0" rIns="0" bIns="0" rtlCol="0" anchor="ctr"/>
+          <a:lstStyle/>
+          <a:p>
+            <a:pPr marL="0" indent="0" algn="r">
               <a:buNone/>
             </a:pPr>
             <a:r>
@@ -4092,13 +3924,12 @@
             <a:avLst/>
           </a:prstGeom>
           <a:noFill/>
-          <a:ln/>
-        </p:spPr>
-        <p:txBody>
-          <a:bodyPr wrap="square" lIns="0" tIns="0" rIns="0" bIns="0" rtlCol="0" anchor="ctr"/>
-          <a:lstStyle/>
-          <a:p>
-            <a:pPr indent="0" marL="0">
+        </p:spPr>
+        <p:txBody>
+          <a:bodyPr wrap="square" lIns="0" tIns="0" rIns="0" bIns="0" rtlCol="0" anchor="ctr"/>
+          <a:lstStyle/>
+          <a:p>
+            <a:pPr marL="0" indent="0">
               <a:buNone/>
             </a:pPr>
             <a:r>
@@ -4128,13 +3959,12 @@
             <a:avLst/>
           </a:prstGeom>
           <a:noFill/>
-          <a:ln/>
-        </p:spPr>
-        <p:txBody>
-          <a:bodyPr wrap="square" lIns="0" tIns="0" rIns="0" bIns="0" rtlCol="0" anchor="ctr"/>
-          <a:lstStyle/>
-          <a:p>
-            <a:pPr algn="r" indent="0" marL="0">
+        </p:spPr>
+        <p:txBody>
+          <a:bodyPr wrap="square" lIns="0" tIns="0" rIns="0" bIns="0" rtlCol="0" anchor="ctr"/>
+          <a:lstStyle/>
+          <a:p>
+            <a:pPr marL="0" indent="0" algn="r">
               <a:buNone/>
             </a:pPr>
             <a:r>
@@ -4164,13 +3994,12 @@
             <a:avLst/>
           </a:prstGeom>
           <a:noFill/>
-          <a:ln/>
-        </p:spPr>
-        <p:txBody>
-          <a:bodyPr wrap="square" lIns="0" tIns="0" rIns="0" bIns="0" rtlCol="0" anchor="ctr"/>
-          <a:lstStyle/>
-          <a:p>
-            <a:pPr indent="0" marL="0">
+        </p:spPr>
+        <p:txBody>
+          <a:bodyPr wrap="square" lIns="0" tIns="0" rIns="0" bIns="0" rtlCol="0" anchor="ctr"/>
+          <a:lstStyle/>
+          <a:p>
+            <a:pPr marL="0" indent="0">
               <a:buNone/>
             </a:pPr>
             <a:r>
@@ -4227,13 +4056,12 @@
             <a:avLst/>
           </a:prstGeom>
           <a:noFill/>
-          <a:ln/>
-        </p:spPr>
-        <p:txBody>
-          <a:bodyPr wrap="square" lIns="0" tIns="0" rIns="0" bIns="0" rtlCol="0" anchor="ctr"/>
-          <a:lstStyle/>
-          <a:p>
-            <a:pPr indent="0" marL="0">
+        </p:spPr>
+        <p:txBody>
+          <a:bodyPr wrap="square" lIns="0" tIns="0" rIns="0" bIns="0" rtlCol="0" anchor="ctr"/>
+          <a:lstStyle/>
+          <a:p>
+            <a:pPr marL="0" indent="0">
               <a:buNone/>
             </a:pPr>
             <a:r>
@@ -4263,13 +4091,12 @@
             <a:avLst/>
           </a:prstGeom>
           <a:noFill/>
-          <a:ln/>
-        </p:spPr>
-        <p:txBody>
-          <a:bodyPr wrap="square" lIns="0" tIns="0" rIns="0" bIns="0" rtlCol="0" anchor="ctr"/>
-          <a:lstStyle/>
-          <a:p>
-            <a:pPr indent="0" marL="0">
+        </p:spPr>
+        <p:txBody>
+          <a:bodyPr wrap="square" lIns="0" tIns="0" rIns="0" bIns="0" rtlCol="0" anchor="ctr"/>
+          <a:lstStyle/>
+          <a:p>
+            <a:pPr marL="0" indent="0">
               <a:spcAft>
                 <a:spcPts val="800"/>
               </a:spcAft>
@@ -4280,16 +4107,16 @@
                 <a:solidFill>
                   <a:srgbClr val="FCA5A5"/>
                 </a:solidFill>
-                <a:latin typeface="Courier New" pitchFamily="34" charset="0"/>
-                <a:ea typeface="Courier New" pitchFamily="34" charset="-122"/>
-                <a:cs typeface="Courier New" pitchFamily="34" charset="-120"/>
+                <a:latin typeface="Courier New" panose="02070609020205020404" pitchFamily="34" charset="0"/>
+                <a:ea typeface="Courier New" panose="02070609020205020404" pitchFamily="34" charset="-122"/>
+                <a:cs typeface="Courier New" panose="02070609020205020404" pitchFamily="34" charset="-120"/>
               </a:rPr>
               <a:t>red commit   759989a  →  404</a:t>
             </a:r>
             <a:endParaRPr lang="en-US" sz="1300" dirty="0"/>
           </a:p>
           <a:p>
-            <a:pPr indent="0" marL="0">
+            <a:pPr marL="0" indent="0">
               <a:spcAft>
                 <a:spcPts val="800"/>
               </a:spcAft>
@@ -4300,16 +4127,16 @@
                 <a:solidFill>
                   <a:srgbClr val="86EFAC"/>
                 </a:solidFill>
-                <a:latin typeface="Courier New" pitchFamily="34" charset="0"/>
-                <a:ea typeface="Courier New" pitchFamily="34" charset="-122"/>
-                <a:cs typeface="Courier New" pitchFamily="34" charset="-120"/>
+                <a:latin typeface="Courier New" panose="02070609020205020404" pitchFamily="34" charset="0"/>
+                <a:ea typeface="Courier New" panose="02070609020205020404" pitchFamily="34" charset="-122"/>
+                <a:cs typeface="Courier New" panose="02070609020205020404" pitchFamily="34" charset="-120"/>
               </a:rPr>
               <a:t>green commit d142944  →  200</a:t>
             </a:r>
             <a:endParaRPr lang="en-US" sz="1300" dirty="0"/>
           </a:p>
           <a:p>
-            <a:pPr indent="0" marL="0">
+            <a:pPr marL="0" indent="0">
               <a:spcAft>
                 <a:spcPts val="800"/>
               </a:spcAft>
@@ -4320,16 +4147,16 @@
                 <a:solidFill>
                   <a:srgbClr val="7DD3FC"/>
                 </a:solidFill>
-                <a:latin typeface="Courier New" pitchFamily="34" charset="0"/>
-                <a:ea typeface="Courier New" pitchFamily="34" charset="-122"/>
-                <a:cs typeface="Courier New" pitchFamily="34" charset="-120"/>
+                <a:latin typeface="Courier New" panose="02070609020205020404" pitchFamily="34" charset="0"/>
+                <a:ea typeface="Courier New" panose="02070609020205020404" pitchFamily="34" charset="-122"/>
+                <a:cs typeface="Courier New" panose="02070609020205020404" pitchFamily="34" charset="-120"/>
               </a:rPr>
               <a:t>14 tags, every one a commit SHA</a:t>
             </a:r>
             <a:endParaRPr lang="en-US" sz="1300" dirty="0"/>
           </a:p>
           <a:p>
-            <a:pPr indent="0" marL="0">
+            <a:pPr marL="0" indent="0">
               <a:spcAft>
                 <a:spcPts val="800"/>
               </a:spcAft>
@@ -4340,9 +4167,9 @@
                 <a:solidFill>
                   <a:srgbClr val="7DD3FC"/>
                 </a:solidFill>
-                <a:latin typeface="Courier New" pitchFamily="34" charset="0"/>
-                <a:ea typeface="Courier New" pitchFamily="34" charset="-122"/>
-                <a:cs typeface="Courier New" pitchFamily="34" charset="-120"/>
+                <a:latin typeface="Courier New" panose="02070609020205020404" pitchFamily="34" charset="0"/>
+                <a:ea typeface="Courier New" panose="02070609020205020404" pitchFamily="34" charset="-122"/>
+                <a:cs typeface="Courier New" panose="02070609020205020404" pitchFamily="34" charset="-120"/>
               </a:rPr>
               <a:t>no "latest" tag anywhere</a:t>
             </a:r>
@@ -4365,13 +4192,12 @@
             <a:avLst/>
           </a:prstGeom>
           <a:noFill/>
-          <a:ln/>
-        </p:spPr>
-        <p:txBody>
-          <a:bodyPr wrap="square" lIns="0" tIns="0" rIns="0" bIns="0" rtlCol="0" anchor="ctr"/>
-          <a:lstStyle/>
-          <a:p>
-            <a:pPr indent="0" marL="0">
+        </p:spPr>
+        <p:txBody>
+          <a:bodyPr wrap="square" lIns="0" tIns="0" rIns="0" bIns="0" rtlCol="0" anchor="ctr"/>
+          <a:lstStyle/>
+          <a:p>
+            <a:pPr marL="0" indent="0">
               <a:buNone/>
             </a:pPr>
             <a:r>
@@ -4401,13 +4227,12 @@
             <a:avLst/>
           </a:prstGeom>
           <a:noFill/>
-          <a:ln/>
-        </p:spPr>
-        <p:txBody>
-          <a:bodyPr wrap="square" lIns="0" tIns="0" rIns="0" bIns="0" rtlCol="0" anchor="ctr"/>
-          <a:lstStyle/>
-          <a:p>
-            <a:pPr indent="0" marL="0">
+        </p:spPr>
+        <p:txBody>
+          <a:bodyPr wrap="square" lIns="0" tIns="0" rIns="0" bIns="0" rtlCol="0" anchor="ctr"/>
+          <a:lstStyle/>
+          <a:p>
+            <a:pPr marL="0" indent="0">
               <a:buNone/>
             </a:pPr>
             <a:r>
@@ -4440,11 +4265,6 @@
           <a:prstGeom prst="rect">
             <a:avLst/>
           </a:prstGeom>
-          <a:extLst>
-            <a:ext uri="{C572A759-6A51-4108-AA02-DFA0A04FC94B}">
-              <ma14:wrappingTextBoxFlag xmlns:ma14="http://schemas.microsoft.com/office/mac/drawingml/2011/main" val="0"/>
-            </a:ext>
-          </a:extLst>
         </p:spPr>
         <p:txBody>
           <a:bodyPr/>
@@ -4460,8 +4280,7 @@
           <a:p>
             <a:pPr algn="l"/>
             <a:fld id="{F7021451-1387-4CA6-816F-3879F97B5CBC}" type="slidenum">
-              <a:rPr b="0" lang="en-US"/>
-              <a:t>11</a:t>
+              <a:rPr lang="en-US" b="0"/>
             </a:fld>
             <a:endParaRPr lang="en-US"/>
           </a:p>
@@ -4477,7 +4296,7 @@
 
 <file path=ppt/slides/slide12.xml><?xml version="1.0" encoding="utf-8"?>
 <p:sld xmlns:a="http://schemas.openxmlformats.org/drawingml/2006/main" xmlns:r="http://schemas.openxmlformats.org/officeDocument/2006/relationships" xmlns:p="http://schemas.openxmlformats.org/presentationml/2006/main">
-  <p:cSld name="Slide 12">
+  <p:cSld>
     <p:spTree>
       <p:nvGrpSpPr>
         <p:cNvPr id="1" name=""/>
@@ -4497,7 +4316,7 @@
           <p:cNvPr id="2" name="Text 0"/>
           <p:cNvSpPr/>
           <p:nvPr>
-            <p:ph idx="100" type="title" hasCustomPrompt="1"/>
+            <p:ph type="title" idx="100" hasCustomPrompt="1"/>
           </p:nvPr>
         </p:nvSpPr>
         <p:spPr>
@@ -4509,13 +4328,12 @@
             <a:avLst/>
           </a:prstGeom>
           <a:noFill/>
-          <a:ln/>
         </p:spPr>
         <p:txBody>
           <a:bodyPr wrap="square" rtlCol="0"/>
           <a:lstStyle/>
           <a:p>
-            <a:pPr algn="l" indent="0" marL="0">
+            <a:pPr marL="0" indent="0" algn="l">
               <a:buNone/>
             </a:pPr>
             <a:r>
@@ -4532,7 +4350,7 @@
       </p:sp>
       <p:pic>
         <p:nvPicPr>
-          <p:cNvPr id="3" name="Image 0" descr="/Users/aman/Desktop/devops-heros/helpdesk-capstone/docs/screenshots/ghcr-package-sha-tags.jpg">    </p:cNvPr>
+          <p:cNvPr id="3" name="Image 0" descr="/Users/aman/Desktop/devops-heros/helpdesk-capstone/docs/screenshots/ghcr-package-sha-tags.jpg"/>
           <p:cNvPicPr>
             <a:picLocks noChangeAspect="1"/>
           </p:cNvPicPr>
@@ -4569,13 +4387,12 @@
             <a:avLst/>
           </a:prstGeom>
           <a:noFill/>
-          <a:ln/>
-        </p:spPr>
-        <p:txBody>
-          <a:bodyPr wrap="square" lIns="0" tIns="0" rIns="0" bIns="0" rtlCol="0" anchor="ctr"/>
-          <a:lstStyle/>
-          <a:p>
-            <a:pPr indent="0" marL="0">
+        </p:spPr>
+        <p:txBody>
+          <a:bodyPr wrap="square" lIns="0" tIns="0" rIns="0" bIns="0" rtlCol="0" anchor="ctr"/>
+          <a:lstStyle/>
+          <a:p>
+            <a:pPr marL="0" indent="0">
               <a:buNone/>
             </a:pPr>
             <a:r>
@@ -4632,13 +4449,12 @@
             <a:avLst/>
           </a:prstGeom>
           <a:noFill/>
-          <a:ln/>
-        </p:spPr>
-        <p:txBody>
-          <a:bodyPr wrap="square" lIns="0" tIns="0" rIns="0" bIns="0" rtlCol="0" anchor="ctr"/>
-          <a:lstStyle/>
-          <a:p>
-            <a:pPr indent="0" marL="0">
+        </p:spPr>
+        <p:txBody>
+          <a:bodyPr wrap="square" lIns="0" tIns="0" rIns="0" bIns="0" rtlCol="0" anchor="ctr"/>
+          <a:lstStyle/>
+          <a:p>
+            <a:pPr marL="0" indent="0">
               <a:buNone/>
             </a:pPr>
             <a:r>
@@ -4668,13 +4484,12 @@
             <a:avLst/>
           </a:prstGeom>
           <a:noFill/>
-          <a:ln/>
-        </p:spPr>
-        <p:txBody>
-          <a:bodyPr wrap="square" lIns="0" tIns="0" rIns="0" bIns="0" rtlCol="0" anchor="ctr"/>
-          <a:lstStyle/>
-          <a:p>
-            <a:pPr indent="0" marL="0">
+        </p:spPr>
+        <p:txBody>
+          <a:bodyPr wrap="square" lIns="0" tIns="0" rIns="0" bIns="0" rtlCol="0" anchor="ctr"/>
+          <a:lstStyle/>
+          <a:p>
+            <a:pPr marL="0" indent="0">
               <a:buNone/>
             </a:pPr>
             <a:r>
@@ -4731,13 +4546,12 @@
             <a:avLst/>
           </a:prstGeom>
           <a:noFill/>
-          <a:ln/>
-        </p:spPr>
-        <p:txBody>
-          <a:bodyPr wrap="square" lIns="0" tIns="0" rIns="0" bIns="0" rtlCol="0" anchor="ctr"/>
-          <a:lstStyle/>
-          <a:p>
-            <a:pPr indent="0" marL="0">
+        </p:spPr>
+        <p:txBody>
+          <a:bodyPr wrap="square" lIns="0" tIns="0" rIns="0" bIns="0" rtlCol="0" anchor="ctr"/>
+          <a:lstStyle/>
+          <a:p>
+            <a:pPr marL="0" indent="0">
               <a:buNone/>
             </a:pPr>
             <a:r>
@@ -4767,13 +4581,12 @@
             <a:avLst/>
           </a:prstGeom>
           <a:noFill/>
-          <a:ln/>
-        </p:spPr>
-        <p:txBody>
-          <a:bodyPr wrap="square" lIns="0" tIns="0" rIns="0" bIns="0" rtlCol="0" anchor="ctr"/>
-          <a:lstStyle/>
-          <a:p>
-            <a:pPr indent="0" marL="0">
+        </p:spPr>
+        <p:txBody>
+          <a:bodyPr wrap="square" lIns="0" tIns="0" rIns="0" bIns="0" rtlCol="0" anchor="ctr"/>
+          <a:lstStyle/>
+          <a:p>
+            <a:pPr marL="0" indent="0">
               <a:buNone/>
             </a:pPr>
             <a:r>
@@ -4830,13 +4643,12 @@
             <a:avLst/>
           </a:prstGeom>
           <a:noFill/>
-          <a:ln/>
-        </p:spPr>
-        <p:txBody>
-          <a:bodyPr wrap="square" lIns="0" tIns="0" rIns="0" bIns="0" rtlCol="0" anchor="ctr"/>
-          <a:lstStyle/>
-          <a:p>
-            <a:pPr indent="0" marL="0">
+        </p:spPr>
+        <p:txBody>
+          <a:bodyPr wrap="square" lIns="0" tIns="0" rIns="0" bIns="0" rtlCol="0" anchor="ctr"/>
+          <a:lstStyle/>
+          <a:p>
+            <a:pPr marL="0" indent="0">
               <a:buNone/>
             </a:pPr>
             <a:r>
@@ -4866,13 +4678,12 @@
             <a:avLst/>
           </a:prstGeom>
           <a:noFill/>
-          <a:ln/>
-        </p:spPr>
-        <p:txBody>
-          <a:bodyPr wrap="square" lIns="0" tIns="0" rIns="0" bIns="0" rtlCol="0" anchor="ctr"/>
-          <a:lstStyle/>
-          <a:p>
-            <a:pPr indent="0" marL="0">
+        </p:spPr>
+        <p:txBody>
+          <a:bodyPr wrap="square" lIns="0" tIns="0" rIns="0" bIns="0" rtlCol="0" anchor="ctr"/>
+          <a:lstStyle/>
+          <a:p>
+            <a:pPr marL="0" indent="0">
               <a:buNone/>
             </a:pPr>
             <a:r>
@@ -4905,11 +4716,6 @@
           <a:prstGeom prst="rect">
             <a:avLst/>
           </a:prstGeom>
-          <a:extLst>
-            <a:ext uri="{C572A759-6A51-4108-AA02-DFA0A04FC94B}">
-              <ma14:wrappingTextBoxFlag xmlns:ma14="http://schemas.microsoft.com/office/mac/drawingml/2011/main" val="0"/>
-            </a:ext>
-          </a:extLst>
         </p:spPr>
         <p:txBody>
           <a:bodyPr/>
@@ -4925,8 +4731,7 @@
           <a:p>
             <a:pPr algn="l"/>
             <a:fld id="{F7021451-1387-4CA6-816F-3879F97B5CBC}" type="slidenum">
-              <a:rPr b="0" lang="en-US"/>
-              <a:t>12</a:t>
+              <a:rPr lang="en-US" b="0"/>
             </a:fld>
             <a:endParaRPr lang="en-US"/>
           </a:p>
@@ -4942,7 +4747,7 @@
 
 <file path=ppt/slides/slide13.xml><?xml version="1.0" encoding="utf-8"?>
 <p:sld xmlns:a="http://schemas.openxmlformats.org/drawingml/2006/main" xmlns:r="http://schemas.openxmlformats.org/officeDocument/2006/relationships" xmlns:p="http://schemas.openxmlformats.org/presentationml/2006/main">
-  <p:cSld name="Slide 13">
+  <p:cSld>
     <p:spTree>
       <p:nvGrpSpPr>
         <p:cNvPr id="1" name=""/>
@@ -4962,7 +4767,7 @@
           <p:cNvPr id="2" name="Text 0"/>
           <p:cNvSpPr/>
           <p:nvPr>
-            <p:ph idx="100" type="title" hasCustomPrompt="1"/>
+            <p:ph type="title" idx="100" hasCustomPrompt="1"/>
           </p:nvPr>
         </p:nvSpPr>
         <p:spPr>
@@ -4974,13 +4779,12 @@
             <a:avLst/>
           </a:prstGeom>
           <a:noFill/>
-          <a:ln/>
         </p:spPr>
         <p:txBody>
           <a:bodyPr wrap="square" rtlCol="0"/>
           <a:lstStyle/>
           <a:p>
-            <a:pPr algn="l" indent="0" marL="0">
+            <a:pPr marL="0" indent="0" algn="l">
               <a:buNone/>
             </a:pPr>
             <a:r>
@@ -5037,13 +4841,12 @@
             <a:avLst/>
           </a:prstGeom>
           <a:noFill/>
-          <a:ln/>
-        </p:spPr>
-        <p:txBody>
-          <a:bodyPr wrap="square" lIns="0" tIns="0" rIns="0" bIns="0" rtlCol="0" anchor="ctr"/>
-          <a:lstStyle/>
-          <a:p>
-            <a:pPr indent="0" marL="0">
+        </p:spPr>
+        <p:txBody>
+          <a:bodyPr wrap="square" lIns="0" tIns="0" rIns="0" bIns="0" rtlCol="0" anchor="ctr"/>
+          <a:lstStyle/>
+          <a:p>
+            <a:pPr marL="0" indent="0">
               <a:buNone/>
             </a:pPr>
             <a:r>
@@ -5073,13 +4876,12 @@
             <a:avLst/>
           </a:prstGeom>
           <a:noFill/>
-          <a:ln/>
-        </p:spPr>
-        <p:txBody>
-          <a:bodyPr wrap="square" lIns="0" tIns="0" rIns="0" bIns="0" rtlCol="0" anchor="ctr"/>
-          <a:lstStyle/>
-          <a:p>
-            <a:pPr indent="0" marL="0">
+        </p:spPr>
+        <p:txBody>
+          <a:bodyPr wrap="square" lIns="0" tIns="0" rIns="0" bIns="0" rtlCol="0" anchor="ctr"/>
+          <a:lstStyle/>
+          <a:p>
+            <a:pPr marL="0" indent="0">
               <a:buNone/>
             </a:pPr>
             <a:r>
@@ -5109,13 +4911,12 @@
             <a:avLst/>
           </a:prstGeom>
           <a:noFill/>
-          <a:ln/>
-        </p:spPr>
-        <p:txBody>
-          <a:bodyPr wrap="square" lIns="0" tIns="0" rIns="0" bIns="0" rtlCol="0" anchor="ctr"/>
-          <a:lstStyle/>
-          <a:p>
-            <a:pPr indent="0" marL="0">
+        </p:spPr>
+        <p:txBody>
+          <a:bodyPr wrap="square" lIns="0" tIns="0" rIns="0" bIns="0" rtlCol="0" anchor="ctr"/>
+          <a:lstStyle/>
+          <a:p>
+            <a:pPr marL="0" indent="0">
               <a:buNone/>
             </a:pPr>
             <a:r>
@@ -5129,7 +4930,7 @@
             <a:endParaRPr lang="en-US" sz="1200" dirty="0"/>
           </a:p>
           <a:p>
-            <a:pPr indent="0" marL="0">
+            <a:pPr marL="0" indent="0">
               <a:buNone/>
             </a:pPr>
             <a:r>
@@ -5186,13 +4987,12 @@
             <a:avLst/>
           </a:prstGeom>
           <a:noFill/>
-          <a:ln/>
-        </p:spPr>
-        <p:txBody>
-          <a:bodyPr wrap="square" lIns="0" tIns="0" rIns="0" bIns="0" rtlCol="0" anchor="ctr"/>
-          <a:lstStyle/>
-          <a:p>
-            <a:pPr indent="0" marL="0">
+        </p:spPr>
+        <p:txBody>
+          <a:bodyPr wrap="square" lIns="0" tIns="0" rIns="0" bIns="0" rtlCol="0" anchor="ctr"/>
+          <a:lstStyle/>
+          <a:p>
+            <a:pPr marL="0" indent="0">
               <a:buNone/>
             </a:pPr>
             <a:r>
@@ -5222,13 +5022,12 @@
             <a:avLst/>
           </a:prstGeom>
           <a:noFill/>
-          <a:ln/>
-        </p:spPr>
-        <p:txBody>
-          <a:bodyPr wrap="square" lIns="0" tIns="0" rIns="0" bIns="0" rtlCol="0" anchor="ctr"/>
-          <a:lstStyle/>
-          <a:p>
-            <a:pPr indent="0" marL="0">
+        </p:spPr>
+        <p:txBody>
+          <a:bodyPr wrap="square" lIns="0" tIns="0" rIns="0" bIns="0" rtlCol="0" anchor="ctr"/>
+          <a:lstStyle/>
+          <a:p>
+            <a:pPr marL="0" indent="0">
               <a:buNone/>
             </a:pPr>
             <a:r>
@@ -5258,13 +5057,12 @@
             <a:avLst/>
           </a:prstGeom>
           <a:noFill/>
-          <a:ln/>
-        </p:spPr>
-        <p:txBody>
-          <a:bodyPr wrap="square" lIns="0" tIns="0" rIns="0" bIns="0" rtlCol="0" anchor="ctr"/>
-          <a:lstStyle/>
-          <a:p>
-            <a:pPr indent="0" marL="0">
+        </p:spPr>
+        <p:txBody>
+          <a:bodyPr wrap="square" lIns="0" tIns="0" rIns="0" bIns="0" rtlCol="0" anchor="ctr"/>
+          <a:lstStyle/>
+          <a:p>
+            <a:pPr marL="0" indent="0">
               <a:buNone/>
             </a:pPr>
             <a:r>
@@ -5278,7 +5076,7 @@
             <a:endParaRPr lang="en-US" sz="1200" dirty="0"/>
           </a:p>
           <a:p>
-            <a:pPr indent="0" marL="0">
+            <a:pPr marL="0" indent="0">
               <a:buNone/>
             </a:pPr>
             <a:r>
@@ -5335,13 +5133,12 @@
             <a:avLst/>
           </a:prstGeom>
           <a:noFill/>
-          <a:ln/>
-        </p:spPr>
-        <p:txBody>
-          <a:bodyPr wrap="square" lIns="0" tIns="0" rIns="0" bIns="0" rtlCol="0" anchor="ctr"/>
-          <a:lstStyle/>
-          <a:p>
-            <a:pPr indent="0" marL="0">
+        </p:spPr>
+        <p:txBody>
+          <a:bodyPr wrap="square" lIns="0" tIns="0" rIns="0" bIns="0" rtlCol="0" anchor="ctr"/>
+          <a:lstStyle/>
+          <a:p>
+            <a:pPr marL="0" indent="0">
               <a:buNone/>
             </a:pPr>
             <a:r>
@@ -5371,7 +5168,6 @@
             <a:avLst/>
           </a:prstGeom>
           <a:noFill/>
-          <a:ln/>
         </p:spPr>
         <p:txBody>
           <a:bodyPr wrap="square" lIns="0" tIns="0" rIns="0" bIns="0" rtlCol="0" anchor="ctr"/>
@@ -5465,13 +5261,12 @@
             <a:avLst/>
           </a:prstGeom>
           <a:noFill/>
-          <a:ln/>
-        </p:spPr>
-        <p:txBody>
-          <a:bodyPr wrap="square" lIns="0" tIns="0" rIns="0" bIns="0" rtlCol="0" anchor="ctr"/>
-          <a:lstStyle/>
-          <a:p>
-            <a:pPr indent="0" marL="0">
+        </p:spPr>
+        <p:txBody>
+          <a:bodyPr wrap="square" lIns="0" tIns="0" rIns="0" bIns="0" rtlCol="0" anchor="ctr"/>
+          <a:lstStyle/>
+          <a:p>
+            <a:pPr marL="0" indent="0">
               <a:buNone/>
             </a:pPr>
             <a:r>
@@ -5504,11 +5299,6 @@
           <a:prstGeom prst="rect">
             <a:avLst/>
           </a:prstGeom>
-          <a:extLst>
-            <a:ext uri="{C572A759-6A51-4108-AA02-DFA0A04FC94B}">
-              <ma14:wrappingTextBoxFlag xmlns:ma14="http://schemas.microsoft.com/office/mac/drawingml/2011/main" val="0"/>
-            </a:ext>
-          </a:extLst>
         </p:spPr>
         <p:txBody>
           <a:bodyPr/>
@@ -5524,8 +5314,7 @@
           <a:p>
             <a:pPr algn="l"/>
             <a:fld id="{F7021451-1387-4CA6-816F-3879F97B5CBC}" type="slidenum">
-              <a:rPr b="0" lang="en-US"/>
-              <a:t>13</a:t>
+              <a:rPr lang="en-US" b="0"/>
             </a:fld>
             <a:endParaRPr lang="en-US"/>
           </a:p>
@@ -5541,7 +5330,7 @@
 
 <file path=ppt/slides/slide14.xml><?xml version="1.0" encoding="utf-8"?>
 <p:sld xmlns:a="http://schemas.openxmlformats.org/drawingml/2006/main" xmlns:r="http://schemas.openxmlformats.org/officeDocument/2006/relationships" xmlns:p="http://schemas.openxmlformats.org/presentationml/2006/main">
-  <p:cSld name="Slide 14">
+  <p:cSld>
     <p:spTree>
       <p:nvGrpSpPr>
         <p:cNvPr id="1" name=""/>
@@ -5561,7 +5350,7 @@
           <p:cNvPr id="2" name="Text 0"/>
           <p:cNvSpPr/>
           <p:nvPr>
-            <p:ph idx="100" type="title" hasCustomPrompt="1"/>
+            <p:ph type="title" idx="100" hasCustomPrompt="1"/>
           </p:nvPr>
         </p:nvSpPr>
         <p:spPr>
@@ -5573,13 +5362,12 @@
             <a:avLst/>
           </a:prstGeom>
           <a:noFill/>
-          <a:ln/>
         </p:spPr>
         <p:txBody>
           <a:bodyPr wrap="square" rtlCol="0"/>
           <a:lstStyle/>
           <a:p>
-            <a:pPr algn="l" indent="0" marL="0">
+            <a:pPr marL="0" indent="0" algn="l">
               <a:buNone/>
             </a:pPr>
             <a:r>
@@ -5636,13 +5424,12 @@
             <a:avLst/>
           </a:prstGeom>
           <a:noFill/>
-          <a:ln/>
-        </p:spPr>
-        <p:txBody>
-          <a:bodyPr wrap="square" lIns="0" tIns="0" rIns="0" bIns="0" rtlCol="0" anchor="ctr"/>
-          <a:lstStyle/>
-          <a:p>
-            <a:pPr indent="0" marL="0">
+        </p:spPr>
+        <p:txBody>
+          <a:bodyPr wrap="square" lIns="0" tIns="0" rIns="0" bIns="0" rtlCol="0" anchor="ctr"/>
+          <a:lstStyle/>
+          <a:p>
+            <a:pPr marL="0" indent="0">
               <a:buNone/>
             </a:pPr>
             <a:r>
@@ -5672,13 +5459,12 @@
             <a:avLst/>
           </a:prstGeom>
           <a:noFill/>
-          <a:ln/>
-        </p:spPr>
-        <p:txBody>
-          <a:bodyPr wrap="square" lIns="0" tIns="0" rIns="0" bIns="0" rtlCol="0" anchor="ctr"/>
-          <a:lstStyle/>
-          <a:p>
-            <a:pPr indent="0" marL="0">
+        </p:spPr>
+        <p:txBody>
+          <a:bodyPr wrap="square" lIns="0" tIns="0" rIns="0" bIns="0" rtlCol="0" anchor="ctr"/>
+          <a:lstStyle/>
+          <a:p>
+            <a:pPr marL="0" indent="0">
               <a:buNone/>
             </a:pPr>
             <a:r>
@@ -5735,13 +5521,12 @@
             <a:avLst/>
           </a:prstGeom>
           <a:noFill/>
-          <a:ln/>
-        </p:spPr>
-        <p:txBody>
-          <a:bodyPr wrap="square" lIns="0" tIns="0" rIns="0" bIns="0" rtlCol="0" anchor="ctr"/>
-          <a:lstStyle/>
-          <a:p>
-            <a:pPr indent="0" marL="0">
+        </p:spPr>
+        <p:txBody>
+          <a:bodyPr wrap="square" lIns="0" tIns="0" rIns="0" bIns="0" rtlCol="0" anchor="ctr"/>
+          <a:lstStyle/>
+          <a:p>
+            <a:pPr marL="0" indent="0">
               <a:buNone/>
             </a:pPr>
             <a:r>
@@ -5771,13 +5556,12 @@
             <a:avLst/>
           </a:prstGeom>
           <a:noFill/>
-          <a:ln/>
-        </p:spPr>
-        <p:txBody>
-          <a:bodyPr wrap="square" lIns="0" tIns="0" rIns="0" bIns="0" rtlCol="0" anchor="ctr"/>
-          <a:lstStyle/>
-          <a:p>
-            <a:pPr indent="0" marL="0">
+        </p:spPr>
+        <p:txBody>
+          <a:bodyPr wrap="square" lIns="0" tIns="0" rIns="0" bIns="0" rtlCol="0" anchor="ctr"/>
+          <a:lstStyle/>
+          <a:p>
+            <a:pPr marL="0" indent="0">
               <a:buNone/>
             </a:pPr>
             <a:r>
@@ -5834,13 +5618,12 @@
             <a:avLst/>
           </a:prstGeom>
           <a:noFill/>
-          <a:ln/>
-        </p:spPr>
-        <p:txBody>
-          <a:bodyPr wrap="square" lIns="0" tIns="0" rIns="0" bIns="0" rtlCol="0" anchor="ctr"/>
-          <a:lstStyle/>
-          <a:p>
-            <a:pPr indent="0" marL="0">
+        </p:spPr>
+        <p:txBody>
+          <a:bodyPr wrap="square" lIns="0" tIns="0" rIns="0" bIns="0" rtlCol="0" anchor="ctr"/>
+          <a:lstStyle/>
+          <a:p>
+            <a:pPr marL="0" indent="0">
               <a:buNone/>
             </a:pPr>
             <a:r>
@@ -5870,13 +5653,12 @@
             <a:avLst/>
           </a:prstGeom>
           <a:noFill/>
-          <a:ln/>
-        </p:spPr>
-        <p:txBody>
-          <a:bodyPr wrap="square" lIns="0" tIns="0" rIns="0" bIns="0" rtlCol="0" anchor="ctr"/>
-          <a:lstStyle/>
-          <a:p>
-            <a:pPr indent="0" marL="0">
+        </p:spPr>
+        <p:txBody>
+          <a:bodyPr wrap="square" lIns="0" tIns="0" rIns="0" bIns="0" rtlCol="0" anchor="ctr"/>
+          <a:lstStyle/>
+          <a:p>
+            <a:pPr marL="0" indent="0">
               <a:buNone/>
             </a:pPr>
             <a:r>
@@ -5933,13 +5715,12 @@
             <a:avLst/>
           </a:prstGeom>
           <a:noFill/>
-          <a:ln/>
-        </p:spPr>
-        <p:txBody>
-          <a:bodyPr wrap="square" lIns="0" tIns="0" rIns="0" bIns="0" rtlCol="0" anchor="ctr"/>
-          <a:lstStyle/>
-          <a:p>
-            <a:pPr indent="0" marL="0">
+        </p:spPr>
+        <p:txBody>
+          <a:bodyPr wrap="square" lIns="0" tIns="0" rIns="0" bIns="0" rtlCol="0" anchor="ctr"/>
+          <a:lstStyle/>
+          <a:p>
+            <a:pPr marL="0" indent="0">
               <a:buNone/>
             </a:pPr>
             <a:r>
@@ -5969,13 +5750,12 @@
             <a:avLst/>
           </a:prstGeom>
           <a:noFill/>
-          <a:ln/>
-        </p:spPr>
-        <p:txBody>
-          <a:bodyPr wrap="square" lIns="0" tIns="0" rIns="0" bIns="0" rtlCol="0" anchor="ctr"/>
-          <a:lstStyle/>
-          <a:p>
-            <a:pPr indent="0" marL="0">
+        </p:spPr>
+        <p:txBody>
+          <a:bodyPr wrap="square" lIns="0" tIns="0" rIns="0" bIns="0" rtlCol="0" anchor="ctr"/>
+          <a:lstStyle/>
+          <a:p>
+            <a:pPr marL="0" indent="0">
               <a:buNone/>
             </a:pPr>
             <a:r>
@@ -6032,13 +5812,12 @@
             <a:avLst/>
           </a:prstGeom>
           <a:noFill/>
-          <a:ln/>
-        </p:spPr>
-        <p:txBody>
-          <a:bodyPr wrap="square" lIns="0" tIns="0" rIns="0" bIns="0" rtlCol="0" anchor="ctr"/>
-          <a:lstStyle/>
-          <a:p>
-            <a:pPr indent="0" marL="0">
+        </p:spPr>
+        <p:txBody>
+          <a:bodyPr wrap="square" lIns="0" tIns="0" rIns="0" bIns="0" rtlCol="0" anchor="ctr"/>
+          <a:lstStyle/>
+          <a:p>
+            <a:pPr marL="0" indent="0">
               <a:buNone/>
             </a:pPr>
             <a:r>
@@ -6068,13 +5847,12 @@
             <a:avLst/>
           </a:prstGeom>
           <a:noFill/>
-          <a:ln/>
-        </p:spPr>
-        <p:txBody>
-          <a:bodyPr wrap="square" lIns="0" tIns="0" rIns="0" bIns="0" rtlCol="0" anchor="ctr"/>
-          <a:lstStyle/>
-          <a:p>
-            <a:pPr indent="0" marL="0">
+        </p:spPr>
+        <p:txBody>
+          <a:bodyPr wrap="square" lIns="0" tIns="0" rIns="0" bIns="0" rtlCol="0" anchor="ctr"/>
+          <a:lstStyle/>
+          <a:p>
+            <a:pPr marL="0" indent="0">
               <a:buNone/>
             </a:pPr>
             <a:r>
@@ -6091,7 +5869,7 @@
       </p:sp>
       <p:pic>
         <p:nvPicPr>
-          <p:cNvPr id="18" name="Image 0" descr="/Users/aman/Desktop/devops-heros/helpdesk-capstone/docs/screenshots/kubernetes-ingress-app.jpg">    </p:cNvPr>
+          <p:cNvPr id="18" name="Image 0" descr="/Users/aman/Desktop/devops-heros/helpdesk-capstone/docs/screenshots/kubernetes-ingress-app.jpg"/>
           <p:cNvPicPr>
             <a:picLocks noChangeAspect="1"/>
           </p:cNvPicPr>
@@ -6128,13 +5906,12 @@
             <a:avLst/>
           </a:prstGeom>
           <a:noFill/>
-          <a:ln/>
-        </p:spPr>
-        <p:txBody>
-          <a:bodyPr wrap="square" lIns="0" tIns="0" rIns="0" bIns="0" rtlCol="0" anchor="ctr"/>
-          <a:lstStyle/>
-          <a:p>
-            <a:pPr indent="0" marL="0">
+        </p:spPr>
+        <p:txBody>
+          <a:bodyPr wrap="square" lIns="0" tIns="0" rIns="0" bIns="0" rtlCol="0" anchor="ctr"/>
+          <a:lstStyle/>
+          <a:p>
+            <a:pPr marL="0" indent="0">
               <a:buNone/>
             </a:pPr>
             <a:r>
@@ -6191,13 +5968,12 @@
             <a:avLst/>
           </a:prstGeom>
           <a:noFill/>
-          <a:ln/>
-        </p:spPr>
-        <p:txBody>
-          <a:bodyPr wrap="square" lIns="0" tIns="0" rIns="0" bIns="0" rtlCol="0" anchor="ctr"/>
-          <a:lstStyle/>
-          <a:p>
-            <a:pPr indent="0" marL="0">
+        </p:spPr>
+        <p:txBody>
+          <a:bodyPr wrap="square" lIns="0" tIns="0" rIns="0" bIns="0" rtlCol="0" anchor="ctr"/>
+          <a:lstStyle/>
+          <a:p>
+            <a:pPr marL="0" indent="0">
               <a:buNone/>
             </a:pPr>
             <a:r>
@@ -6227,13 +6003,12 @@
             <a:avLst/>
           </a:prstGeom>
           <a:noFill/>
-          <a:ln/>
-        </p:spPr>
-        <p:txBody>
-          <a:bodyPr wrap="square" lIns="0" tIns="0" rIns="0" bIns="0" rtlCol="0" anchor="ctr"/>
-          <a:lstStyle/>
-          <a:p>
-            <a:pPr indent="0" marL="0">
+        </p:spPr>
+        <p:txBody>
+          <a:bodyPr wrap="square" lIns="0" tIns="0" rIns="0" bIns="0" rtlCol="0" anchor="ctr"/>
+          <a:lstStyle/>
+          <a:p>
+            <a:pPr marL="0" indent="0">
               <a:spcAft>
                 <a:spcPts val="800"/>
               </a:spcAft>
@@ -6244,16 +6019,16 @@
                 <a:solidFill>
                   <a:srgbClr val="86EFAC"/>
                 </a:solidFill>
-                <a:latin typeface="Courier New" pitchFamily="34" charset="0"/>
-                <a:ea typeface="Courier New" pitchFamily="34" charset="-122"/>
-                <a:cs typeface="Courier New" pitchFamily="34" charset="-120"/>
+                <a:latin typeface="Courier New" panose="02070609020205020404" pitchFamily="34" charset="0"/>
+                <a:ea typeface="Courier New" panose="02070609020205020404" pitchFamily="34" charset="-122"/>
+                <a:cs typeface="Courier New" panose="02070609020205020404" pitchFamily="34" charset="-120"/>
               </a:rPr>
               <a:t>POST a ticket through the Ingress → 201</a:t>
             </a:r>
             <a:endParaRPr lang="en-US" sz="1200" dirty="0"/>
           </a:p>
           <a:p>
-            <a:pPr indent="0" marL="0">
+            <a:pPr marL="0" indent="0">
               <a:spcAft>
                 <a:spcPts val="800"/>
               </a:spcAft>
@@ -6264,16 +6039,16 @@
                 <a:solidFill>
                   <a:srgbClr val="FCA5A5"/>
                 </a:solidFill>
-                <a:latin typeface="Courier New" pitchFamily="34" charset="0"/>
-                <a:ea typeface="Courier New" pitchFamily="34" charset="-122"/>
-                <a:cs typeface="Courier New" pitchFamily="34" charset="-120"/>
+                <a:latin typeface="Courier New" panose="02070609020205020404" pitchFamily="34" charset="0"/>
+                <a:ea typeface="Courier New" panose="02070609020205020404" pitchFamily="34" charset="-122"/>
+                <a:cs typeface="Courier New" panose="02070609020205020404" pitchFamily="34" charset="-120"/>
               </a:rPr>
               <a:t>delete BOTH backend pods</a:t>
             </a:r>
             <a:endParaRPr lang="en-US" sz="1200" dirty="0"/>
           </a:p>
           <a:p>
-            <a:pPr indent="0" marL="0">
+            <a:pPr marL="0" indent="0">
               <a:spcAft>
                 <a:spcPts val="800"/>
               </a:spcAft>
@@ -6284,16 +6059,16 @@
                 <a:solidFill>
                   <a:srgbClr val="86EFAC"/>
                 </a:solidFill>
-                <a:latin typeface="Courier New" pitchFamily="34" charset="0"/>
-                <a:ea typeface="Courier New" pitchFamily="34" charset="-122"/>
-                <a:cs typeface="Courier New" pitchFamily="34" charset="-120"/>
+                <a:latin typeface="Courier New" panose="02070609020205020404" pitchFamily="34" charset="0"/>
+                <a:ea typeface="Courier New" panose="02070609020205020404" pitchFamily="34" charset="-122"/>
+                <a:cs typeface="Courier New" panose="02070609020205020404" pitchFamily="34" charset="-120"/>
               </a:rPr>
               <a:t>read the same ticket back → still there</a:t>
             </a:r>
             <a:endParaRPr lang="en-US" sz="1200" dirty="0"/>
           </a:p>
           <a:p>
-            <a:pPr indent="0" marL="0">
+            <a:pPr marL="0" indent="0">
               <a:spcAft>
                 <a:spcPts val="800"/>
               </a:spcAft>
@@ -6304,9 +6079,9 @@
                 <a:solidFill>
                   <a:srgbClr val="7DD3FC"/>
                 </a:solidFill>
-                <a:latin typeface="Courier New" pitchFamily="34" charset="0"/>
-                <a:ea typeface="Courier New" pitchFamily="34" charset="-122"/>
-                <a:cs typeface="Courier New" pitchFamily="34" charset="-120"/>
+                <a:latin typeface="Courier New" panose="02070609020205020404" pitchFamily="34" charset="0"/>
+                <a:ea typeface="Courier New" panose="02070609020205020404" pitchFamily="34" charset="-122"/>
+                <a:cs typeface="Courier New" panose="02070609020205020404" pitchFamily="34" charset="-120"/>
               </a:rPr>
               <a:t>confirmed as a row via psql</a:t>
             </a:r>
@@ -6329,13 +6104,12 @@
             <a:avLst/>
           </a:prstGeom>
           <a:noFill/>
-          <a:ln/>
-        </p:spPr>
-        <p:txBody>
-          <a:bodyPr wrap="square" lIns="0" tIns="0" rIns="0" bIns="0" rtlCol="0" anchor="ctr"/>
-          <a:lstStyle/>
-          <a:p>
-            <a:pPr indent="0" marL="0">
+        </p:spPr>
+        <p:txBody>
+          <a:bodyPr wrap="square" lIns="0" tIns="0" rIns="0" bIns="0" rtlCol="0" anchor="ctr"/>
+          <a:lstStyle/>
+          <a:p>
+            <a:pPr marL="0" indent="0">
               <a:buNone/>
             </a:pPr>
             <a:r>
@@ -6368,11 +6142,6 @@
           <a:prstGeom prst="rect">
             <a:avLst/>
           </a:prstGeom>
-          <a:extLst>
-            <a:ext uri="{C572A759-6A51-4108-AA02-DFA0A04FC94B}">
-              <ma14:wrappingTextBoxFlag xmlns:ma14="http://schemas.microsoft.com/office/mac/drawingml/2011/main" val="0"/>
-            </a:ext>
-          </a:extLst>
         </p:spPr>
         <p:txBody>
           <a:bodyPr/>
@@ -6388,8 +6157,7 @@
           <a:p>
             <a:pPr algn="l"/>
             <a:fld id="{F7021451-1387-4CA6-816F-3879F97B5CBC}" type="slidenum">
-              <a:rPr b="0" lang="en-US"/>
-              <a:t>14</a:t>
+              <a:rPr lang="en-US" b="0"/>
             </a:fld>
             <a:endParaRPr lang="en-US"/>
           </a:p>
@@ -6405,7 +6173,7 @@
 
 <file path=ppt/slides/slide15.xml><?xml version="1.0" encoding="utf-8"?>
 <p:sld xmlns:a="http://schemas.openxmlformats.org/drawingml/2006/main" xmlns:r="http://schemas.openxmlformats.org/officeDocument/2006/relationships" xmlns:p="http://schemas.openxmlformats.org/presentationml/2006/main">
-  <p:cSld name="Slide 15">
+  <p:cSld>
     <p:spTree>
       <p:nvGrpSpPr>
         <p:cNvPr id="1" name=""/>
@@ -6425,7 +6193,7 @@
           <p:cNvPr id="2" name="Text 0"/>
           <p:cNvSpPr/>
           <p:nvPr>
-            <p:ph idx="100" type="title" hasCustomPrompt="1"/>
+            <p:ph type="title" idx="100" hasCustomPrompt="1"/>
           </p:nvPr>
         </p:nvSpPr>
         <p:spPr>
@@ -6437,13 +6205,12 @@
             <a:avLst/>
           </a:prstGeom>
           <a:noFill/>
-          <a:ln/>
         </p:spPr>
         <p:txBody>
           <a:bodyPr wrap="square" rtlCol="0"/>
           <a:lstStyle/>
           <a:p>
-            <a:pPr algn="l" indent="0" marL="0">
+            <a:pPr marL="0" indent="0" algn="l">
               <a:buNone/>
             </a:pPr>
             <a:r>
@@ -6473,13 +6240,12 @@
             <a:avLst/>
           </a:prstGeom>
           <a:noFill/>
-          <a:ln/>
-        </p:spPr>
-        <p:txBody>
-          <a:bodyPr wrap="square" lIns="0" tIns="0" rIns="0" bIns="0" rtlCol="0" anchor="ctr"/>
-          <a:lstStyle/>
-          <a:p>
-            <a:pPr indent="0" marL="0">
+        </p:spPr>
+        <p:txBody>
+          <a:bodyPr wrap="square" lIns="0" tIns="0" rIns="0" bIns="0" rtlCol="0" anchor="ctr"/>
+          <a:lstStyle/>
+          <a:p>
+            <a:pPr marL="0" indent="0">
               <a:buNone/>
             </a:pPr>
             <a:r>
@@ -6561,13 +6327,12 @@
             <a:avLst/>
           </a:prstGeom>
           <a:noFill/>
-          <a:ln/>
-        </p:spPr>
-        <p:txBody>
-          <a:bodyPr wrap="square" lIns="0" tIns="0" rIns="0" bIns="0" rtlCol="0" anchor="ctr"/>
-          <a:lstStyle/>
-          <a:p>
-            <a:pPr algn="ctr" indent="0" marL="0">
+        </p:spPr>
+        <p:txBody>
+          <a:bodyPr wrap="square" lIns="0" tIns="0" rIns="0" bIns="0" rtlCol="0" anchor="ctr"/>
+          <a:lstStyle/>
+          <a:p>
+            <a:pPr marL="0" indent="0" algn="ctr">
               <a:buNone/>
             </a:pPr>
             <a:r>
@@ -6597,13 +6362,12 @@
             <a:avLst/>
           </a:prstGeom>
           <a:noFill/>
-          <a:ln/>
-        </p:spPr>
-        <p:txBody>
-          <a:bodyPr wrap="square" lIns="0" tIns="0" rIns="0" bIns="0" rtlCol="0" anchor="ctr"/>
-          <a:lstStyle/>
-          <a:p>
-            <a:pPr indent="0" marL="0">
+        </p:spPr>
+        <p:txBody>
+          <a:bodyPr wrap="square" lIns="0" tIns="0" rIns="0" bIns="0" rtlCol="0" anchor="ctr"/>
+          <a:lstStyle/>
+          <a:p>
+            <a:pPr marL="0" indent="0">
               <a:buNone/>
             </a:pPr>
             <a:r>
@@ -6633,13 +6397,12 @@
             <a:avLst/>
           </a:prstGeom>
           <a:noFill/>
-          <a:ln/>
-        </p:spPr>
-        <p:txBody>
-          <a:bodyPr wrap="square" lIns="0" tIns="0" rIns="0" bIns="0" rtlCol="0" anchor="ctr"/>
-          <a:lstStyle/>
-          <a:p>
-            <a:pPr indent="0" marL="0">
+        </p:spPr>
+        <p:txBody>
+          <a:bodyPr wrap="square" lIns="0" tIns="0" rIns="0" bIns="0" rtlCol="0" anchor="ctr"/>
+          <a:lstStyle/>
+          <a:p>
+            <a:pPr marL="0" indent="0">
               <a:buNone/>
             </a:pPr>
             <a:r>
@@ -6669,13 +6432,12 @@
             <a:avLst/>
           </a:prstGeom>
           <a:noFill/>
-          <a:ln/>
-        </p:spPr>
-        <p:txBody>
-          <a:bodyPr wrap="square" lIns="0" tIns="0" rIns="0" bIns="0" rtlCol="0" anchor="ctr"/>
-          <a:lstStyle/>
-          <a:p>
-            <a:pPr indent="0" marL="0">
+        </p:spPr>
+        <p:txBody>
+          <a:bodyPr wrap="square" lIns="0" tIns="0" rIns="0" bIns="0" rtlCol="0" anchor="ctr"/>
+          <a:lstStyle/>
+          <a:p>
+            <a:pPr marL="0" indent="0">
               <a:buNone/>
             </a:pPr>
             <a:r>
@@ -6757,13 +6519,12 @@
             <a:avLst/>
           </a:prstGeom>
           <a:noFill/>
-          <a:ln/>
-        </p:spPr>
-        <p:txBody>
-          <a:bodyPr wrap="square" lIns="0" tIns="0" rIns="0" bIns="0" rtlCol="0" anchor="ctr"/>
-          <a:lstStyle/>
-          <a:p>
-            <a:pPr algn="ctr" indent="0" marL="0">
+        </p:spPr>
+        <p:txBody>
+          <a:bodyPr wrap="square" lIns="0" tIns="0" rIns="0" bIns="0" rtlCol="0" anchor="ctr"/>
+          <a:lstStyle/>
+          <a:p>
+            <a:pPr marL="0" indent="0" algn="ctr">
               <a:buNone/>
             </a:pPr>
             <a:r>
@@ -6793,13 +6554,12 @@
             <a:avLst/>
           </a:prstGeom>
           <a:noFill/>
-          <a:ln/>
-        </p:spPr>
-        <p:txBody>
-          <a:bodyPr wrap="square" lIns="0" tIns="0" rIns="0" bIns="0" rtlCol="0" anchor="ctr"/>
-          <a:lstStyle/>
-          <a:p>
-            <a:pPr indent="0" marL="0">
+        </p:spPr>
+        <p:txBody>
+          <a:bodyPr wrap="square" lIns="0" tIns="0" rIns="0" bIns="0" rtlCol="0" anchor="ctr"/>
+          <a:lstStyle/>
+          <a:p>
+            <a:pPr marL="0" indent="0">
               <a:buNone/>
             </a:pPr>
             <a:r>
@@ -6829,13 +6589,12 @@
             <a:avLst/>
           </a:prstGeom>
           <a:noFill/>
-          <a:ln/>
-        </p:spPr>
-        <p:txBody>
-          <a:bodyPr wrap="square" lIns="0" tIns="0" rIns="0" bIns="0" rtlCol="0" anchor="ctr"/>
-          <a:lstStyle/>
-          <a:p>
-            <a:pPr indent="0" marL="0">
+        </p:spPr>
+        <p:txBody>
+          <a:bodyPr wrap="square" lIns="0" tIns="0" rIns="0" bIns="0" rtlCol="0" anchor="ctr"/>
+          <a:lstStyle/>
+          <a:p>
+            <a:pPr marL="0" indent="0">
               <a:buNone/>
             </a:pPr>
             <a:r>
@@ -6865,13 +6624,12 @@
             <a:avLst/>
           </a:prstGeom>
           <a:noFill/>
-          <a:ln/>
-        </p:spPr>
-        <p:txBody>
-          <a:bodyPr wrap="square" lIns="0" tIns="0" rIns="0" bIns="0" rtlCol="0" anchor="ctr"/>
-          <a:lstStyle/>
-          <a:p>
-            <a:pPr indent="0" marL="0">
+        </p:spPr>
+        <p:txBody>
+          <a:bodyPr wrap="square" lIns="0" tIns="0" rIns="0" bIns="0" rtlCol="0" anchor="ctr"/>
+          <a:lstStyle/>
+          <a:p>
+            <a:pPr marL="0" indent="0">
               <a:buNone/>
             </a:pPr>
             <a:r>
@@ -6953,13 +6711,12 @@
             <a:avLst/>
           </a:prstGeom>
           <a:noFill/>
-          <a:ln/>
-        </p:spPr>
-        <p:txBody>
-          <a:bodyPr wrap="square" lIns="0" tIns="0" rIns="0" bIns="0" rtlCol="0" anchor="ctr"/>
-          <a:lstStyle/>
-          <a:p>
-            <a:pPr algn="ctr" indent="0" marL="0">
+        </p:spPr>
+        <p:txBody>
+          <a:bodyPr wrap="square" lIns="0" tIns="0" rIns="0" bIns="0" rtlCol="0" anchor="ctr"/>
+          <a:lstStyle/>
+          <a:p>
+            <a:pPr marL="0" indent="0" algn="ctr">
               <a:buNone/>
             </a:pPr>
             <a:r>
@@ -6989,13 +6746,12 @@
             <a:avLst/>
           </a:prstGeom>
           <a:noFill/>
-          <a:ln/>
-        </p:spPr>
-        <p:txBody>
-          <a:bodyPr wrap="square" lIns="0" tIns="0" rIns="0" bIns="0" rtlCol="0" anchor="ctr"/>
-          <a:lstStyle/>
-          <a:p>
-            <a:pPr indent="0" marL="0">
+        </p:spPr>
+        <p:txBody>
+          <a:bodyPr wrap="square" lIns="0" tIns="0" rIns="0" bIns="0" rtlCol="0" anchor="ctr"/>
+          <a:lstStyle/>
+          <a:p>
+            <a:pPr marL="0" indent="0">
               <a:buNone/>
             </a:pPr>
             <a:r>
@@ -7025,13 +6781,12 @@
             <a:avLst/>
           </a:prstGeom>
           <a:noFill/>
-          <a:ln/>
-        </p:spPr>
-        <p:txBody>
-          <a:bodyPr wrap="square" lIns="0" tIns="0" rIns="0" bIns="0" rtlCol="0" anchor="ctr"/>
-          <a:lstStyle/>
-          <a:p>
-            <a:pPr indent="0" marL="0">
+        </p:spPr>
+        <p:txBody>
+          <a:bodyPr wrap="square" lIns="0" tIns="0" rIns="0" bIns="0" rtlCol="0" anchor="ctr"/>
+          <a:lstStyle/>
+          <a:p>
+            <a:pPr marL="0" indent="0">
               <a:buNone/>
             </a:pPr>
             <a:r>
@@ -7061,13 +6816,12 @@
             <a:avLst/>
           </a:prstGeom>
           <a:noFill/>
-          <a:ln/>
-        </p:spPr>
-        <p:txBody>
-          <a:bodyPr wrap="square" lIns="0" tIns="0" rIns="0" bIns="0" rtlCol="0" anchor="ctr"/>
-          <a:lstStyle/>
-          <a:p>
-            <a:pPr indent="0" marL="0">
+        </p:spPr>
+        <p:txBody>
+          <a:bodyPr wrap="square" lIns="0" tIns="0" rIns="0" bIns="0" rtlCol="0" anchor="ctr"/>
+          <a:lstStyle/>
+          <a:p>
+            <a:pPr marL="0" indent="0">
               <a:buNone/>
             </a:pPr>
             <a:r>
@@ -7149,13 +6903,12 @@
             <a:avLst/>
           </a:prstGeom>
           <a:noFill/>
-          <a:ln/>
-        </p:spPr>
-        <p:txBody>
-          <a:bodyPr wrap="square" lIns="0" tIns="0" rIns="0" bIns="0" rtlCol="0" anchor="ctr"/>
-          <a:lstStyle/>
-          <a:p>
-            <a:pPr algn="ctr" indent="0" marL="0">
+        </p:spPr>
+        <p:txBody>
+          <a:bodyPr wrap="square" lIns="0" tIns="0" rIns="0" bIns="0" rtlCol="0" anchor="ctr"/>
+          <a:lstStyle/>
+          <a:p>
+            <a:pPr marL="0" indent="0" algn="ctr">
               <a:buNone/>
             </a:pPr>
             <a:r>
@@ -7185,13 +6938,12 @@
             <a:avLst/>
           </a:prstGeom>
           <a:noFill/>
-          <a:ln/>
-        </p:spPr>
-        <p:txBody>
-          <a:bodyPr wrap="square" lIns="0" tIns="0" rIns="0" bIns="0" rtlCol="0" anchor="ctr"/>
-          <a:lstStyle/>
-          <a:p>
-            <a:pPr indent="0" marL="0">
+        </p:spPr>
+        <p:txBody>
+          <a:bodyPr wrap="square" lIns="0" tIns="0" rIns="0" bIns="0" rtlCol="0" anchor="ctr"/>
+          <a:lstStyle/>
+          <a:p>
+            <a:pPr marL="0" indent="0">
               <a:buNone/>
             </a:pPr>
             <a:r>
@@ -7221,13 +6973,12 @@
             <a:avLst/>
           </a:prstGeom>
           <a:noFill/>
-          <a:ln/>
-        </p:spPr>
-        <p:txBody>
-          <a:bodyPr wrap="square" lIns="0" tIns="0" rIns="0" bIns="0" rtlCol="0" anchor="ctr"/>
-          <a:lstStyle/>
-          <a:p>
-            <a:pPr indent="0" marL="0">
+        </p:spPr>
+        <p:txBody>
+          <a:bodyPr wrap="square" lIns="0" tIns="0" rIns="0" bIns="0" rtlCol="0" anchor="ctr"/>
+          <a:lstStyle/>
+          <a:p>
+            <a:pPr marL="0" indent="0">
               <a:buNone/>
             </a:pPr>
             <a:r>
@@ -7257,13 +7008,12 @@
             <a:avLst/>
           </a:prstGeom>
           <a:noFill/>
-          <a:ln/>
-        </p:spPr>
-        <p:txBody>
-          <a:bodyPr wrap="square" lIns="0" tIns="0" rIns="0" bIns="0" rtlCol="0" anchor="ctr"/>
-          <a:lstStyle/>
-          <a:p>
-            <a:pPr indent="0" marL="0">
+        </p:spPr>
+        <p:txBody>
+          <a:bodyPr wrap="square" lIns="0" tIns="0" rIns="0" bIns="0" rtlCol="0" anchor="ctr"/>
+          <a:lstStyle/>
+          <a:p>
+            <a:pPr marL="0" indent="0">
               <a:buNone/>
             </a:pPr>
             <a:r>
@@ -7345,13 +7095,12 @@
             <a:avLst/>
           </a:prstGeom>
           <a:noFill/>
-          <a:ln/>
-        </p:spPr>
-        <p:txBody>
-          <a:bodyPr wrap="square" lIns="0" tIns="0" rIns="0" bIns="0" rtlCol="0" anchor="ctr"/>
-          <a:lstStyle/>
-          <a:p>
-            <a:pPr algn="ctr" indent="0" marL="0">
+        </p:spPr>
+        <p:txBody>
+          <a:bodyPr wrap="square" lIns="0" tIns="0" rIns="0" bIns="0" rtlCol="0" anchor="ctr"/>
+          <a:lstStyle/>
+          <a:p>
+            <a:pPr marL="0" indent="0" algn="ctr">
               <a:buNone/>
             </a:pPr>
             <a:r>
@@ -7381,13 +7130,12 @@
             <a:avLst/>
           </a:prstGeom>
           <a:noFill/>
-          <a:ln/>
-        </p:spPr>
-        <p:txBody>
-          <a:bodyPr wrap="square" lIns="0" tIns="0" rIns="0" bIns="0" rtlCol="0" anchor="ctr"/>
-          <a:lstStyle/>
-          <a:p>
-            <a:pPr indent="0" marL="0">
+        </p:spPr>
+        <p:txBody>
+          <a:bodyPr wrap="square" lIns="0" tIns="0" rIns="0" bIns="0" rtlCol="0" anchor="ctr"/>
+          <a:lstStyle/>
+          <a:p>
+            <a:pPr marL="0" indent="0">
               <a:buNone/>
             </a:pPr>
             <a:r>
@@ -7417,13 +7165,12 @@
             <a:avLst/>
           </a:prstGeom>
           <a:noFill/>
-          <a:ln/>
-        </p:spPr>
-        <p:txBody>
-          <a:bodyPr wrap="square" lIns="0" tIns="0" rIns="0" bIns="0" rtlCol="0" anchor="ctr"/>
-          <a:lstStyle/>
-          <a:p>
-            <a:pPr indent="0" marL="0">
+        </p:spPr>
+        <p:txBody>
+          <a:bodyPr wrap="square" lIns="0" tIns="0" rIns="0" bIns="0" rtlCol="0" anchor="ctr"/>
+          <a:lstStyle/>
+          <a:p>
+            <a:pPr marL="0" indent="0">
               <a:buNone/>
             </a:pPr>
             <a:r>
@@ -7453,13 +7200,12 @@
             <a:avLst/>
           </a:prstGeom>
           <a:noFill/>
-          <a:ln/>
-        </p:spPr>
-        <p:txBody>
-          <a:bodyPr wrap="square" lIns="0" tIns="0" rIns="0" bIns="0" rtlCol="0" anchor="ctr"/>
-          <a:lstStyle/>
-          <a:p>
-            <a:pPr indent="0" marL="0">
+        </p:spPr>
+        <p:txBody>
+          <a:bodyPr wrap="square" lIns="0" tIns="0" rIns="0" bIns="0" rtlCol="0" anchor="ctr"/>
+          <a:lstStyle/>
+          <a:p>
+            <a:pPr marL="0" indent="0">
               <a:buNone/>
             </a:pPr>
             <a:r>
@@ -7541,13 +7287,12 @@
             <a:avLst/>
           </a:prstGeom>
           <a:noFill/>
-          <a:ln/>
-        </p:spPr>
-        <p:txBody>
-          <a:bodyPr wrap="square" lIns="0" tIns="0" rIns="0" bIns="0" rtlCol="0" anchor="ctr"/>
-          <a:lstStyle/>
-          <a:p>
-            <a:pPr algn="ctr" indent="0" marL="0">
+        </p:spPr>
+        <p:txBody>
+          <a:bodyPr wrap="square" lIns="0" tIns="0" rIns="0" bIns="0" rtlCol="0" anchor="ctr"/>
+          <a:lstStyle/>
+          <a:p>
+            <a:pPr marL="0" indent="0" algn="ctr">
               <a:buNone/>
             </a:pPr>
             <a:r>
@@ -7577,13 +7322,12 @@
             <a:avLst/>
           </a:prstGeom>
           <a:noFill/>
-          <a:ln/>
-        </p:spPr>
-        <p:txBody>
-          <a:bodyPr wrap="square" lIns="0" tIns="0" rIns="0" bIns="0" rtlCol="0" anchor="ctr"/>
-          <a:lstStyle/>
-          <a:p>
-            <a:pPr indent="0" marL="0">
+        </p:spPr>
+        <p:txBody>
+          <a:bodyPr wrap="square" lIns="0" tIns="0" rIns="0" bIns="0" rtlCol="0" anchor="ctr"/>
+          <a:lstStyle/>
+          <a:p>
+            <a:pPr marL="0" indent="0">
               <a:buNone/>
             </a:pPr>
             <a:r>
@@ -7613,13 +7357,12 @@
             <a:avLst/>
           </a:prstGeom>
           <a:noFill/>
-          <a:ln/>
-        </p:spPr>
-        <p:txBody>
-          <a:bodyPr wrap="square" lIns="0" tIns="0" rIns="0" bIns="0" rtlCol="0" anchor="ctr"/>
-          <a:lstStyle/>
-          <a:p>
-            <a:pPr indent="0" marL="0">
+        </p:spPr>
+        <p:txBody>
+          <a:bodyPr wrap="square" lIns="0" tIns="0" rIns="0" bIns="0" rtlCol="0" anchor="ctr"/>
+          <a:lstStyle/>
+          <a:p>
+            <a:pPr marL="0" indent="0">
               <a:buNone/>
             </a:pPr>
             <a:r>
@@ -7649,13 +7392,12 @@
             <a:avLst/>
           </a:prstGeom>
           <a:noFill/>
-          <a:ln/>
-        </p:spPr>
-        <p:txBody>
-          <a:bodyPr wrap="square" lIns="0" tIns="0" rIns="0" bIns="0" rtlCol="0" anchor="ctr"/>
-          <a:lstStyle/>
-          <a:p>
-            <a:pPr indent="0" marL="0">
+        </p:spPr>
+        <p:txBody>
+          <a:bodyPr wrap="square" lIns="0" tIns="0" rIns="0" bIns="0" rtlCol="0" anchor="ctr"/>
+          <a:lstStyle/>
+          <a:p>
+            <a:pPr marL="0" indent="0">
               <a:buNone/>
             </a:pPr>
             <a:r>
@@ -7672,7 +7414,7 @@
       </p:sp>
       <p:sp>
         <p:nvSpPr>
-          <p:cNvPr id="25" name="Slide Number Placeholder 0"/>
+          <p:cNvPr id="40" name="Slide Number Placeholder 0"/>
           <p:cNvSpPr>
             <a:spLocks noGrp="1"/>
           </p:cNvSpPr>
@@ -7688,11 +7430,6 @@
           <a:prstGeom prst="rect">
             <a:avLst/>
           </a:prstGeom>
-          <a:extLst>
-            <a:ext uri="{C572A759-6A51-4108-AA02-DFA0A04FC94B}">
-              <ma14:wrappingTextBoxFlag xmlns:ma14="http://schemas.microsoft.com/office/mac/drawingml/2011/main" val="0"/>
-            </a:ext>
-          </a:extLst>
         </p:spPr>
         <p:txBody>
           <a:bodyPr/>
@@ -7708,8 +7445,7 @@
           <a:p>
             <a:pPr algn="l"/>
             <a:fld id="{F7021451-1387-4CA6-816F-3879F97B5CBC}" type="slidenum">
-              <a:rPr b="0" lang="en-US"/>
-              <a:t>15</a:t>
+              <a:rPr lang="en-US" b="0"/>
             </a:fld>
             <a:endParaRPr lang="en-US"/>
           </a:p>
@@ -7725,7 +7461,7 @@
 
 <file path=ppt/slides/slide16.xml><?xml version="1.0" encoding="utf-8"?>
 <p:sld xmlns:a="http://schemas.openxmlformats.org/drawingml/2006/main" xmlns:r="http://schemas.openxmlformats.org/officeDocument/2006/relationships" xmlns:p="http://schemas.openxmlformats.org/presentationml/2006/main">
-  <p:cSld name="Slide 16">
+  <p:cSld>
     <p:spTree>
       <p:nvGrpSpPr>
         <p:cNvPr id="1" name=""/>
@@ -7745,7 +7481,7 @@
           <p:cNvPr id="2" name="Text 0"/>
           <p:cNvSpPr/>
           <p:nvPr>
-            <p:ph idx="100" type="title" hasCustomPrompt="1"/>
+            <p:ph type="title" idx="100" hasCustomPrompt="1"/>
           </p:nvPr>
         </p:nvSpPr>
         <p:spPr>
@@ -7757,13 +7493,12 @@
             <a:avLst/>
           </a:prstGeom>
           <a:noFill/>
-          <a:ln/>
         </p:spPr>
         <p:txBody>
           <a:bodyPr wrap="square" rtlCol="0"/>
           <a:lstStyle/>
           <a:p>
-            <a:pPr algn="l" indent="0" marL="0">
+            <a:pPr marL="0" indent="0" algn="l">
               <a:buNone/>
             </a:pPr>
             <a:r>
@@ -7780,7 +7515,7 @@
       </p:sp>
       <p:pic>
         <p:nvPicPr>
-          <p:cNvPr id="3" name="Image 0" descr="/Users/aman/Desktop/devops-heros/helpdesk-capstone/docs/screenshots/grafana-dashboard.jpg">    </p:cNvPr>
+          <p:cNvPr id="3" name="Image 0" descr="/Users/aman/Desktop/devops-heros/helpdesk-capstone/docs/screenshots/grafana-dashboard.jpg"/>
           <p:cNvPicPr>
             <a:picLocks noChangeAspect="1"/>
           </p:cNvPicPr>
@@ -7817,13 +7552,12 @@
             <a:avLst/>
           </a:prstGeom>
           <a:noFill/>
-          <a:ln/>
-        </p:spPr>
-        <p:txBody>
-          <a:bodyPr wrap="square" lIns="0" tIns="0" rIns="0" bIns="0" rtlCol="0" anchor="ctr"/>
-          <a:lstStyle/>
-          <a:p>
-            <a:pPr indent="0" marL="0">
+        </p:spPr>
+        <p:txBody>
+          <a:bodyPr wrap="square" lIns="0" tIns="0" rIns="0" bIns="0" rtlCol="0" anchor="ctr"/>
+          <a:lstStyle/>
+          <a:p>
+            <a:pPr marL="0" indent="0">
               <a:buNone/>
             </a:pPr>
             <a:r>
@@ -7880,13 +7614,12 @@
             <a:avLst/>
           </a:prstGeom>
           <a:noFill/>
-          <a:ln/>
-        </p:spPr>
-        <p:txBody>
-          <a:bodyPr wrap="square" lIns="0" tIns="0" rIns="0" bIns="0" rtlCol="0" anchor="ctr"/>
-          <a:lstStyle/>
-          <a:p>
-            <a:pPr indent="0" marL="0">
+        </p:spPr>
+        <p:txBody>
+          <a:bodyPr wrap="square" lIns="0" tIns="0" rIns="0" bIns="0" rtlCol="0" anchor="ctr"/>
+          <a:lstStyle/>
+          <a:p>
+            <a:pPr marL="0" indent="0">
               <a:buNone/>
             </a:pPr>
             <a:r>
@@ -7916,13 +7649,12 @@
             <a:avLst/>
           </a:prstGeom>
           <a:noFill/>
-          <a:ln/>
-        </p:spPr>
-        <p:txBody>
-          <a:bodyPr wrap="square" lIns="0" tIns="0" rIns="0" bIns="0" rtlCol="0" anchor="ctr"/>
-          <a:lstStyle/>
-          <a:p>
-            <a:pPr indent="0" marL="0">
+        </p:spPr>
+        <p:txBody>
+          <a:bodyPr wrap="square" lIns="0" tIns="0" rIns="0" bIns="0" rtlCol="0" anchor="ctr"/>
+          <a:lstStyle/>
+          <a:p>
+            <a:pPr marL="0" indent="0">
               <a:buNone/>
             </a:pPr>
             <a:r>
@@ -7979,13 +7711,12 @@
             <a:avLst/>
           </a:prstGeom>
           <a:noFill/>
-          <a:ln/>
-        </p:spPr>
-        <p:txBody>
-          <a:bodyPr wrap="square" lIns="0" tIns="0" rIns="0" bIns="0" rtlCol="0" anchor="ctr"/>
-          <a:lstStyle/>
-          <a:p>
-            <a:pPr indent="0" marL="0">
+        </p:spPr>
+        <p:txBody>
+          <a:bodyPr wrap="square" lIns="0" tIns="0" rIns="0" bIns="0" rtlCol="0" anchor="ctr"/>
+          <a:lstStyle/>
+          <a:p>
+            <a:pPr marL="0" indent="0">
               <a:buNone/>
             </a:pPr>
             <a:r>
@@ -8015,13 +7746,12 @@
             <a:avLst/>
           </a:prstGeom>
           <a:noFill/>
-          <a:ln/>
-        </p:spPr>
-        <p:txBody>
-          <a:bodyPr wrap="square" lIns="0" tIns="0" rIns="0" bIns="0" rtlCol="0" anchor="ctr"/>
-          <a:lstStyle/>
-          <a:p>
-            <a:pPr indent="0" marL="0">
+        </p:spPr>
+        <p:txBody>
+          <a:bodyPr wrap="square" lIns="0" tIns="0" rIns="0" bIns="0" rtlCol="0" anchor="ctr"/>
+          <a:lstStyle/>
+          <a:p>
+            <a:pPr marL="0" indent="0">
               <a:buNone/>
             </a:pPr>
             <a:r>
@@ -8078,13 +7808,12 @@
             <a:avLst/>
           </a:prstGeom>
           <a:noFill/>
-          <a:ln/>
-        </p:spPr>
-        <p:txBody>
-          <a:bodyPr wrap="square" lIns="0" tIns="0" rIns="0" bIns="0" rtlCol="0" anchor="ctr"/>
-          <a:lstStyle/>
-          <a:p>
-            <a:pPr indent="0" marL="0">
+        </p:spPr>
+        <p:txBody>
+          <a:bodyPr wrap="square" lIns="0" tIns="0" rIns="0" bIns="0" rtlCol="0" anchor="ctr"/>
+          <a:lstStyle/>
+          <a:p>
+            <a:pPr marL="0" indent="0">
               <a:buNone/>
             </a:pPr>
             <a:r>
@@ -8114,13 +7843,12 @@
             <a:avLst/>
           </a:prstGeom>
           <a:noFill/>
-          <a:ln/>
-        </p:spPr>
-        <p:txBody>
-          <a:bodyPr wrap="square" lIns="0" tIns="0" rIns="0" bIns="0" rtlCol="0" anchor="ctr"/>
-          <a:lstStyle/>
-          <a:p>
-            <a:pPr indent="0" marL="0">
+        </p:spPr>
+        <p:txBody>
+          <a:bodyPr wrap="square" lIns="0" tIns="0" rIns="0" bIns="0" rtlCol="0" anchor="ctr"/>
+          <a:lstStyle/>
+          <a:p>
+            <a:pPr marL="0" indent="0">
               <a:buNone/>
             </a:pPr>
             <a:r>
@@ -8177,13 +7905,12 @@
             <a:avLst/>
           </a:prstGeom>
           <a:noFill/>
-          <a:ln/>
-        </p:spPr>
-        <p:txBody>
-          <a:bodyPr wrap="square" lIns="0" tIns="0" rIns="0" bIns="0" rtlCol="0" anchor="ctr"/>
-          <a:lstStyle/>
-          <a:p>
-            <a:pPr indent="0" marL="0">
+        </p:spPr>
+        <p:txBody>
+          <a:bodyPr wrap="square" lIns="0" tIns="0" rIns="0" bIns="0" rtlCol="0" anchor="ctr"/>
+          <a:lstStyle/>
+          <a:p>
+            <a:pPr marL="0" indent="0">
               <a:buNone/>
             </a:pPr>
             <a:r>
@@ -8213,13 +7940,12 @@
             <a:avLst/>
           </a:prstGeom>
           <a:noFill/>
-          <a:ln/>
-        </p:spPr>
-        <p:txBody>
-          <a:bodyPr wrap="square" lIns="0" tIns="0" rIns="0" bIns="0" rtlCol="0" anchor="ctr"/>
-          <a:lstStyle/>
-          <a:p>
-            <a:pPr indent="0" marL="0">
+        </p:spPr>
+        <p:txBody>
+          <a:bodyPr wrap="square" lIns="0" tIns="0" rIns="0" bIns="0" rtlCol="0" anchor="ctr"/>
+          <a:lstStyle/>
+          <a:p>
+            <a:pPr marL="0" indent="0">
               <a:buNone/>
             </a:pPr>
             <a:r>
@@ -8252,11 +7978,6 @@
           <a:prstGeom prst="rect">
             <a:avLst/>
           </a:prstGeom>
-          <a:extLst>
-            <a:ext uri="{C572A759-6A51-4108-AA02-DFA0A04FC94B}">
-              <ma14:wrappingTextBoxFlag xmlns:ma14="http://schemas.microsoft.com/office/mac/drawingml/2011/main" val="0"/>
-            </a:ext>
-          </a:extLst>
         </p:spPr>
         <p:txBody>
           <a:bodyPr/>
@@ -8272,8 +7993,7 @@
           <a:p>
             <a:pPr algn="l"/>
             <a:fld id="{F7021451-1387-4CA6-816F-3879F97B5CBC}" type="slidenum">
-              <a:rPr b="0" lang="en-US"/>
-              <a:t>16</a:t>
+              <a:rPr lang="en-US" b="0"/>
             </a:fld>
             <a:endParaRPr lang="en-US"/>
           </a:p>
@@ -8289,7 +8009,7 @@
 
 <file path=ppt/slides/slide17.xml><?xml version="1.0" encoding="utf-8"?>
 <p:sld xmlns:a="http://schemas.openxmlformats.org/drawingml/2006/main" xmlns:r="http://schemas.openxmlformats.org/officeDocument/2006/relationships" xmlns:p="http://schemas.openxmlformats.org/presentationml/2006/main">
-  <p:cSld name="Slide 17">
+  <p:cSld>
     <p:spTree>
       <p:nvGrpSpPr>
         <p:cNvPr id="1" name=""/>
@@ -8309,7 +8029,7 @@
           <p:cNvPr id="2" name="Text 0"/>
           <p:cNvSpPr/>
           <p:nvPr>
-            <p:ph idx="100" type="title" hasCustomPrompt="1"/>
+            <p:ph type="title" idx="100" hasCustomPrompt="1"/>
           </p:nvPr>
         </p:nvSpPr>
         <p:spPr>
@@ -8321,13 +8041,12 @@
             <a:avLst/>
           </a:prstGeom>
           <a:noFill/>
-          <a:ln/>
         </p:spPr>
         <p:txBody>
           <a:bodyPr wrap="square" rtlCol="0"/>
           <a:lstStyle/>
           <a:p>
-            <a:pPr algn="l" indent="0" marL="0">
+            <a:pPr marL="0" indent="0" algn="l">
               <a:buNone/>
             </a:pPr>
             <a:r>
@@ -8344,7 +8063,7 @@
       </p:sp>
       <p:pic>
         <p:nvPicPr>
-          <p:cNvPr id="3" name="Image 0" descr="/Users/aman/Desktop/devops-heros/helpdesk-capstone/docs/screenshots/prometheus-targets-up.jpg">    </p:cNvPr>
+          <p:cNvPr id="3" name="Image 0" descr="/Users/aman/Desktop/devops-heros/helpdesk-capstone/docs/screenshots/prometheus-targets-up.jpg"/>
           <p:cNvPicPr>
             <a:picLocks noChangeAspect="1"/>
           </p:cNvPicPr>
@@ -8381,13 +8100,12 @@
             <a:avLst/>
           </a:prstGeom>
           <a:noFill/>
-          <a:ln/>
-        </p:spPr>
-        <p:txBody>
-          <a:bodyPr wrap="square" lIns="0" tIns="0" rIns="0" bIns="0" rtlCol="0" anchor="ctr"/>
-          <a:lstStyle/>
-          <a:p>
-            <a:pPr indent="0" marL="0">
+        </p:spPr>
+        <p:txBody>
+          <a:bodyPr wrap="square" lIns="0" tIns="0" rIns="0" bIns="0" rtlCol="0" anchor="ctr"/>
+          <a:lstStyle/>
+          <a:p>
+            <a:pPr marL="0" indent="0">
               <a:buNone/>
             </a:pPr>
             <a:r>
@@ -8417,7 +8135,6 @@
             <a:avLst/>
           </a:prstGeom>
           <a:noFill/>
-          <a:ln/>
         </p:spPr>
         <p:txBody>
           <a:bodyPr wrap="square" lIns="0" tIns="0" rIns="0" bIns="0" rtlCol="0" anchor="ctr"/>
@@ -8520,13 +8237,12 @@
             <a:avLst/>
           </a:prstGeom>
           <a:noFill/>
-          <a:ln/>
-        </p:spPr>
-        <p:txBody>
-          <a:bodyPr wrap="square" lIns="0" tIns="0" rIns="0" bIns="0" rtlCol="0" anchor="ctr"/>
-          <a:lstStyle/>
-          <a:p>
-            <a:pPr indent="0" marL="0">
+        </p:spPr>
+        <p:txBody>
+          <a:bodyPr wrap="square" lIns="0" tIns="0" rIns="0" bIns="0" rtlCol="0" anchor="ctr"/>
+          <a:lstStyle/>
+          <a:p>
+            <a:pPr marL="0" indent="0">
               <a:buNone/>
             </a:pPr>
             <a:r>
@@ -8556,13 +8272,12 @@
             <a:avLst/>
           </a:prstGeom>
           <a:noFill/>
-          <a:ln/>
-        </p:spPr>
-        <p:txBody>
-          <a:bodyPr wrap="square" lIns="0" tIns="0" rIns="0" bIns="0" rtlCol="0" anchor="ctr"/>
-          <a:lstStyle/>
-          <a:p>
-            <a:pPr indent="0" marL="0">
+        </p:spPr>
+        <p:txBody>
+          <a:bodyPr wrap="square" lIns="0" tIns="0" rIns="0" bIns="0" rtlCol="0" anchor="ctr"/>
+          <a:lstStyle/>
+          <a:p>
+            <a:pPr marL="0" indent="0">
               <a:buNone/>
             </a:pPr>
             <a:r>
@@ -8576,13 +8291,13 @@
             <a:endParaRPr lang="en-US" sz="1100" dirty="0"/>
           </a:p>
           <a:p>
-            <a:pPr indent="0" marL="0">
+            <a:pPr marL="0" indent="0">
               <a:buNone/>
             </a:pPr>
             <a:endParaRPr lang="en-US" sz="1100" dirty="0"/>
           </a:p>
           <a:p>
-            <a:pPr indent="0" marL="0">
+            <a:pPr marL="0" indent="0">
               <a:buNone/>
             </a:pPr>
             <a:r>
@@ -8615,11 +8330,6 @@
           <a:prstGeom prst="rect">
             <a:avLst/>
           </a:prstGeom>
-          <a:extLst>
-            <a:ext uri="{C572A759-6A51-4108-AA02-DFA0A04FC94B}">
-              <ma14:wrappingTextBoxFlag xmlns:ma14="http://schemas.microsoft.com/office/mac/drawingml/2011/main" val="0"/>
-            </a:ext>
-          </a:extLst>
         </p:spPr>
         <p:txBody>
           <a:bodyPr/>
@@ -8635,8 +8345,7 @@
           <a:p>
             <a:pPr algn="l"/>
             <a:fld id="{F7021451-1387-4CA6-816F-3879F97B5CBC}" type="slidenum">
-              <a:rPr b="0" lang="en-US"/>
-              <a:t>17</a:t>
+              <a:rPr lang="en-US" b="0"/>
             </a:fld>
             <a:endParaRPr lang="en-US"/>
           </a:p>
@@ -8652,7 +8361,7 @@
 
 <file path=ppt/slides/slide18.xml><?xml version="1.0" encoding="utf-8"?>
 <p:sld xmlns:a="http://schemas.openxmlformats.org/drawingml/2006/main" xmlns:r="http://schemas.openxmlformats.org/officeDocument/2006/relationships" xmlns:p="http://schemas.openxmlformats.org/presentationml/2006/main">
-  <p:cSld name="Slide 18">
+  <p:cSld>
     <p:spTree>
       <p:nvGrpSpPr>
         <p:cNvPr id="1" name=""/>
@@ -8672,7 +8381,7 @@
           <p:cNvPr id="2" name="Text 0"/>
           <p:cNvSpPr/>
           <p:nvPr>
-            <p:ph idx="100" type="title" hasCustomPrompt="1"/>
+            <p:ph type="title" idx="100" hasCustomPrompt="1"/>
           </p:nvPr>
         </p:nvSpPr>
         <p:spPr>
@@ -8684,13 +8393,12 @@
             <a:avLst/>
           </a:prstGeom>
           <a:noFill/>
-          <a:ln/>
         </p:spPr>
         <p:txBody>
           <a:bodyPr wrap="square" rtlCol="0"/>
           <a:lstStyle/>
           <a:p>
-            <a:pPr algn="l" indent="0" marL="0">
+            <a:pPr marL="0" indent="0" algn="l">
               <a:buNone/>
             </a:pPr>
             <a:r>
@@ -8747,13 +8455,12 @@
             <a:avLst/>
           </a:prstGeom>
           <a:noFill/>
-          <a:ln/>
-        </p:spPr>
-        <p:txBody>
-          <a:bodyPr wrap="square" lIns="0" tIns="0" rIns="0" bIns="0" rtlCol="0" anchor="ctr"/>
-          <a:lstStyle/>
-          <a:p>
-            <a:pPr indent="0" marL="0">
+        </p:spPr>
+        <p:txBody>
+          <a:bodyPr wrap="square" lIns="0" tIns="0" rIns="0" bIns="0" rtlCol="0" anchor="ctr"/>
+          <a:lstStyle/>
+          <a:p>
+            <a:pPr marL="0" indent="0">
               <a:buNone/>
             </a:pPr>
             <a:r>
@@ -8783,13 +8490,12 @@
             <a:avLst/>
           </a:prstGeom>
           <a:noFill/>
-          <a:ln/>
-        </p:spPr>
-        <p:txBody>
-          <a:bodyPr wrap="square" lIns="0" tIns="0" rIns="0" bIns="0" rtlCol="0" anchor="ctr"/>
-          <a:lstStyle/>
-          <a:p>
-            <a:pPr indent="0" marL="0">
+        </p:spPr>
+        <p:txBody>
+          <a:bodyPr wrap="square" lIns="0" tIns="0" rIns="0" bIns="0" rtlCol="0" anchor="ctr"/>
+          <a:lstStyle/>
+          <a:p>
+            <a:pPr marL="0" indent="0">
               <a:buNone/>
             </a:pPr>
             <a:r>
@@ -8846,13 +8552,12 @@
             <a:avLst/>
           </a:prstGeom>
           <a:noFill/>
-          <a:ln/>
-        </p:spPr>
-        <p:txBody>
-          <a:bodyPr wrap="square" lIns="0" tIns="0" rIns="0" bIns="0" rtlCol="0" anchor="ctr"/>
-          <a:lstStyle/>
-          <a:p>
-            <a:pPr indent="0" marL="0">
+        </p:spPr>
+        <p:txBody>
+          <a:bodyPr wrap="square" lIns="0" tIns="0" rIns="0" bIns="0" rtlCol="0" anchor="ctr"/>
+          <a:lstStyle/>
+          <a:p>
+            <a:pPr marL="0" indent="0">
               <a:buNone/>
             </a:pPr>
             <a:r>
@@ -8882,13 +8587,12 @@
             <a:avLst/>
           </a:prstGeom>
           <a:noFill/>
-          <a:ln/>
-        </p:spPr>
-        <p:txBody>
-          <a:bodyPr wrap="square" lIns="0" tIns="0" rIns="0" bIns="0" rtlCol="0" anchor="ctr"/>
-          <a:lstStyle/>
-          <a:p>
-            <a:pPr indent="0" marL="0">
+        </p:spPr>
+        <p:txBody>
+          <a:bodyPr wrap="square" lIns="0" tIns="0" rIns="0" bIns="0" rtlCol="0" anchor="ctr"/>
+          <a:lstStyle/>
+          <a:p>
+            <a:pPr marL="0" indent="0">
               <a:buNone/>
             </a:pPr>
             <a:r>
@@ -8945,13 +8649,12 @@
             <a:avLst/>
           </a:prstGeom>
           <a:noFill/>
-          <a:ln/>
-        </p:spPr>
-        <p:txBody>
-          <a:bodyPr wrap="square" lIns="0" tIns="0" rIns="0" bIns="0" rtlCol="0" anchor="ctr"/>
-          <a:lstStyle/>
-          <a:p>
-            <a:pPr indent="0" marL="0">
+        </p:spPr>
+        <p:txBody>
+          <a:bodyPr wrap="square" lIns="0" tIns="0" rIns="0" bIns="0" rtlCol="0" anchor="ctr"/>
+          <a:lstStyle/>
+          <a:p>
+            <a:pPr marL="0" indent="0">
               <a:buNone/>
             </a:pPr>
             <a:r>
@@ -8981,13 +8684,12 @@
             <a:avLst/>
           </a:prstGeom>
           <a:noFill/>
-          <a:ln/>
-        </p:spPr>
-        <p:txBody>
-          <a:bodyPr wrap="square" lIns="0" tIns="0" rIns="0" bIns="0" rtlCol="0" anchor="ctr"/>
-          <a:lstStyle/>
-          <a:p>
-            <a:pPr indent="0" marL="0">
+        </p:spPr>
+        <p:txBody>
+          <a:bodyPr wrap="square" lIns="0" tIns="0" rIns="0" bIns="0" rtlCol="0" anchor="ctr"/>
+          <a:lstStyle/>
+          <a:p>
+            <a:pPr marL="0" indent="0">
               <a:spcAft>
                 <a:spcPts val="700"/>
               </a:spcAft>
@@ -9004,7 +8706,7 @@
             <a:endParaRPr lang="en-US" sz="1200" dirty="0"/>
           </a:p>
           <a:p>
-            <a:pPr indent="0" marL="0">
+            <a:pPr marL="0" indent="0">
               <a:spcAft>
                 <a:spcPts val="700"/>
               </a:spcAft>
@@ -9021,7 +8723,7 @@
             <a:endParaRPr lang="en-US" sz="1200" dirty="0"/>
           </a:p>
           <a:p>
-            <a:pPr indent="0" marL="0">
+            <a:pPr marL="0" indent="0">
               <a:spcAft>
                 <a:spcPts val="700"/>
               </a:spcAft>
@@ -9054,13 +8756,12 @@
             <a:avLst/>
           </a:prstGeom>
           <a:noFill/>
-          <a:ln/>
-        </p:spPr>
-        <p:txBody>
-          <a:bodyPr wrap="square" lIns="0" tIns="0" rIns="0" bIns="0" rtlCol="0" anchor="ctr"/>
-          <a:lstStyle/>
-          <a:p>
-            <a:pPr indent="0" marL="0">
+        </p:spPr>
+        <p:txBody>
+          <a:bodyPr wrap="square" lIns="0" tIns="0" rIns="0" bIns="0" rtlCol="0" anchor="ctr"/>
+          <a:lstStyle/>
+          <a:p>
+            <a:pPr marL="0" indent="0">
               <a:buNone/>
             </a:pPr>
             <a:r>
@@ -9093,11 +8794,6 @@
           <a:prstGeom prst="rect">
             <a:avLst/>
           </a:prstGeom>
-          <a:extLst>
-            <a:ext uri="{C572A759-6A51-4108-AA02-DFA0A04FC94B}">
-              <ma14:wrappingTextBoxFlag xmlns:ma14="http://schemas.microsoft.com/office/mac/drawingml/2011/main" val="0"/>
-            </a:ext>
-          </a:extLst>
         </p:spPr>
         <p:txBody>
           <a:bodyPr/>
@@ -9113,8 +8809,7 @@
           <a:p>
             <a:pPr algn="l"/>
             <a:fld id="{F7021451-1387-4CA6-816F-3879F97B5CBC}" type="slidenum">
-              <a:rPr b="0" lang="en-US"/>
-              <a:t>18</a:t>
+              <a:rPr lang="en-US" b="0"/>
             </a:fld>
             <a:endParaRPr lang="en-US"/>
           </a:p>
@@ -9130,7 +8825,7 @@
 
 <file path=ppt/slides/slide19.xml><?xml version="1.0" encoding="utf-8"?>
 <p:sld xmlns:a="http://schemas.openxmlformats.org/drawingml/2006/main" xmlns:r="http://schemas.openxmlformats.org/officeDocument/2006/relationships" xmlns:p="http://schemas.openxmlformats.org/presentationml/2006/main">
-  <p:cSld name="Slide 19">
+  <p:cSld>
     <p:spTree>
       <p:nvGrpSpPr>
         <p:cNvPr id="1" name=""/>
@@ -9150,7 +8845,7 @@
           <p:cNvPr id="2" name="Text 0"/>
           <p:cNvSpPr/>
           <p:nvPr>
-            <p:ph idx="100" type="title" hasCustomPrompt="1"/>
+            <p:ph type="title" idx="100" hasCustomPrompt="1"/>
           </p:nvPr>
         </p:nvSpPr>
         <p:spPr>
@@ -9162,13 +8857,12 @@
             <a:avLst/>
           </a:prstGeom>
           <a:noFill/>
-          <a:ln/>
         </p:spPr>
         <p:txBody>
           <a:bodyPr wrap="square" rtlCol="0"/>
           <a:lstStyle/>
           <a:p>
-            <a:pPr algn="l" indent="0" marL="0">
+            <a:pPr marL="0" indent="0" algn="l">
               <a:buNone/>
             </a:pPr>
             <a:r>
@@ -9185,7 +8879,7 @@
       </p:sp>
       <p:pic>
         <p:nvPicPr>
-          <p:cNvPr id="3" name="Image 0" descr="/Users/aman/Desktop/devops-heros/helpdesk-capstone/docs/screenshots/hosted-console.jpg">    </p:cNvPr>
+          <p:cNvPr id="3" name="Image 0" descr="/Users/aman/Desktop/devops-heros/helpdesk-capstone/docs/screenshots/hosted-console.jpg"/>
           <p:cNvPicPr>
             <a:picLocks noChangeAspect="1"/>
           </p:cNvPicPr>
@@ -9222,13 +8916,12 @@
             <a:avLst/>
           </a:prstGeom>
           <a:noFill/>
-          <a:ln/>
-        </p:spPr>
-        <p:txBody>
-          <a:bodyPr wrap="square" lIns="0" tIns="0" rIns="0" bIns="0" rtlCol="0" anchor="ctr"/>
-          <a:lstStyle/>
-          <a:p>
-            <a:pPr indent="0" marL="0">
+        </p:spPr>
+        <p:txBody>
+          <a:bodyPr wrap="square" lIns="0" tIns="0" rIns="0" bIns="0" rtlCol="0" anchor="ctr"/>
+          <a:lstStyle/>
+          <a:p>
+            <a:pPr marL="0" indent="0">
               <a:buNone/>
             </a:pPr>
             <a:r>
@@ -9258,7 +8951,6 @@
             <a:avLst/>
           </a:prstGeom>
           <a:noFill/>
-          <a:ln/>
         </p:spPr>
         <p:txBody>
           <a:bodyPr wrap="square" lIns="0" tIns="0" rIns="0" bIns="0" rtlCol="0" anchor="ctr"/>
@@ -9361,13 +9053,12 @@
             <a:avLst/>
           </a:prstGeom>
           <a:noFill/>
-          <a:ln/>
-        </p:spPr>
-        <p:txBody>
-          <a:bodyPr wrap="square" lIns="0" tIns="0" rIns="0" bIns="0" rtlCol="0" anchor="ctr"/>
-          <a:lstStyle/>
-          <a:p>
-            <a:pPr indent="0" marL="0">
+        </p:spPr>
+        <p:txBody>
+          <a:bodyPr wrap="square" lIns="0" tIns="0" rIns="0" bIns="0" rtlCol="0" anchor="ctr"/>
+          <a:lstStyle/>
+          <a:p>
+            <a:pPr marL="0" indent="0">
               <a:buNone/>
             </a:pPr>
             <a:r>
@@ -9397,13 +9088,12 @@
             <a:avLst/>
           </a:prstGeom>
           <a:noFill/>
-          <a:ln/>
-        </p:spPr>
-        <p:txBody>
-          <a:bodyPr wrap="square" lIns="0" tIns="0" rIns="0" bIns="0" rtlCol="0" anchor="ctr"/>
-          <a:lstStyle/>
-          <a:p>
-            <a:pPr indent="0" marL="0">
+        </p:spPr>
+        <p:txBody>
+          <a:bodyPr wrap="square" lIns="0" tIns="0" rIns="0" bIns="0" rtlCol="0" anchor="ctr"/>
+          <a:lstStyle/>
+          <a:p>
+            <a:pPr marL="0" indent="0">
               <a:buNone/>
             </a:pPr>
             <a:r>
@@ -9436,11 +9126,6 @@
           <a:prstGeom prst="rect">
             <a:avLst/>
           </a:prstGeom>
-          <a:extLst>
-            <a:ext uri="{C572A759-6A51-4108-AA02-DFA0A04FC94B}">
-              <ma14:wrappingTextBoxFlag xmlns:ma14="http://schemas.microsoft.com/office/mac/drawingml/2011/main" val="0"/>
-            </a:ext>
-          </a:extLst>
         </p:spPr>
         <p:txBody>
           <a:bodyPr/>
@@ -9456,8 +9141,7 @@
           <a:p>
             <a:pPr algn="l"/>
             <a:fld id="{F7021451-1387-4CA6-816F-3879F97B5CBC}" type="slidenum">
-              <a:rPr b="0" lang="en-US"/>
-              <a:t>19</a:t>
+              <a:rPr lang="en-US" b="0"/>
             </a:fld>
             <a:endParaRPr lang="en-US"/>
           </a:p>
@@ -9473,7 +9157,7 @@
 
 <file path=ppt/slides/slide2.xml><?xml version="1.0" encoding="utf-8"?>
 <p:sld xmlns:a="http://schemas.openxmlformats.org/drawingml/2006/main" xmlns:r="http://schemas.openxmlformats.org/officeDocument/2006/relationships" xmlns:p="http://schemas.openxmlformats.org/presentationml/2006/main">
-  <p:cSld name="Slide 2">
+  <p:cSld>
     <p:spTree>
       <p:nvGrpSpPr>
         <p:cNvPr id="1" name=""/>
@@ -9493,7 +9177,7 @@
           <p:cNvPr id="2" name="Text 0"/>
           <p:cNvSpPr/>
           <p:nvPr>
-            <p:ph idx="100" type="title" hasCustomPrompt="1"/>
+            <p:ph type="title" idx="100" hasCustomPrompt="1"/>
           </p:nvPr>
         </p:nvSpPr>
         <p:spPr>
@@ -9505,13 +9189,12 @@
             <a:avLst/>
           </a:prstGeom>
           <a:noFill/>
-          <a:ln/>
         </p:spPr>
         <p:txBody>
           <a:bodyPr wrap="square" rtlCol="0"/>
           <a:lstStyle/>
           <a:p>
-            <a:pPr algn="l" indent="0" marL="0">
+            <a:pPr marL="0" indent="0" algn="l">
               <a:buNone/>
             </a:pPr>
             <a:r>
@@ -9541,13 +9224,12 @@
             <a:avLst/>
           </a:prstGeom>
           <a:noFill/>
-          <a:ln/>
-        </p:spPr>
-        <p:txBody>
-          <a:bodyPr wrap="square" lIns="0" tIns="0" rIns="0" bIns="0" rtlCol="0" anchor="ctr"/>
-          <a:lstStyle/>
-          <a:p>
-            <a:pPr indent="0" marL="0">
+        </p:spPr>
+        <p:txBody>
+          <a:bodyPr wrap="square" lIns="0" tIns="0" rIns="0" bIns="0" rtlCol="0" anchor="ctr"/>
+          <a:lstStyle/>
+          <a:p>
+            <a:pPr marL="0" indent="0">
               <a:buNone/>
             </a:pPr>
             <a:r>
@@ -9561,7 +9243,7 @@
             <a:endParaRPr lang="en-US" sz="1700" dirty="0"/>
           </a:p>
           <a:p>
-            <a:pPr indent="0" marL="0">
+            <a:pPr marL="0" indent="0">
               <a:buNone/>
             </a:pPr>
             <a:r>
@@ -9591,7 +9273,6 @@
             <a:avLst/>
           </a:prstGeom>
           <a:noFill/>
-          <a:ln/>
         </p:spPr>
         <p:txBody>
           <a:bodyPr wrap="square" lIns="0" tIns="0" rIns="0" bIns="0" rtlCol="0" anchor="ctr"/>
@@ -9712,13 +9393,12 @@
             <a:avLst/>
           </a:prstGeom>
           <a:noFill/>
-          <a:ln/>
-        </p:spPr>
-        <p:txBody>
-          <a:bodyPr wrap="square" lIns="0" tIns="0" rIns="0" bIns="0" rtlCol="0" anchor="ctr"/>
-          <a:lstStyle/>
-          <a:p>
-            <a:pPr indent="0" marL="0">
+        </p:spPr>
+        <p:txBody>
+          <a:bodyPr wrap="square" lIns="0" tIns="0" rIns="0" bIns="0" rtlCol="0" anchor="ctr"/>
+          <a:lstStyle/>
+          <a:p>
+            <a:pPr marL="0" indent="0">
               <a:buNone/>
             </a:pPr>
             <a:r>
@@ -9748,13 +9428,12 @@
             <a:avLst/>
           </a:prstGeom>
           <a:noFill/>
-          <a:ln/>
-        </p:spPr>
-        <p:txBody>
-          <a:bodyPr wrap="square" lIns="0" tIns="0" rIns="0" bIns="0" rtlCol="0" anchor="ctr"/>
-          <a:lstStyle/>
-          <a:p>
-            <a:pPr indent="0" marL="0">
+        </p:spPr>
+        <p:txBody>
+          <a:bodyPr wrap="square" lIns="0" tIns="0" rIns="0" bIns="0" rtlCol="0" anchor="ctr"/>
+          <a:lstStyle/>
+          <a:p>
+            <a:pPr marL="0" indent="0">
               <a:buNone/>
             </a:pPr>
             <a:r>
@@ -9811,13 +9490,12 @@
             <a:avLst/>
           </a:prstGeom>
           <a:noFill/>
-          <a:ln/>
-        </p:spPr>
-        <p:txBody>
-          <a:bodyPr wrap="square" lIns="0" tIns="0" rIns="0" bIns="0" rtlCol="0" anchor="ctr"/>
-          <a:lstStyle/>
-          <a:p>
-            <a:pPr indent="0" marL="0">
+        </p:spPr>
+        <p:txBody>
+          <a:bodyPr wrap="square" lIns="0" tIns="0" rIns="0" bIns="0" rtlCol="0" anchor="ctr"/>
+          <a:lstStyle/>
+          <a:p>
+            <a:pPr marL="0" indent="0">
               <a:buNone/>
             </a:pPr>
             <a:r>
@@ -9847,13 +9525,12 @@
             <a:avLst/>
           </a:prstGeom>
           <a:noFill/>
-          <a:ln/>
-        </p:spPr>
-        <p:txBody>
-          <a:bodyPr wrap="square" lIns="0" tIns="0" rIns="0" bIns="0" rtlCol="0" anchor="ctr"/>
-          <a:lstStyle/>
-          <a:p>
-            <a:pPr indent="0" marL="0">
+        </p:spPr>
+        <p:txBody>
+          <a:bodyPr wrap="square" lIns="0" tIns="0" rIns="0" bIns="0" rtlCol="0" anchor="ctr"/>
+          <a:lstStyle/>
+          <a:p>
+            <a:pPr marL="0" indent="0">
               <a:buNone/>
             </a:pPr>
             <a:r>
@@ -9910,13 +9587,12 @@
             <a:avLst/>
           </a:prstGeom>
           <a:noFill/>
-          <a:ln/>
-        </p:spPr>
-        <p:txBody>
-          <a:bodyPr wrap="square" lIns="0" tIns="0" rIns="0" bIns="0" rtlCol="0" anchor="ctr"/>
-          <a:lstStyle/>
-          <a:p>
-            <a:pPr indent="0" marL="0">
+        </p:spPr>
+        <p:txBody>
+          <a:bodyPr wrap="square" lIns="0" tIns="0" rIns="0" bIns="0" rtlCol="0" anchor="ctr"/>
+          <a:lstStyle/>
+          <a:p>
+            <a:pPr marL="0" indent="0">
               <a:buNone/>
             </a:pPr>
             <a:r>
@@ -9946,13 +9622,12 @@
             <a:avLst/>
           </a:prstGeom>
           <a:noFill/>
-          <a:ln/>
-        </p:spPr>
-        <p:txBody>
-          <a:bodyPr wrap="square" lIns="0" tIns="0" rIns="0" bIns="0" rtlCol="0" anchor="ctr"/>
-          <a:lstStyle/>
-          <a:p>
-            <a:pPr indent="0" marL="0">
+        </p:spPr>
+        <p:txBody>
+          <a:bodyPr wrap="square" lIns="0" tIns="0" rIns="0" bIns="0" rtlCol="0" anchor="ctr"/>
+          <a:lstStyle/>
+          <a:p>
+            <a:pPr marL="0" indent="0">
               <a:buNone/>
             </a:pPr>
             <a:r>
@@ -9969,7 +9644,7 @@
       </p:sp>
       <p:pic>
         <p:nvPicPr>
-          <p:cNvPr id="14" name="Image 0" descr="/Users/aman/Desktop/devops-heros/helpdesk-capstone/docs/screenshots/kubernetes-ingress-app.jpg">    </p:cNvPr>
+          <p:cNvPr id="14" name="Image 0" descr="/Users/aman/Desktop/devops-heros/helpdesk-capstone/docs/screenshots/kubernetes-ingress-app.jpg"/>
           <p:cNvPicPr>
             <a:picLocks noChangeAspect="1"/>
           </p:cNvPicPr>
@@ -10006,13 +9681,12 @@
             <a:avLst/>
           </a:prstGeom>
           <a:noFill/>
-          <a:ln/>
-        </p:spPr>
-        <p:txBody>
-          <a:bodyPr wrap="square" lIns="0" tIns="0" rIns="0" bIns="0" rtlCol="0" anchor="ctr"/>
-          <a:lstStyle/>
-          <a:p>
-            <a:pPr indent="0" marL="0">
+        </p:spPr>
+        <p:txBody>
+          <a:bodyPr wrap="square" lIns="0" tIns="0" rIns="0" bIns="0" rtlCol="0" anchor="ctr"/>
+          <a:lstStyle/>
+          <a:p>
+            <a:pPr marL="0" indent="0">
               <a:buNone/>
             </a:pPr>
             <a:r>
@@ -10029,7 +9703,7 @@
       </p:sp>
       <p:pic>
         <p:nvPicPr>
-          <p:cNvPr id="16" name="Image 1" descr="/Users/aman/Desktop/devops-heros/helpdesk-capstone/docs/screenshots/servicedesk-filter-sla-breached.jpg">    </p:cNvPr>
+          <p:cNvPr id="16" name="Image 1" descr="/Users/aman/Desktop/devops-heros/helpdesk-capstone/docs/screenshots/servicedesk-filter-sla-breached.jpg"/>
           <p:cNvPicPr>
             <a:picLocks noChangeAspect="1"/>
           </p:cNvPicPr>
@@ -10066,13 +9740,12 @@
             <a:avLst/>
           </a:prstGeom>
           <a:noFill/>
-          <a:ln/>
-        </p:spPr>
-        <p:txBody>
-          <a:bodyPr wrap="square" lIns="0" tIns="0" rIns="0" bIns="0" rtlCol="0" anchor="ctr"/>
-          <a:lstStyle/>
-          <a:p>
-            <a:pPr indent="0" marL="0">
+        </p:spPr>
+        <p:txBody>
+          <a:bodyPr wrap="square" lIns="0" tIns="0" rIns="0" bIns="0" rtlCol="0" anchor="ctr"/>
+          <a:lstStyle/>
+          <a:p>
+            <a:pPr marL="0" indent="0">
               <a:buNone/>
             </a:pPr>
             <a:r>
@@ -10105,11 +9778,6 @@
           <a:prstGeom prst="rect">
             <a:avLst/>
           </a:prstGeom>
-          <a:extLst>
-            <a:ext uri="{C572A759-6A51-4108-AA02-DFA0A04FC94B}">
-              <ma14:wrappingTextBoxFlag xmlns:ma14="http://schemas.microsoft.com/office/mac/drawingml/2011/main" val="0"/>
-            </a:ext>
-          </a:extLst>
         </p:spPr>
         <p:txBody>
           <a:bodyPr/>
@@ -10125,8 +9793,7 @@
           <a:p>
             <a:pPr algn="l"/>
             <a:fld id="{F7021451-1387-4CA6-816F-3879F97B5CBC}" type="slidenum">
-              <a:rPr b="0" lang="en-US"/>
-              <a:t>2</a:t>
+              <a:rPr lang="en-US" b="0"/>
             </a:fld>
             <a:endParaRPr lang="en-US"/>
           </a:p>
@@ -10142,7 +9809,7 @@
 
 <file path=ppt/slides/slide20.xml><?xml version="1.0" encoding="utf-8"?>
 <p:sld xmlns:a="http://schemas.openxmlformats.org/drawingml/2006/main" xmlns:r="http://schemas.openxmlformats.org/officeDocument/2006/relationships" xmlns:p="http://schemas.openxmlformats.org/presentationml/2006/main">
-  <p:cSld name="Slide 20">
+  <p:cSld>
     <p:spTree>
       <p:nvGrpSpPr>
         <p:cNvPr id="1" name=""/>
@@ -10162,7 +9829,7 @@
           <p:cNvPr id="2" name="Text 0"/>
           <p:cNvSpPr/>
           <p:nvPr>
-            <p:ph idx="100" type="title" hasCustomPrompt="1"/>
+            <p:ph type="title" idx="100" hasCustomPrompt="1"/>
           </p:nvPr>
         </p:nvSpPr>
         <p:spPr>
@@ -10174,13 +9841,12 @@
             <a:avLst/>
           </a:prstGeom>
           <a:noFill/>
-          <a:ln/>
         </p:spPr>
         <p:txBody>
           <a:bodyPr wrap="square" rtlCol="0"/>
           <a:lstStyle/>
           <a:p>
-            <a:pPr algn="l" indent="0" marL="0">
+            <a:pPr marL="0" indent="0" algn="l">
               <a:buNone/>
             </a:pPr>
             <a:r>
@@ -10191,6 +9857,13 @@
               </a:rPr>
               <a:t>Passing your own tests is not the same as being portable</a:t>
             </a:r>
+            <a:br>
+              <a:rPr lang="en-US" sz="4000" b="1" dirty="0">
+                <a:solidFill>
+                  <a:schemeClr val="bg1"/>
+                </a:solidFill>
+              </a:rPr>
+            </a:br>
             <a:endParaRPr lang="en-US" sz="4000" dirty="0"/>
           </a:p>
         </p:txBody>
@@ -10200,25 +9873,24 @@
           <p:cNvPr id="3" name="Text 0"/>
           <p:cNvSpPr/>
           <p:nvPr>
-            <p:ph idx="101" type="body" hasCustomPrompt="1"/>
+            <p:ph type="body" idx="101" hasCustomPrompt="1"/>
           </p:nvPr>
         </p:nvSpPr>
         <p:spPr>
           <a:xfrm>
-            <a:off x="868680" y="3749040"/>
+            <a:off x="868680" y="4046855"/>
             <a:ext cx="10515600" cy="914400"/>
           </a:xfrm>
           <a:prstGeom prst="rect">
             <a:avLst/>
           </a:prstGeom>
           <a:noFill/>
-          <a:ln/>
         </p:spPr>
         <p:txBody>
           <a:bodyPr wrap="square" rtlCol="0"/>
           <a:lstStyle/>
           <a:p>
-            <a:pPr indent="0" marL="0">
+            <a:pPr marL="0" indent="0">
               <a:buNone/>
             </a:pPr>
             <a:r>
@@ -10243,7 +9915,7 @@
 
 <file path=ppt/slides/slide21.xml><?xml version="1.0" encoding="utf-8"?>
 <p:sld xmlns:a="http://schemas.openxmlformats.org/drawingml/2006/main" xmlns:r="http://schemas.openxmlformats.org/officeDocument/2006/relationships" xmlns:p="http://schemas.openxmlformats.org/presentationml/2006/main">
-  <p:cSld name="Slide 21">
+  <p:cSld>
     <p:spTree>
       <p:nvGrpSpPr>
         <p:cNvPr id="1" name=""/>
@@ -10263,7 +9935,7 @@
           <p:cNvPr id="2" name="Text 0"/>
           <p:cNvSpPr/>
           <p:nvPr>
-            <p:ph idx="100" type="title" hasCustomPrompt="1"/>
+            <p:ph type="title" idx="100" hasCustomPrompt="1"/>
           </p:nvPr>
         </p:nvSpPr>
         <p:spPr>
@@ -10275,13 +9947,12 @@
             <a:avLst/>
           </a:prstGeom>
           <a:noFill/>
-          <a:ln/>
         </p:spPr>
         <p:txBody>
           <a:bodyPr wrap="square" rtlCol="0"/>
           <a:lstStyle/>
           <a:p>
-            <a:pPr algn="l" indent="0" marL="0">
+            <a:pPr marL="0" indent="0" algn="l">
               <a:buNone/>
             </a:pPr>
             <a:r>
@@ -10363,13 +10034,12 @@
             <a:avLst/>
           </a:prstGeom>
           <a:noFill/>
-          <a:ln/>
-        </p:spPr>
-        <p:txBody>
-          <a:bodyPr wrap="square" lIns="0" tIns="0" rIns="0" bIns="0" rtlCol="0" anchor="ctr"/>
-          <a:lstStyle/>
-          <a:p>
-            <a:pPr algn="ctr" indent="0" marL="0">
+        </p:spPr>
+        <p:txBody>
+          <a:bodyPr wrap="square" lIns="0" tIns="0" rIns="0" bIns="0" rtlCol="0" anchor="ctr"/>
+          <a:lstStyle/>
+          <a:p>
+            <a:pPr marL="0" indent="0" algn="ctr">
               <a:buNone/>
             </a:pPr>
             <a:r>
@@ -10399,13 +10069,12 @@
             <a:avLst/>
           </a:prstGeom>
           <a:noFill/>
-          <a:ln/>
-        </p:spPr>
-        <p:txBody>
-          <a:bodyPr wrap="square" lIns="0" tIns="0" rIns="0" bIns="0" rtlCol="0" anchor="ctr"/>
-          <a:lstStyle/>
-          <a:p>
-            <a:pPr indent="0" marL="0">
+        </p:spPr>
+        <p:txBody>
+          <a:bodyPr wrap="square" lIns="0" tIns="0" rIns="0" bIns="0" rtlCol="0" anchor="ctr"/>
+          <a:lstStyle/>
+          <a:p>
+            <a:pPr marL="0" indent="0">
               <a:buNone/>
             </a:pPr>
             <a:r>
@@ -10435,13 +10104,12 @@
             <a:avLst/>
           </a:prstGeom>
           <a:noFill/>
-          <a:ln/>
-        </p:spPr>
-        <p:txBody>
-          <a:bodyPr wrap="square" lIns="0" tIns="0" rIns="0" bIns="0" rtlCol="0" anchor="ctr"/>
-          <a:lstStyle/>
-          <a:p>
-            <a:pPr indent="0" marL="0">
+        </p:spPr>
+        <p:txBody>
+          <a:bodyPr wrap="square" lIns="0" tIns="0" rIns="0" bIns="0" rtlCol="0" anchor="ctr"/>
+          <a:lstStyle/>
+          <a:p>
+            <a:pPr marL="0" indent="0">
               <a:buNone/>
             </a:pPr>
             <a:r>
@@ -10471,17 +10139,16 @@
             <a:avLst/>
           </a:prstGeom>
           <a:noFill/>
-          <a:ln/>
-        </p:spPr>
-        <p:txBody>
-          <a:bodyPr wrap="square" lIns="0" tIns="0" rIns="0" bIns="0" rtlCol="0" anchor="ctr"/>
-          <a:lstStyle/>
-          <a:p>
-            <a:pPr indent="0" marL="0">
-              <a:buNone/>
-            </a:pPr>
-            <a:r>
-              <a:rPr lang="en-US" sz="900" b="1" spc="100" kern="0" dirty="0">
+        </p:spPr>
+        <p:txBody>
+          <a:bodyPr wrap="square" lIns="0" tIns="0" rIns="0" bIns="0" rtlCol="0" anchor="ctr"/>
+          <a:lstStyle/>
+          <a:p>
+            <a:pPr marL="0" indent="0">
+              <a:buNone/>
+            </a:pPr>
+            <a:r>
+              <a:rPr lang="en-US" sz="900" b="1" kern="0" spc="100" dirty="0">
                 <a:solidFill>
                   <a:srgbClr val="0EA5A4"/>
                 </a:solidFill>
@@ -10507,13 +10174,12 @@
             <a:avLst/>
           </a:prstGeom>
           <a:noFill/>
-          <a:ln/>
-        </p:spPr>
-        <p:txBody>
-          <a:bodyPr wrap="square" lIns="0" tIns="0" rIns="0" bIns="0" rtlCol="0" anchor="ctr"/>
-          <a:lstStyle/>
-          <a:p>
-            <a:pPr indent="0" marL="0">
+        </p:spPr>
+        <p:txBody>
+          <a:bodyPr wrap="square" lIns="0" tIns="0" rIns="0" bIns="0" rtlCol="0" anchor="ctr"/>
+          <a:lstStyle/>
+          <a:p>
+            <a:pPr marL="0" indent="0">
               <a:buNone/>
             </a:pPr>
             <a:r>
@@ -10595,13 +10261,12 @@
             <a:avLst/>
           </a:prstGeom>
           <a:noFill/>
-          <a:ln/>
-        </p:spPr>
-        <p:txBody>
-          <a:bodyPr wrap="square" lIns="0" tIns="0" rIns="0" bIns="0" rtlCol="0" anchor="ctr"/>
-          <a:lstStyle/>
-          <a:p>
-            <a:pPr algn="ctr" indent="0" marL="0">
+        </p:spPr>
+        <p:txBody>
+          <a:bodyPr wrap="square" lIns="0" tIns="0" rIns="0" bIns="0" rtlCol="0" anchor="ctr"/>
+          <a:lstStyle/>
+          <a:p>
+            <a:pPr marL="0" indent="0" algn="ctr">
               <a:buNone/>
             </a:pPr>
             <a:r>
@@ -10631,13 +10296,12 @@
             <a:avLst/>
           </a:prstGeom>
           <a:noFill/>
-          <a:ln/>
-        </p:spPr>
-        <p:txBody>
-          <a:bodyPr wrap="square" lIns="0" tIns="0" rIns="0" bIns="0" rtlCol="0" anchor="ctr"/>
-          <a:lstStyle/>
-          <a:p>
-            <a:pPr indent="0" marL="0">
+        </p:spPr>
+        <p:txBody>
+          <a:bodyPr wrap="square" lIns="0" tIns="0" rIns="0" bIns="0" rtlCol="0" anchor="ctr"/>
+          <a:lstStyle/>
+          <a:p>
+            <a:pPr marL="0" indent="0">
               <a:buNone/>
             </a:pPr>
             <a:r>
@@ -10667,13 +10331,12 @@
             <a:avLst/>
           </a:prstGeom>
           <a:noFill/>
-          <a:ln/>
-        </p:spPr>
-        <p:txBody>
-          <a:bodyPr wrap="square" lIns="0" tIns="0" rIns="0" bIns="0" rtlCol="0" anchor="ctr"/>
-          <a:lstStyle/>
-          <a:p>
-            <a:pPr indent="0" marL="0">
+        </p:spPr>
+        <p:txBody>
+          <a:bodyPr wrap="square" lIns="0" tIns="0" rIns="0" bIns="0" rtlCol="0" anchor="ctr"/>
+          <a:lstStyle/>
+          <a:p>
+            <a:pPr marL="0" indent="0">
               <a:buNone/>
             </a:pPr>
             <a:r>
@@ -10703,17 +10366,16 @@
             <a:avLst/>
           </a:prstGeom>
           <a:noFill/>
-          <a:ln/>
-        </p:spPr>
-        <p:txBody>
-          <a:bodyPr wrap="square" lIns="0" tIns="0" rIns="0" bIns="0" rtlCol="0" anchor="ctr"/>
-          <a:lstStyle/>
-          <a:p>
-            <a:pPr indent="0" marL="0">
-              <a:buNone/>
-            </a:pPr>
-            <a:r>
-              <a:rPr lang="en-US" sz="900" b="1" spc="100" kern="0" dirty="0">
+        </p:spPr>
+        <p:txBody>
+          <a:bodyPr wrap="square" lIns="0" tIns="0" rIns="0" bIns="0" rtlCol="0" anchor="ctr"/>
+          <a:lstStyle/>
+          <a:p>
+            <a:pPr marL="0" indent="0">
+              <a:buNone/>
+            </a:pPr>
+            <a:r>
+              <a:rPr lang="en-US" sz="900" b="1" kern="0" spc="100" dirty="0">
                 <a:solidFill>
                   <a:srgbClr val="0EA5A4"/>
                 </a:solidFill>
@@ -10739,13 +10401,12 @@
             <a:avLst/>
           </a:prstGeom>
           <a:noFill/>
-          <a:ln/>
-        </p:spPr>
-        <p:txBody>
-          <a:bodyPr wrap="square" lIns="0" tIns="0" rIns="0" bIns="0" rtlCol="0" anchor="ctr"/>
-          <a:lstStyle/>
-          <a:p>
-            <a:pPr indent="0" marL="0">
+        </p:spPr>
+        <p:txBody>
+          <a:bodyPr wrap="square" lIns="0" tIns="0" rIns="0" bIns="0" rtlCol="0" anchor="ctr"/>
+          <a:lstStyle/>
+          <a:p>
+            <a:pPr marL="0" indent="0">
               <a:buNone/>
             </a:pPr>
             <a:r>
@@ -10827,13 +10488,12 @@
             <a:avLst/>
           </a:prstGeom>
           <a:noFill/>
-          <a:ln/>
-        </p:spPr>
-        <p:txBody>
-          <a:bodyPr wrap="square" lIns="0" tIns="0" rIns="0" bIns="0" rtlCol="0" anchor="ctr"/>
-          <a:lstStyle/>
-          <a:p>
-            <a:pPr algn="ctr" indent="0" marL="0">
+        </p:spPr>
+        <p:txBody>
+          <a:bodyPr wrap="square" lIns="0" tIns="0" rIns="0" bIns="0" rtlCol="0" anchor="ctr"/>
+          <a:lstStyle/>
+          <a:p>
+            <a:pPr marL="0" indent="0" algn="ctr">
               <a:buNone/>
             </a:pPr>
             <a:r>
@@ -10863,13 +10523,12 @@
             <a:avLst/>
           </a:prstGeom>
           <a:noFill/>
-          <a:ln/>
-        </p:spPr>
-        <p:txBody>
-          <a:bodyPr wrap="square" lIns="0" tIns="0" rIns="0" bIns="0" rtlCol="0" anchor="ctr"/>
-          <a:lstStyle/>
-          <a:p>
-            <a:pPr indent="0" marL="0">
+        </p:spPr>
+        <p:txBody>
+          <a:bodyPr wrap="square" lIns="0" tIns="0" rIns="0" bIns="0" rtlCol="0" anchor="ctr"/>
+          <a:lstStyle/>
+          <a:p>
+            <a:pPr marL="0" indent="0">
               <a:buNone/>
             </a:pPr>
             <a:r>
@@ -10899,13 +10558,12 @@
             <a:avLst/>
           </a:prstGeom>
           <a:noFill/>
-          <a:ln/>
-        </p:spPr>
-        <p:txBody>
-          <a:bodyPr wrap="square" lIns="0" tIns="0" rIns="0" bIns="0" rtlCol="0" anchor="ctr"/>
-          <a:lstStyle/>
-          <a:p>
-            <a:pPr indent="0" marL="0">
+        </p:spPr>
+        <p:txBody>
+          <a:bodyPr wrap="square" lIns="0" tIns="0" rIns="0" bIns="0" rtlCol="0" anchor="ctr"/>
+          <a:lstStyle/>
+          <a:p>
+            <a:pPr marL="0" indent="0">
               <a:buNone/>
             </a:pPr>
             <a:r>
@@ -10935,17 +10593,16 @@
             <a:avLst/>
           </a:prstGeom>
           <a:noFill/>
-          <a:ln/>
-        </p:spPr>
-        <p:txBody>
-          <a:bodyPr wrap="square" lIns="0" tIns="0" rIns="0" bIns="0" rtlCol="0" anchor="ctr"/>
-          <a:lstStyle/>
-          <a:p>
-            <a:pPr indent="0" marL="0">
-              <a:buNone/>
-            </a:pPr>
-            <a:r>
-              <a:rPr lang="en-US" sz="900" b="1" spc="100" kern="0" dirty="0">
+        </p:spPr>
+        <p:txBody>
+          <a:bodyPr wrap="square" lIns="0" tIns="0" rIns="0" bIns="0" rtlCol="0" anchor="ctr"/>
+          <a:lstStyle/>
+          <a:p>
+            <a:pPr marL="0" indent="0">
+              <a:buNone/>
+            </a:pPr>
+            <a:r>
+              <a:rPr lang="en-US" sz="900" b="1" kern="0" spc="100" dirty="0">
                 <a:solidFill>
                   <a:srgbClr val="0EA5A4"/>
                 </a:solidFill>
@@ -10971,13 +10628,12 @@
             <a:avLst/>
           </a:prstGeom>
           <a:noFill/>
-          <a:ln/>
-        </p:spPr>
-        <p:txBody>
-          <a:bodyPr wrap="square" lIns="0" tIns="0" rIns="0" bIns="0" rtlCol="0" anchor="ctr"/>
-          <a:lstStyle/>
-          <a:p>
-            <a:pPr indent="0" marL="0">
+        </p:spPr>
+        <p:txBody>
+          <a:bodyPr wrap="square" lIns="0" tIns="0" rIns="0" bIns="0" rtlCol="0" anchor="ctr"/>
+          <a:lstStyle/>
+          <a:p>
+            <a:pPr marL="0" indent="0">
               <a:buNone/>
             </a:pPr>
             <a:r>
@@ -11007,13 +10663,12 @@
             <a:avLst/>
           </a:prstGeom>
           <a:noFill/>
-          <a:ln/>
-        </p:spPr>
-        <p:txBody>
-          <a:bodyPr wrap="square" lIns="0" tIns="0" rIns="0" bIns="0" rtlCol="0" anchor="ctr"/>
-          <a:lstStyle/>
-          <a:p>
-            <a:pPr indent="0" marL="0">
+        </p:spPr>
+        <p:txBody>
+          <a:bodyPr wrap="square" lIns="0" tIns="0" rIns="0" bIns="0" rtlCol="0" anchor="ctr"/>
+          <a:lstStyle/>
+          <a:p>
+            <a:pPr marL="0" indent="0">
               <a:buNone/>
             </a:pPr>
             <a:r>
@@ -11046,11 +10701,6 @@
           <a:prstGeom prst="rect">
             <a:avLst/>
           </a:prstGeom>
-          <a:extLst>
-            <a:ext uri="{C572A759-6A51-4108-AA02-DFA0A04FC94B}">
-              <ma14:wrappingTextBoxFlag xmlns:ma14="http://schemas.microsoft.com/office/mac/drawingml/2011/main" val="0"/>
-            </a:ext>
-          </a:extLst>
         </p:spPr>
         <p:txBody>
           <a:bodyPr/>
@@ -11066,8 +10716,7 @@
           <a:p>
             <a:pPr algn="l"/>
             <a:fld id="{F7021451-1387-4CA6-816F-3879F97B5CBC}" type="slidenum">
-              <a:rPr b="0" lang="en-US"/>
-              <a:t>21</a:t>
+              <a:rPr lang="en-US" b="0"/>
             </a:fld>
             <a:endParaRPr lang="en-US"/>
           </a:p>
@@ -11083,7 +10732,7 @@
 
 <file path=ppt/slides/slide22.xml><?xml version="1.0" encoding="utf-8"?>
 <p:sld xmlns:a="http://schemas.openxmlformats.org/drawingml/2006/main" xmlns:r="http://schemas.openxmlformats.org/officeDocument/2006/relationships" xmlns:p="http://schemas.openxmlformats.org/presentationml/2006/main">
-  <p:cSld name="Slide 22">
+  <p:cSld>
     <p:spTree>
       <p:nvGrpSpPr>
         <p:cNvPr id="1" name=""/>
@@ -11103,7 +10752,7 @@
           <p:cNvPr id="2" name="Text 0"/>
           <p:cNvSpPr/>
           <p:nvPr>
-            <p:ph idx="100" type="title" hasCustomPrompt="1"/>
+            <p:ph type="title" idx="100" hasCustomPrompt="1"/>
           </p:nvPr>
         </p:nvSpPr>
         <p:spPr>
@@ -11115,22 +10764,17 @@
             <a:avLst/>
           </a:prstGeom>
           <a:noFill/>
-          <a:ln/>
         </p:spPr>
         <p:txBody>
           <a:bodyPr wrap="square" rtlCol="0"/>
           <a:lstStyle/>
           <a:p>
-            <a:pPr algn="l" indent="0" marL="0">
-              <a:buNone/>
-            </a:pPr>
-            <a:r>
-              <a:rPr lang="en-US" sz="4800" b="1" dirty="0">
-                <a:solidFill>
-                  <a:schemeClr val="bg1"/>
-                </a:solidFill>
-              </a:rPr>
-              <a:t>Where it stands</a:t>
+            <a:pPr marL="0" indent="0" algn="l">
+              <a:buNone/>
+            </a:pPr>
+            <a:r>
+              <a:rPr lang="en-US" sz="4800" dirty="0"/>
+              <a:t>Thank you</a:t>
             </a:r>
             <a:endParaRPr lang="en-US" sz="4800" dirty="0"/>
           </a:p>
@@ -11141,7 +10785,7 @@
           <p:cNvPr id="3" name="Text 0"/>
           <p:cNvSpPr/>
           <p:nvPr>
-            <p:ph idx="101" type="body" hasCustomPrompt="1"/>
+            <p:ph type="body" idx="101" hasCustomPrompt="1"/>
           </p:nvPr>
         </p:nvSpPr>
         <p:spPr>
@@ -11153,13 +10797,12 @@
             <a:avLst/>
           </a:prstGeom>
           <a:noFill/>
-          <a:ln/>
         </p:spPr>
         <p:txBody>
           <a:bodyPr wrap="square" rtlCol="0"/>
           <a:lstStyle/>
           <a:p>
-            <a:pPr indent="0" marL="0">
+            <a:pPr marL="0" indent="0">
               <a:buNone/>
             </a:pPr>
             <a:r>
@@ -11171,294 +10814,6 @@
               <a:t>github.com/AmanYadav7015/devops-capstone-servicedesk</a:t>
             </a:r>
             <a:endParaRPr lang="en-US" sz="1700" dirty="0"/>
-          </a:p>
-        </p:txBody>
-      </p:sp>
-      <p:sp>
-        <p:nvSpPr>
-          <p:cNvPr id="4" name="Text 2"/>
-          <p:cNvSpPr txBox="1"/>
-          <p:nvPr/>
-        </p:nvSpPr>
-        <p:spPr>
-          <a:xfrm>
-            <a:off x="868680" y="4754880"/>
-            <a:ext cx="2468880" cy="566928"/>
-          </a:xfrm>
-          <a:prstGeom prst="rect">
-            <a:avLst/>
-          </a:prstGeom>
-          <a:noFill/>
-          <a:ln/>
-        </p:spPr>
-        <p:txBody>
-          <a:bodyPr wrap="square" lIns="0" tIns="0" rIns="0" bIns="0" rtlCol="0" anchor="ctr"/>
-          <a:lstStyle/>
-          <a:p>
-            <a:pPr indent="0" marL="0">
-              <a:buNone/>
-            </a:pPr>
-            <a:r>
-              <a:rPr lang="en-US" sz="3200" b="1" dirty="0">
-                <a:solidFill>
-                  <a:srgbClr val="0EA5A4"/>
-                </a:solidFill>
-              </a:rPr>
-              <a:t>53</a:t>
-            </a:r>
-            <a:endParaRPr lang="en-US" sz="3200" dirty="0"/>
-          </a:p>
-        </p:txBody>
-      </p:sp>
-      <p:sp>
-        <p:nvSpPr>
-          <p:cNvPr id="5" name="Text 3"/>
-          <p:cNvSpPr txBox="1"/>
-          <p:nvPr/>
-        </p:nvSpPr>
-        <p:spPr>
-          <a:xfrm>
-            <a:off x="868680" y="5321808"/>
-            <a:ext cx="2468880" cy="274320"/>
-          </a:xfrm>
-          <a:prstGeom prst="rect">
-            <a:avLst/>
-          </a:prstGeom>
-          <a:noFill/>
-          <a:ln/>
-        </p:spPr>
-        <p:txBody>
-          <a:bodyPr wrap="square" lIns="0" tIns="0" rIns="0" bIns="0" rtlCol="0" anchor="ctr"/>
-          <a:lstStyle/>
-          <a:p>
-            <a:pPr indent="0" marL="0">
-              <a:buNone/>
-            </a:pPr>
-            <a:r>
-              <a:rPr lang="en-US" sz="1200" dirty="0">
-                <a:solidFill>
-                  <a:srgbClr val="CBD5E1"/>
-                </a:solidFill>
-              </a:rPr>
-              <a:t>commits</a:t>
-            </a:r>
-            <a:endParaRPr lang="en-US" sz="1200" dirty="0"/>
-          </a:p>
-        </p:txBody>
-      </p:sp>
-      <p:sp>
-        <p:nvSpPr>
-          <p:cNvPr id="6" name="Text 4"/>
-          <p:cNvSpPr txBox="1"/>
-          <p:nvPr/>
-        </p:nvSpPr>
-        <p:spPr>
-          <a:xfrm>
-            <a:off x="3566160" y="4754880"/>
-            <a:ext cx="2468880" cy="566928"/>
-          </a:xfrm>
-          <a:prstGeom prst="rect">
-            <a:avLst/>
-          </a:prstGeom>
-          <a:noFill/>
-          <a:ln/>
-        </p:spPr>
-        <p:txBody>
-          <a:bodyPr wrap="square" lIns="0" tIns="0" rIns="0" bIns="0" rtlCol="0" anchor="ctr"/>
-          <a:lstStyle/>
-          <a:p>
-            <a:pPr indent="0" marL="0">
-              <a:buNone/>
-            </a:pPr>
-            <a:r>
-              <a:rPr lang="en-US" sz="3200" b="1" dirty="0">
-                <a:solidFill>
-                  <a:srgbClr val="0EA5A4"/>
-                </a:solidFill>
-              </a:rPr>
-              <a:t>40</a:t>
-            </a:r>
-            <a:endParaRPr lang="en-US" sz="3200" dirty="0"/>
-          </a:p>
-        </p:txBody>
-      </p:sp>
-      <p:sp>
-        <p:nvSpPr>
-          <p:cNvPr id="7" name="Text 5"/>
-          <p:cNvSpPr txBox="1"/>
-          <p:nvPr/>
-        </p:nvSpPr>
-        <p:spPr>
-          <a:xfrm>
-            <a:off x="3566160" y="5321808"/>
-            <a:ext cx="2468880" cy="274320"/>
-          </a:xfrm>
-          <a:prstGeom prst="rect">
-            <a:avLst/>
-          </a:prstGeom>
-          <a:noFill/>
-          <a:ln/>
-        </p:spPr>
-        <p:txBody>
-          <a:bodyPr wrap="square" lIns="0" tIns="0" rIns="0" bIns="0" rtlCol="0" anchor="ctr"/>
-          <a:lstStyle/>
-          <a:p>
-            <a:pPr indent="0" marL="0">
-              <a:buNone/>
-            </a:pPr>
-            <a:r>
-              <a:rPr lang="en-US" sz="1200" dirty="0">
-                <a:solidFill>
-                  <a:srgbClr val="CBD5E1"/>
-                </a:solidFill>
-              </a:rPr>
-              <a:t>tests at 98%</a:t>
-            </a:r>
-            <a:endParaRPr lang="en-US" sz="1200" dirty="0"/>
-          </a:p>
-        </p:txBody>
-      </p:sp>
-      <p:sp>
-        <p:nvSpPr>
-          <p:cNvPr id="8" name="Text 6"/>
-          <p:cNvSpPr txBox="1"/>
-          <p:nvPr/>
-        </p:nvSpPr>
-        <p:spPr>
-          <a:xfrm>
-            <a:off x="6263640" y="4754880"/>
-            <a:ext cx="2468880" cy="566928"/>
-          </a:xfrm>
-          <a:prstGeom prst="rect">
-            <a:avLst/>
-          </a:prstGeom>
-          <a:noFill/>
-          <a:ln/>
-        </p:spPr>
-        <p:txBody>
-          <a:bodyPr wrap="square" lIns="0" tIns="0" rIns="0" bIns="0" rtlCol="0" anchor="ctr"/>
-          <a:lstStyle/>
-          <a:p>
-            <a:pPr indent="0" marL="0">
-              <a:buNone/>
-            </a:pPr>
-            <a:r>
-              <a:rPr lang="en-US" sz="3200" b="1" dirty="0">
-                <a:solidFill>
-                  <a:srgbClr val="0EA5A4"/>
-                </a:solidFill>
-              </a:rPr>
-              <a:t>13</a:t>
-            </a:r>
-            <a:endParaRPr lang="en-US" sz="3200" dirty="0"/>
-          </a:p>
-        </p:txBody>
-      </p:sp>
-      <p:sp>
-        <p:nvSpPr>
-          <p:cNvPr id="9" name="Text 7"/>
-          <p:cNvSpPr txBox="1"/>
-          <p:nvPr/>
-        </p:nvSpPr>
-        <p:spPr>
-          <a:xfrm>
-            <a:off x="6263640" y="5321808"/>
-            <a:ext cx="2468880" cy="274320"/>
-          </a:xfrm>
-          <a:prstGeom prst="rect">
-            <a:avLst/>
-          </a:prstGeom>
-          <a:noFill/>
-          <a:ln/>
-        </p:spPr>
-        <p:txBody>
-          <a:bodyPr wrap="square" lIns="0" tIns="0" rIns="0" bIns="0" rtlCol="0" anchor="ctr"/>
-          <a:lstStyle/>
-          <a:p>
-            <a:pPr indent="0" marL="0">
-              <a:buNone/>
-            </a:pPr>
-            <a:r>
-              <a:rPr lang="en-US" sz="1200" dirty="0">
-                <a:solidFill>
-                  <a:srgbClr val="CBD5E1"/>
-                </a:solidFill>
-              </a:rPr>
-              <a:t>helm revisions</a:t>
-            </a:r>
-            <a:endParaRPr lang="en-US" sz="1200" dirty="0"/>
-          </a:p>
-        </p:txBody>
-      </p:sp>
-      <p:sp>
-        <p:nvSpPr>
-          <p:cNvPr id="10" name="Text 8"/>
-          <p:cNvSpPr txBox="1"/>
-          <p:nvPr/>
-        </p:nvSpPr>
-        <p:spPr>
-          <a:xfrm>
-            <a:off x="8961120" y="4754880"/>
-            <a:ext cx="2468880" cy="566928"/>
-          </a:xfrm>
-          <a:prstGeom prst="rect">
-            <a:avLst/>
-          </a:prstGeom>
-          <a:noFill/>
-          <a:ln/>
-        </p:spPr>
-        <p:txBody>
-          <a:bodyPr wrap="square" lIns="0" tIns="0" rIns="0" bIns="0" rtlCol="0" anchor="ctr"/>
-          <a:lstStyle/>
-          <a:p>
-            <a:pPr indent="0" marL="0">
-              <a:buNone/>
-            </a:pPr>
-            <a:r>
-              <a:rPr lang="en-US" sz="3200" b="1" dirty="0">
-                <a:solidFill>
-                  <a:srgbClr val="0EA5A4"/>
-                </a:solidFill>
-              </a:rPr>
-              <a:t>0</a:t>
-            </a:r>
-            <a:endParaRPr lang="en-US" sz="3200" dirty="0"/>
-          </a:p>
-        </p:txBody>
-      </p:sp>
-      <p:sp>
-        <p:nvSpPr>
-          <p:cNvPr id="11" name="Text 9"/>
-          <p:cNvSpPr txBox="1"/>
-          <p:nvPr/>
-        </p:nvSpPr>
-        <p:spPr>
-          <a:xfrm>
-            <a:off x="8961120" y="5321808"/>
-            <a:ext cx="2468880" cy="274320"/>
-          </a:xfrm>
-          <a:prstGeom prst="rect">
-            <a:avLst/>
-          </a:prstGeom>
-          <a:noFill/>
-          <a:ln/>
-        </p:spPr>
-        <p:txBody>
-          <a:bodyPr wrap="square" lIns="0" tIns="0" rIns="0" bIns="0" rtlCol="0" anchor="ctr"/>
-          <a:lstStyle/>
-          <a:p>
-            <a:pPr indent="0" marL="0">
-              <a:buNone/>
-            </a:pPr>
-            <a:r>
-              <a:rPr lang="en-US" sz="1200" dirty="0">
-                <a:solidFill>
-                  <a:srgbClr val="CBD5E1"/>
-                </a:solidFill>
-              </a:rPr>
-              <a:t>suppressed CVEs</a:t>
-            </a:r>
-            <a:endParaRPr lang="en-US" sz="1200" dirty="0"/>
           </a:p>
         </p:txBody>
       </p:sp>
@@ -11472,7 +10827,7 @@
 
 <file path=ppt/slides/slide3.xml><?xml version="1.0" encoding="utf-8"?>
 <p:sld xmlns:a="http://schemas.openxmlformats.org/drawingml/2006/main" xmlns:r="http://schemas.openxmlformats.org/officeDocument/2006/relationships" xmlns:p="http://schemas.openxmlformats.org/presentationml/2006/main">
-  <p:cSld name="Slide 3">
+  <p:cSld>
     <p:spTree>
       <p:nvGrpSpPr>
         <p:cNvPr id="1" name=""/>
@@ -11492,7 +10847,7 @@
           <p:cNvPr id="2" name="Text 0"/>
           <p:cNvSpPr/>
           <p:nvPr>
-            <p:ph idx="100" type="title" hasCustomPrompt="1"/>
+            <p:ph type="title" idx="100" hasCustomPrompt="1"/>
           </p:nvPr>
         </p:nvSpPr>
         <p:spPr>
@@ -11504,13 +10859,12 @@
             <a:avLst/>
           </a:prstGeom>
           <a:noFill/>
-          <a:ln/>
         </p:spPr>
         <p:txBody>
           <a:bodyPr wrap="square" rtlCol="0"/>
           <a:lstStyle/>
           <a:p>
-            <a:pPr algn="l" indent="0" marL="0">
+            <a:pPr marL="0" indent="0" algn="l">
               <a:buNone/>
             </a:pPr>
             <a:r>
@@ -11567,13 +10921,12 @@
             <a:avLst/>
           </a:prstGeom>
           <a:noFill/>
-          <a:ln/>
-        </p:spPr>
-        <p:txBody>
-          <a:bodyPr wrap="square" lIns="0" tIns="0" rIns="0" bIns="0" rtlCol="0" anchor="ctr"/>
-          <a:lstStyle/>
-          <a:p>
-            <a:pPr indent="0" marL="0">
+        </p:spPr>
+        <p:txBody>
+          <a:bodyPr wrap="square" lIns="0" tIns="0" rIns="0" bIns="0" rtlCol="0" anchor="ctr"/>
+          <a:lstStyle/>
+          <a:p>
+            <a:pPr marL="0" indent="0">
               <a:buNone/>
             </a:pPr>
             <a:r>
@@ -11596,20 +10949,19 @@
         </p:nvSpPr>
         <p:spPr>
           <a:xfrm>
-            <a:off x="914400" y="1737360"/>
-            <a:ext cx="4846320" cy="822960"/>
-          </a:xfrm>
-          <a:prstGeom prst="rect">
-            <a:avLst/>
-          </a:prstGeom>
-          <a:noFill/>
-          <a:ln/>
-        </p:spPr>
-        <p:txBody>
-          <a:bodyPr wrap="square" lIns="0" tIns="0" rIns="0" bIns="0" rtlCol="0" anchor="ctr"/>
-          <a:lstStyle/>
-          <a:p>
-            <a:pPr indent="0" marL="0">
+            <a:off x="676910" y="1737360"/>
+            <a:ext cx="5347970" cy="822960"/>
+          </a:xfrm>
+          <a:prstGeom prst="rect">
+            <a:avLst/>
+          </a:prstGeom>
+          <a:noFill/>
+        </p:spPr>
+        <p:txBody>
+          <a:bodyPr wrap="square" lIns="0" tIns="0" rIns="0" bIns="0" rtlCol="0" anchor="ctr"/>
+          <a:lstStyle/>
+          <a:p>
+            <a:pPr marL="0" indent="0">
               <a:buNone/>
             </a:pPr>
             <a:r>
@@ -11617,16 +10969,16 @@
                 <a:solidFill>
                   <a:srgbClr val="065A82"/>
                 </a:solidFill>
-                <a:latin typeface="Courier New" pitchFamily="34" charset="0"/>
-                <a:ea typeface="Courier New" pitchFamily="34" charset="-122"/>
-                <a:cs typeface="Courier New" pitchFamily="34" charset="-120"/>
+                <a:latin typeface="Courier New" panose="02070609020205020404" pitchFamily="34" charset="0"/>
+                <a:ea typeface="Courier New" panose="02070609020205020404" pitchFamily="34" charset="-122"/>
+                <a:cs typeface="Courier New" panose="02070609020205020404" pitchFamily="34" charset="-120"/>
               </a:rPr>
               <a:t>id · subject · description · severity · status · requester</a:t>
             </a:r>
             <a:endParaRPr lang="en-US" sz="1200" dirty="0"/>
           </a:p>
           <a:p>
-            <a:pPr indent="0" marL="0">
+            <a:pPr marL="0" indent="0">
               <a:buNone/>
             </a:pPr>
             <a:r>
@@ -11634,9 +10986,9 @@
                 <a:solidFill>
                   <a:srgbClr val="065A82"/>
                 </a:solidFill>
-                <a:latin typeface="Courier New" pitchFamily="34" charset="0"/>
-                <a:ea typeface="Courier New" pitchFamily="34" charset="-122"/>
-                <a:cs typeface="Courier New" pitchFamily="34" charset="-120"/>
+                <a:latin typeface="Courier New" panose="02070609020205020404" pitchFamily="34" charset="0"/>
+                <a:ea typeface="Courier New" panose="02070609020205020404" pitchFamily="34" charset="-122"/>
+                <a:cs typeface="Courier New" panose="02070609020205020404" pitchFamily="34" charset="-120"/>
               </a:rPr>
               <a:t>assignee · category_id → categories.id · created_at · sla_due_at</a:t>
             </a:r>
@@ -11659,13 +11011,12 @@
             <a:avLst/>
           </a:prstGeom>
           <a:noFill/>
-          <a:ln/>
-        </p:spPr>
-        <p:txBody>
-          <a:bodyPr wrap="square" lIns="0" tIns="0" rIns="0" bIns="0" rtlCol="0" anchor="ctr"/>
-          <a:lstStyle/>
-          <a:p>
-            <a:pPr indent="0" marL="0">
+        </p:spPr>
+        <p:txBody>
+          <a:bodyPr wrap="square" lIns="0" tIns="0" rIns="0" bIns="0" rtlCol="0" anchor="ctr"/>
+          <a:lstStyle/>
+          <a:p>
+            <a:pPr marL="0" indent="0">
               <a:buNone/>
             </a:pPr>
             <a:r>
@@ -11679,7 +11030,7 @@
             <a:endParaRPr lang="en-US" sz="1200" dirty="0"/>
           </a:p>
           <a:p>
-            <a:pPr indent="0" marL="0">
+            <a:pPr marL="0" indent="0">
               <a:buNone/>
             </a:pPr>
             <a:r>
@@ -11736,13 +11087,12 @@
             <a:avLst/>
           </a:prstGeom>
           <a:noFill/>
-          <a:ln/>
-        </p:spPr>
-        <p:txBody>
-          <a:bodyPr wrap="square" lIns="0" tIns="0" rIns="0" bIns="0" rtlCol="0" anchor="ctr"/>
-          <a:lstStyle/>
-          <a:p>
-            <a:pPr indent="0" marL="0">
+        </p:spPr>
+        <p:txBody>
+          <a:bodyPr wrap="square" lIns="0" tIns="0" rIns="0" bIns="0" rtlCol="0" anchor="ctr"/>
+          <a:lstStyle/>
+          <a:p>
+            <a:pPr marL="0" indent="0">
               <a:buNone/>
             </a:pPr>
             <a:r>
@@ -11772,13 +11122,12 @@
             <a:avLst/>
           </a:prstGeom>
           <a:noFill/>
-          <a:ln/>
-        </p:spPr>
-        <p:txBody>
-          <a:bodyPr wrap="square" lIns="0" tIns="0" rIns="0" bIns="0" rtlCol="0" anchor="ctr"/>
-          <a:lstStyle/>
-          <a:p>
-            <a:pPr indent="0" marL="0">
+        </p:spPr>
+        <p:txBody>
+          <a:bodyPr wrap="square" lIns="0" tIns="0" rIns="0" bIns="0" rtlCol="0" anchor="ctr"/>
+          <a:lstStyle/>
+          <a:p>
+            <a:pPr marL="0" indent="0">
               <a:buNone/>
             </a:pPr>
             <a:r>
@@ -11786,9 +11135,9 @@
                 <a:solidFill>
                   <a:srgbClr val="065A82"/>
                 </a:solidFill>
-                <a:latin typeface="Courier New" pitchFamily="34" charset="0"/>
-                <a:ea typeface="Courier New" pitchFamily="34" charset="-122"/>
-                <a:cs typeface="Courier New" pitchFamily="34" charset="-120"/>
+                <a:latin typeface="Courier New" panose="02070609020205020404" pitchFamily="34" charset="0"/>
+                <a:ea typeface="Courier New" panose="02070609020205020404" pitchFamily="34" charset="-122"/>
+                <a:cs typeface="Courier New" panose="02070609020205020404" pitchFamily="34" charset="-120"/>
               </a:rPr>
               <a:t>id · name (unique) · description</a:t>
             </a:r>
@@ -11811,13 +11160,12 @@
             <a:avLst/>
           </a:prstGeom>
           <a:noFill/>
-          <a:ln/>
-        </p:spPr>
-        <p:txBody>
-          <a:bodyPr wrap="square" lIns="0" tIns="0" rIns="0" bIns="0" rtlCol="0" anchor="ctr"/>
-          <a:lstStyle/>
-          <a:p>
-            <a:pPr indent="0" marL="0">
+        </p:spPr>
+        <p:txBody>
+          <a:bodyPr wrap="square" lIns="0" tIns="0" rIns="0" bIns="0" rtlCol="0" anchor="ctr"/>
+          <a:lstStyle/>
+          <a:p>
+            <a:pPr marL="0" indent="0">
               <a:buNone/>
             </a:pPr>
             <a:r>
@@ -11874,13 +11222,12 @@
             <a:avLst/>
           </a:prstGeom>
           <a:noFill/>
-          <a:ln/>
-        </p:spPr>
-        <p:txBody>
-          <a:bodyPr wrap="square" lIns="0" tIns="0" rIns="0" bIns="0" rtlCol="0" anchor="ctr"/>
-          <a:lstStyle/>
-          <a:p>
-            <a:pPr indent="0" marL="0">
+        </p:spPr>
+        <p:txBody>
+          <a:bodyPr wrap="square" lIns="0" tIns="0" rIns="0" bIns="0" rtlCol="0" anchor="ctr"/>
+          <a:lstStyle/>
+          <a:p>
+            <a:pPr marL="0" indent="0">
               <a:buNone/>
             </a:pPr>
             <a:r>
@@ -11910,13 +11257,12 @@
             <a:avLst/>
           </a:prstGeom>
           <a:noFill/>
-          <a:ln/>
-        </p:spPr>
-        <p:txBody>
-          <a:bodyPr wrap="square" lIns="0" tIns="0" rIns="0" bIns="0" rtlCol="0" anchor="ctr"/>
-          <a:lstStyle/>
-          <a:p>
-            <a:pPr indent="0" marL="0">
+        </p:spPr>
+        <p:txBody>
+          <a:bodyPr wrap="square" lIns="0" tIns="0" rIns="0" bIns="0" rtlCol="0" anchor="ctr"/>
+          <a:lstStyle/>
+          <a:p>
+            <a:pPr marL="0" indent="0">
               <a:spcAft>
                 <a:spcPts val="700"/>
               </a:spcAft>
@@ -11933,7 +11279,7 @@
             <a:endParaRPr lang="en-US" sz="1200" dirty="0"/>
           </a:p>
           <a:p>
-            <a:pPr indent="0" marL="0">
+            <a:pPr marL="0" indent="0">
               <a:spcAft>
                 <a:spcPts val="700"/>
               </a:spcAft>
@@ -11969,11 +11315,6 @@
           <a:prstGeom prst="rect">
             <a:avLst/>
           </a:prstGeom>
-          <a:extLst>
-            <a:ext uri="{C572A759-6A51-4108-AA02-DFA0A04FC94B}">
-              <ma14:wrappingTextBoxFlag xmlns:ma14="http://schemas.microsoft.com/office/mac/drawingml/2011/main" val="0"/>
-            </a:ext>
-          </a:extLst>
         </p:spPr>
         <p:txBody>
           <a:bodyPr/>
@@ -11989,8 +11330,7 @@
           <a:p>
             <a:pPr algn="l"/>
             <a:fld id="{F7021451-1387-4CA6-816F-3879F97B5CBC}" type="slidenum">
-              <a:rPr b="0" lang="en-US"/>
-              <a:t>3</a:t>
+              <a:rPr lang="en-US" b="0"/>
             </a:fld>
             <a:endParaRPr lang="en-US"/>
           </a:p>
@@ -12006,7 +11346,7 @@
 
 <file path=ppt/slides/slide4.xml><?xml version="1.0" encoding="utf-8"?>
 <p:sld xmlns:a="http://schemas.openxmlformats.org/drawingml/2006/main" xmlns:r="http://schemas.openxmlformats.org/officeDocument/2006/relationships" xmlns:p="http://schemas.openxmlformats.org/presentationml/2006/main">
-  <p:cSld name="Slide 4">
+  <p:cSld>
     <p:spTree>
       <p:nvGrpSpPr>
         <p:cNvPr id="1" name=""/>
@@ -12026,7 +11366,7 @@
           <p:cNvPr id="2" name="Text 0"/>
           <p:cNvSpPr/>
           <p:nvPr>
-            <p:ph idx="100" type="title" hasCustomPrompt="1"/>
+            <p:ph type="title" idx="100" hasCustomPrompt="1"/>
           </p:nvPr>
         </p:nvSpPr>
         <p:spPr>
@@ -12038,13 +11378,12 @@
             <a:avLst/>
           </a:prstGeom>
           <a:noFill/>
-          <a:ln/>
         </p:spPr>
         <p:txBody>
           <a:bodyPr wrap="square" rtlCol="0"/>
           <a:lstStyle/>
           <a:p>
-            <a:pPr algn="l" indent="0" marL="0">
+            <a:pPr marL="0" indent="0" algn="l">
               <a:buNone/>
             </a:pPr>
             <a:r>
@@ -12099,13 +11438,12 @@
             <a:avLst/>
           </a:prstGeom>
           <a:noFill/>
-          <a:ln/>
-        </p:spPr>
-        <p:txBody>
-          <a:bodyPr wrap="square" lIns="0" tIns="0" rIns="0" bIns="0" rtlCol="0" anchor="ctr"/>
-          <a:lstStyle/>
-          <a:p>
-            <a:pPr indent="0" marL="0">
+        </p:spPr>
+        <p:txBody>
+          <a:bodyPr wrap="square" lIns="0" tIns="0" rIns="0" bIns="0" rtlCol="0" anchor="ctr"/>
+          <a:lstStyle/>
+          <a:p>
+            <a:pPr marL="0" indent="0">
               <a:buNone/>
             </a:pPr>
             <a:r>
@@ -12135,13 +11473,12 @@
             <a:avLst/>
           </a:prstGeom>
           <a:noFill/>
-          <a:ln/>
-        </p:spPr>
-        <p:txBody>
-          <a:bodyPr wrap="square" lIns="0" tIns="0" rIns="0" bIns="0" rtlCol="0" anchor="ctr"/>
-          <a:lstStyle/>
-          <a:p>
-            <a:pPr indent="0" marL="0">
+        </p:spPr>
+        <p:txBody>
+          <a:bodyPr wrap="square" lIns="0" tIns="0" rIns="0" bIns="0" rtlCol="0" anchor="ctr"/>
+          <a:lstStyle/>
+          <a:p>
+            <a:pPr marL="0" indent="0">
               <a:buNone/>
             </a:pPr>
             <a:r>
@@ -12149,9 +11486,9 @@
                 <a:solidFill>
                   <a:schemeClr val="tx1"/>
                 </a:solidFill>
-                <a:latin typeface="Courier New" pitchFamily="34" charset="0"/>
-                <a:ea typeface="Courier New" pitchFamily="34" charset="-122"/>
-                <a:cs typeface="Courier New" pitchFamily="34" charset="-120"/>
+                <a:latin typeface="Courier New" panose="02070609020205020404" pitchFamily="34" charset="0"/>
+                <a:ea typeface="Courier New" panose="02070609020205020404" pitchFamily="34" charset="-122"/>
+                <a:cs typeface="Courier New" panose="02070609020205020404" pitchFamily="34" charset="-120"/>
               </a:rPr>
               <a:t>/health</a:t>
             </a:r>
@@ -12174,13 +11511,12 @@
             <a:avLst/>
           </a:prstGeom>
           <a:noFill/>
-          <a:ln/>
-        </p:spPr>
-        <p:txBody>
-          <a:bodyPr wrap="square" lIns="0" tIns="0" rIns="0" bIns="0" rtlCol="0" anchor="ctr"/>
-          <a:lstStyle/>
-          <a:p>
-            <a:pPr indent="0" marL="0">
+        </p:spPr>
+        <p:txBody>
+          <a:bodyPr wrap="square" lIns="0" tIns="0" rIns="0" bIns="0" rtlCol="0" anchor="ctr"/>
+          <a:lstStyle/>
+          <a:p>
+            <a:pPr marL="0" indent="0">
               <a:buNone/>
             </a:pPr>
             <a:r>
@@ -12210,13 +11546,12 @@
             <a:avLst/>
           </a:prstGeom>
           <a:noFill/>
-          <a:ln/>
-        </p:spPr>
-        <p:txBody>
-          <a:bodyPr wrap="square" lIns="0" tIns="0" rIns="0" bIns="0" rtlCol="0" anchor="ctr"/>
-          <a:lstStyle/>
-          <a:p>
-            <a:pPr algn="r" indent="0" marL="0">
+        </p:spPr>
+        <p:txBody>
+          <a:bodyPr wrap="square" lIns="0" tIns="0" rIns="0" bIns="0" rtlCol="0" anchor="ctr"/>
+          <a:lstStyle/>
+          <a:p>
+            <a:pPr marL="0" indent="0" algn="r">
               <a:buNone/>
             </a:pPr>
             <a:r>
@@ -12246,13 +11581,12 @@
             <a:avLst/>
           </a:prstGeom>
           <a:noFill/>
-          <a:ln/>
-        </p:spPr>
-        <p:txBody>
-          <a:bodyPr wrap="square" lIns="0" tIns="0" rIns="0" bIns="0" rtlCol="0" anchor="ctr"/>
-          <a:lstStyle/>
-          <a:p>
-            <a:pPr indent="0" marL="0">
+        </p:spPr>
+        <p:txBody>
+          <a:bodyPr wrap="square" lIns="0" tIns="0" rIns="0" bIns="0" rtlCol="0" anchor="ctr"/>
+          <a:lstStyle/>
+          <a:p>
+            <a:pPr marL="0" indent="0">
               <a:buNone/>
             </a:pPr>
             <a:r>
@@ -12282,13 +11616,12 @@
             <a:avLst/>
           </a:prstGeom>
           <a:noFill/>
-          <a:ln/>
-        </p:spPr>
-        <p:txBody>
-          <a:bodyPr wrap="square" lIns="0" tIns="0" rIns="0" bIns="0" rtlCol="0" anchor="ctr"/>
-          <a:lstStyle/>
-          <a:p>
-            <a:pPr indent="0" marL="0">
+        </p:spPr>
+        <p:txBody>
+          <a:bodyPr wrap="square" lIns="0" tIns="0" rIns="0" bIns="0" rtlCol="0" anchor="ctr"/>
+          <a:lstStyle/>
+          <a:p>
+            <a:pPr marL="0" indent="0">
               <a:buNone/>
             </a:pPr>
             <a:r>
@@ -12296,9 +11629,9 @@
                 <a:solidFill>
                   <a:schemeClr val="tx1"/>
                 </a:solidFill>
-                <a:latin typeface="Courier New" pitchFamily="34" charset="0"/>
-                <a:ea typeface="Courier New" pitchFamily="34" charset="-122"/>
-                <a:cs typeface="Courier New" pitchFamily="34" charset="-120"/>
+                <a:latin typeface="Courier New" panose="02070609020205020404" pitchFamily="34" charset="0"/>
+                <a:ea typeface="Courier New" panose="02070609020205020404" pitchFamily="34" charset="-122"/>
+                <a:cs typeface="Courier New" panose="02070609020205020404" pitchFamily="34" charset="-120"/>
               </a:rPr>
               <a:t>/ready</a:t>
             </a:r>
@@ -12321,13 +11654,12 @@
             <a:avLst/>
           </a:prstGeom>
           <a:noFill/>
-          <a:ln/>
-        </p:spPr>
-        <p:txBody>
-          <a:bodyPr wrap="square" lIns="0" tIns="0" rIns="0" bIns="0" rtlCol="0" anchor="ctr"/>
-          <a:lstStyle/>
-          <a:p>
-            <a:pPr indent="0" marL="0">
+        </p:spPr>
+        <p:txBody>
+          <a:bodyPr wrap="square" lIns="0" tIns="0" rIns="0" bIns="0" rtlCol="0" anchor="ctr"/>
+          <a:lstStyle/>
+          <a:p>
+            <a:pPr marL="0" indent="0">
               <a:buNone/>
             </a:pPr>
             <a:r>
@@ -12357,13 +11689,12 @@
             <a:avLst/>
           </a:prstGeom>
           <a:noFill/>
-          <a:ln/>
-        </p:spPr>
-        <p:txBody>
-          <a:bodyPr wrap="square" lIns="0" tIns="0" rIns="0" bIns="0" rtlCol="0" anchor="ctr"/>
-          <a:lstStyle/>
-          <a:p>
-            <a:pPr algn="r" indent="0" marL="0">
+        </p:spPr>
+        <p:txBody>
+          <a:bodyPr wrap="square" lIns="0" tIns="0" rIns="0" bIns="0" rtlCol="0" anchor="ctr"/>
+          <a:lstStyle/>
+          <a:p>
+            <a:pPr marL="0" indent="0" algn="r">
               <a:buNone/>
             </a:pPr>
             <a:r>
@@ -12418,13 +11749,12 @@
             <a:avLst/>
           </a:prstGeom>
           <a:noFill/>
-          <a:ln/>
-        </p:spPr>
-        <p:txBody>
-          <a:bodyPr wrap="square" lIns="0" tIns="0" rIns="0" bIns="0" rtlCol="0" anchor="ctr"/>
-          <a:lstStyle/>
-          <a:p>
-            <a:pPr indent="0" marL="0">
+        </p:spPr>
+        <p:txBody>
+          <a:bodyPr wrap="square" lIns="0" tIns="0" rIns="0" bIns="0" rtlCol="0" anchor="ctr"/>
+          <a:lstStyle/>
+          <a:p>
+            <a:pPr marL="0" indent="0">
               <a:buNone/>
             </a:pPr>
             <a:r>
@@ -12454,13 +11784,12 @@
             <a:avLst/>
           </a:prstGeom>
           <a:noFill/>
-          <a:ln/>
-        </p:spPr>
-        <p:txBody>
-          <a:bodyPr wrap="square" lIns="0" tIns="0" rIns="0" bIns="0" rtlCol="0" anchor="ctr"/>
-          <a:lstStyle/>
-          <a:p>
-            <a:pPr indent="0" marL="0">
+        </p:spPr>
+        <p:txBody>
+          <a:bodyPr wrap="square" lIns="0" tIns="0" rIns="0" bIns="0" rtlCol="0" anchor="ctr"/>
+          <a:lstStyle/>
+          <a:p>
+            <a:pPr marL="0" indent="0">
               <a:buNone/>
             </a:pPr>
             <a:r>
@@ -12468,9 +11797,9 @@
                 <a:solidFill>
                   <a:schemeClr val="tx1"/>
                 </a:solidFill>
-                <a:latin typeface="Courier New" pitchFamily="34" charset="0"/>
-                <a:ea typeface="Courier New" pitchFamily="34" charset="-122"/>
-                <a:cs typeface="Courier New" pitchFamily="34" charset="-120"/>
+                <a:latin typeface="Courier New" panose="02070609020205020404" pitchFamily="34" charset="0"/>
+                <a:ea typeface="Courier New" panose="02070609020205020404" pitchFamily="34" charset="-122"/>
+                <a:cs typeface="Courier New" panose="02070609020205020404" pitchFamily="34" charset="-120"/>
               </a:rPr>
               <a:t>/metrics</a:t>
             </a:r>
@@ -12493,13 +11822,12 @@
             <a:avLst/>
           </a:prstGeom>
           <a:noFill/>
-          <a:ln/>
-        </p:spPr>
-        <p:txBody>
-          <a:bodyPr wrap="square" lIns="0" tIns="0" rIns="0" bIns="0" rtlCol="0" anchor="ctr"/>
-          <a:lstStyle/>
-          <a:p>
-            <a:pPr indent="0" marL="0">
+        </p:spPr>
+        <p:txBody>
+          <a:bodyPr wrap="square" lIns="0" tIns="0" rIns="0" bIns="0" rtlCol="0" anchor="ctr"/>
+          <a:lstStyle/>
+          <a:p>
+            <a:pPr marL="0" indent="0">
               <a:buNone/>
             </a:pPr>
             <a:r>
@@ -12529,13 +11857,12 @@
             <a:avLst/>
           </a:prstGeom>
           <a:noFill/>
-          <a:ln/>
-        </p:spPr>
-        <p:txBody>
-          <a:bodyPr wrap="square" lIns="0" tIns="0" rIns="0" bIns="0" rtlCol="0" anchor="ctr"/>
-          <a:lstStyle/>
-          <a:p>
-            <a:pPr algn="r" indent="0" marL="0">
+        </p:spPr>
+        <p:txBody>
+          <a:bodyPr wrap="square" lIns="0" tIns="0" rIns="0" bIns="0" rtlCol="0" anchor="ctr"/>
+          <a:lstStyle/>
+          <a:p>
+            <a:pPr marL="0" indent="0" algn="r">
               <a:buNone/>
             </a:pPr>
             <a:r>
@@ -12565,13 +11892,12 @@
             <a:avLst/>
           </a:prstGeom>
           <a:noFill/>
-          <a:ln/>
-        </p:spPr>
-        <p:txBody>
-          <a:bodyPr wrap="square" lIns="0" tIns="0" rIns="0" bIns="0" rtlCol="0" anchor="ctr"/>
-          <a:lstStyle/>
-          <a:p>
-            <a:pPr indent="0" marL="0">
+        </p:spPr>
+        <p:txBody>
+          <a:bodyPr wrap="square" lIns="0" tIns="0" rIns="0" bIns="0" rtlCol="0" anchor="ctr"/>
+          <a:lstStyle/>
+          <a:p>
+            <a:pPr marL="0" indent="0">
               <a:buNone/>
             </a:pPr>
             <a:r>
@@ -12601,13 +11927,12 @@
             <a:avLst/>
           </a:prstGeom>
           <a:noFill/>
-          <a:ln/>
-        </p:spPr>
-        <p:txBody>
-          <a:bodyPr wrap="square" lIns="0" tIns="0" rIns="0" bIns="0" rtlCol="0" anchor="ctr"/>
-          <a:lstStyle/>
-          <a:p>
-            <a:pPr indent="0" marL="0">
+        </p:spPr>
+        <p:txBody>
+          <a:bodyPr wrap="square" lIns="0" tIns="0" rIns="0" bIns="0" rtlCol="0" anchor="ctr"/>
+          <a:lstStyle/>
+          <a:p>
+            <a:pPr marL="0" indent="0">
               <a:buNone/>
             </a:pPr>
             <a:r>
@@ -12615,9 +11940,9 @@
                 <a:solidFill>
                   <a:schemeClr val="tx1"/>
                 </a:solidFill>
-                <a:latin typeface="Courier New" pitchFamily="34" charset="0"/>
-                <a:ea typeface="Courier New" pitchFamily="34" charset="-122"/>
-                <a:cs typeface="Courier New" pitchFamily="34" charset="-120"/>
+                <a:latin typeface="Courier New" panose="02070609020205020404" pitchFamily="34" charset="0"/>
+                <a:ea typeface="Courier New" panose="02070609020205020404" pitchFamily="34" charset="-122"/>
+                <a:cs typeface="Courier New" panose="02070609020205020404" pitchFamily="34" charset="-120"/>
               </a:rPr>
               <a:t>/api/tickets</a:t>
             </a:r>
@@ -12640,13 +11965,12 @@
             <a:avLst/>
           </a:prstGeom>
           <a:noFill/>
-          <a:ln/>
-        </p:spPr>
-        <p:txBody>
-          <a:bodyPr wrap="square" lIns="0" tIns="0" rIns="0" bIns="0" rtlCol="0" anchor="ctr"/>
-          <a:lstStyle/>
-          <a:p>
-            <a:pPr indent="0" marL="0">
+        </p:spPr>
+        <p:txBody>
+          <a:bodyPr wrap="square" lIns="0" tIns="0" rIns="0" bIns="0" rtlCol="0" anchor="ctr"/>
+          <a:lstStyle/>
+          <a:p>
+            <a:pPr marL="0" indent="0">
               <a:buNone/>
             </a:pPr>
             <a:r>
@@ -12676,13 +12000,12 @@
             <a:avLst/>
           </a:prstGeom>
           <a:noFill/>
-          <a:ln/>
-        </p:spPr>
-        <p:txBody>
-          <a:bodyPr wrap="square" lIns="0" tIns="0" rIns="0" bIns="0" rtlCol="0" anchor="ctr"/>
-          <a:lstStyle/>
-          <a:p>
-            <a:pPr algn="r" indent="0" marL="0">
+        </p:spPr>
+        <p:txBody>
+          <a:bodyPr wrap="square" lIns="0" tIns="0" rIns="0" bIns="0" rtlCol="0" anchor="ctr"/>
+          <a:lstStyle/>
+          <a:p>
+            <a:pPr marL="0" indent="0" algn="r">
               <a:buNone/>
             </a:pPr>
             <a:r>
@@ -12737,13 +12060,12 @@
             <a:avLst/>
           </a:prstGeom>
           <a:noFill/>
-          <a:ln/>
-        </p:spPr>
-        <p:txBody>
-          <a:bodyPr wrap="square" lIns="0" tIns="0" rIns="0" bIns="0" rtlCol="0" anchor="ctr"/>
-          <a:lstStyle/>
-          <a:p>
-            <a:pPr indent="0" marL="0">
+        </p:spPr>
+        <p:txBody>
+          <a:bodyPr wrap="square" lIns="0" tIns="0" rIns="0" bIns="0" rtlCol="0" anchor="ctr"/>
+          <a:lstStyle/>
+          <a:p>
+            <a:pPr marL="0" indent="0">
               <a:buNone/>
             </a:pPr>
             <a:r>
@@ -12773,13 +12095,12 @@
             <a:avLst/>
           </a:prstGeom>
           <a:noFill/>
-          <a:ln/>
-        </p:spPr>
-        <p:txBody>
-          <a:bodyPr wrap="square" lIns="0" tIns="0" rIns="0" bIns="0" rtlCol="0" anchor="ctr"/>
-          <a:lstStyle/>
-          <a:p>
-            <a:pPr indent="0" marL="0">
+        </p:spPr>
+        <p:txBody>
+          <a:bodyPr wrap="square" lIns="0" tIns="0" rIns="0" bIns="0" rtlCol="0" anchor="ctr"/>
+          <a:lstStyle/>
+          <a:p>
+            <a:pPr marL="0" indent="0">
               <a:buNone/>
             </a:pPr>
             <a:r>
@@ -12787,9 +12108,9 @@
                 <a:solidFill>
                   <a:schemeClr val="tx1"/>
                 </a:solidFill>
-                <a:latin typeface="Courier New" pitchFamily="34" charset="0"/>
-                <a:ea typeface="Courier New" pitchFamily="34" charset="-122"/>
-                <a:cs typeface="Courier New" pitchFamily="34" charset="-120"/>
+                <a:latin typeface="Courier New" panose="02070609020205020404" pitchFamily="34" charset="0"/>
+                <a:ea typeface="Courier New" panose="02070609020205020404" pitchFamily="34" charset="-122"/>
+                <a:cs typeface="Courier New" panose="02070609020205020404" pitchFamily="34" charset="-120"/>
               </a:rPr>
               <a:t>/api/tickets</a:t>
             </a:r>
@@ -12812,13 +12133,12 @@
             <a:avLst/>
           </a:prstGeom>
           <a:noFill/>
-          <a:ln/>
-        </p:spPr>
-        <p:txBody>
-          <a:bodyPr wrap="square" lIns="0" tIns="0" rIns="0" bIns="0" rtlCol="0" anchor="ctr"/>
-          <a:lstStyle/>
-          <a:p>
-            <a:pPr indent="0" marL="0">
+        </p:spPr>
+        <p:txBody>
+          <a:bodyPr wrap="square" lIns="0" tIns="0" rIns="0" bIns="0" rtlCol="0" anchor="ctr"/>
+          <a:lstStyle/>
+          <a:p>
+            <a:pPr marL="0" indent="0">
               <a:buNone/>
             </a:pPr>
             <a:r>
@@ -12848,13 +12168,12 @@
             <a:avLst/>
           </a:prstGeom>
           <a:noFill/>
-          <a:ln/>
-        </p:spPr>
-        <p:txBody>
-          <a:bodyPr wrap="square" lIns="0" tIns="0" rIns="0" bIns="0" rtlCol="0" anchor="ctr"/>
-          <a:lstStyle/>
-          <a:p>
-            <a:pPr algn="r" indent="0" marL="0">
+        </p:spPr>
+        <p:txBody>
+          <a:bodyPr wrap="square" lIns="0" tIns="0" rIns="0" bIns="0" rtlCol="0" anchor="ctr"/>
+          <a:lstStyle/>
+          <a:p>
+            <a:pPr marL="0" indent="0" algn="r">
               <a:buNone/>
             </a:pPr>
             <a:r>
@@ -12884,13 +12203,12 @@
             <a:avLst/>
           </a:prstGeom>
           <a:noFill/>
-          <a:ln/>
-        </p:spPr>
-        <p:txBody>
-          <a:bodyPr wrap="square" lIns="0" tIns="0" rIns="0" bIns="0" rtlCol="0" anchor="ctr"/>
-          <a:lstStyle/>
-          <a:p>
-            <a:pPr indent="0" marL="0">
+        </p:spPr>
+        <p:txBody>
+          <a:bodyPr wrap="square" lIns="0" tIns="0" rIns="0" bIns="0" rtlCol="0" anchor="ctr"/>
+          <a:lstStyle/>
+          <a:p>
+            <a:pPr marL="0" indent="0">
               <a:buNone/>
             </a:pPr>
             <a:r>
@@ -12920,13 +12238,12 @@
             <a:avLst/>
           </a:prstGeom>
           <a:noFill/>
-          <a:ln/>
-        </p:spPr>
-        <p:txBody>
-          <a:bodyPr wrap="square" lIns="0" tIns="0" rIns="0" bIns="0" rtlCol="0" anchor="ctr"/>
-          <a:lstStyle/>
-          <a:p>
-            <a:pPr indent="0" marL="0">
+        </p:spPr>
+        <p:txBody>
+          <a:bodyPr wrap="square" lIns="0" tIns="0" rIns="0" bIns="0" rtlCol="0" anchor="ctr"/>
+          <a:lstStyle/>
+          <a:p>
+            <a:pPr marL="0" indent="0">
               <a:buNone/>
             </a:pPr>
             <a:r>
@@ -12934,9 +12251,9 @@
                 <a:solidFill>
                   <a:schemeClr val="tx1"/>
                 </a:solidFill>
-                <a:latin typeface="Courier New" pitchFamily="34" charset="0"/>
-                <a:ea typeface="Courier New" pitchFamily="34" charset="-122"/>
-                <a:cs typeface="Courier New" pitchFamily="34" charset="-120"/>
+                <a:latin typeface="Courier New" panose="02070609020205020404" pitchFamily="34" charset="0"/>
+                <a:ea typeface="Courier New" panose="02070609020205020404" pitchFamily="34" charset="-122"/>
+                <a:cs typeface="Courier New" panose="02070609020205020404" pitchFamily="34" charset="-120"/>
               </a:rPr>
               <a:t>/api/tickets/{id}</a:t>
             </a:r>
@@ -12959,13 +12276,12 @@
             <a:avLst/>
           </a:prstGeom>
           <a:noFill/>
-          <a:ln/>
-        </p:spPr>
-        <p:txBody>
-          <a:bodyPr wrap="square" lIns="0" tIns="0" rIns="0" bIns="0" rtlCol="0" anchor="ctr"/>
-          <a:lstStyle/>
-          <a:p>
-            <a:pPr indent="0" marL="0">
+        </p:spPr>
+        <p:txBody>
+          <a:bodyPr wrap="square" lIns="0" tIns="0" rIns="0" bIns="0" rtlCol="0" anchor="ctr"/>
+          <a:lstStyle/>
+          <a:p>
+            <a:pPr marL="0" indent="0">
               <a:buNone/>
             </a:pPr>
             <a:r>
@@ -12995,13 +12311,12 @@
             <a:avLst/>
           </a:prstGeom>
           <a:noFill/>
-          <a:ln/>
-        </p:spPr>
-        <p:txBody>
-          <a:bodyPr wrap="square" lIns="0" tIns="0" rIns="0" bIns="0" rtlCol="0" anchor="ctr"/>
-          <a:lstStyle/>
-          <a:p>
-            <a:pPr algn="r" indent="0" marL="0">
+        </p:spPr>
+        <p:txBody>
+          <a:bodyPr wrap="square" lIns="0" tIns="0" rIns="0" bIns="0" rtlCol="0" anchor="ctr"/>
+          <a:lstStyle/>
+          <a:p>
+            <a:pPr marL="0" indent="0" algn="r">
               <a:buNone/>
             </a:pPr>
             <a:r>
@@ -13056,13 +12371,12 @@
             <a:avLst/>
           </a:prstGeom>
           <a:noFill/>
-          <a:ln/>
-        </p:spPr>
-        <p:txBody>
-          <a:bodyPr wrap="square" lIns="0" tIns="0" rIns="0" bIns="0" rtlCol="0" anchor="ctr"/>
-          <a:lstStyle/>
-          <a:p>
-            <a:pPr indent="0" marL="0">
+        </p:spPr>
+        <p:txBody>
+          <a:bodyPr wrap="square" lIns="0" tIns="0" rIns="0" bIns="0" rtlCol="0" anchor="ctr"/>
+          <a:lstStyle/>
+          <a:p>
+            <a:pPr marL="0" indent="0">
               <a:buNone/>
             </a:pPr>
             <a:r>
@@ -13092,13 +12406,12 @@
             <a:avLst/>
           </a:prstGeom>
           <a:noFill/>
-          <a:ln/>
-        </p:spPr>
-        <p:txBody>
-          <a:bodyPr wrap="square" lIns="0" tIns="0" rIns="0" bIns="0" rtlCol="0" anchor="ctr"/>
-          <a:lstStyle/>
-          <a:p>
-            <a:pPr indent="0" marL="0">
+        </p:spPr>
+        <p:txBody>
+          <a:bodyPr wrap="square" lIns="0" tIns="0" rIns="0" bIns="0" rtlCol="0" anchor="ctr"/>
+          <a:lstStyle/>
+          <a:p>
+            <a:pPr marL="0" indent="0">
               <a:buNone/>
             </a:pPr>
             <a:r>
@@ -13106,9 +12419,9 @@
                 <a:solidFill>
                   <a:schemeClr val="tx1"/>
                 </a:solidFill>
-                <a:latin typeface="Courier New" pitchFamily="34" charset="0"/>
-                <a:ea typeface="Courier New" pitchFamily="34" charset="-122"/>
-                <a:cs typeface="Courier New" pitchFamily="34" charset="-120"/>
+                <a:latin typeface="Courier New" panose="02070609020205020404" pitchFamily="34" charset="0"/>
+                <a:ea typeface="Courier New" panose="02070609020205020404" pitchFamily="34" charset="-122"/>
+                <a:cs typeface="Courier New" panose="02070609020205020404" pitchFamily="34" charset="-120"/>
               </a:rPr>
               <a:t>/api/tickets/{id}</a:t>
             </a:r>
@@ -13131,13 +12444,12 @@
             <a:avLst/>
           </a:prstGeom>
           <a:noFill/>
-          <a:ln/>
-        </p:spPr>
-        <p:txBody>
-          <a:bodyPr wrap="square" lIns="0" tIns="0" rIns="0" bIns="0" rtlCol="0" anchor="ctr"/>
-          <a:lstStyle/>
-          <a:p>
-            <a:pPr indent="0" marL="0">
+        </p:spPr>
+        <p:txBody>
+          <a:bodyPr wrap="square" lIns="0" tIns="0" rIns="0" bIns="0" rtlCol="0" anchor="ctr"/>
+          <a:lstStyle/>
+          <a:p>
+            <a:pPr marL="0" indent="0">
               <a:buNone/>
             </a:pPr>
             <a:r>
@@ -13167,13 +12479,12 @@
             <a:avLst/>
           </a:prstGeom>
           <a:noFill/>
-          <a:ln/>
-        </p:spPr>
-        <p:txBody>
-          <a:bodyPr wrap="square" lIns="0" tIns="0" rIns="0" bIns="0" rtlCol="0" anchor="ctr"/>
-          <a:lstStyle/>
-          <a:p>
-            <a:pPr algn="r" indent="0" marL="0">
+        </p:spPr>
+        <p:txBody>
+          <a:bodyPr wrap="square" lIns="0" tIns="0" rIns="0" bIns="0" rtlCol="0" anchor="ctr"/>
+          <a:lstStyle/>
+          <a:p>
+            <a:pPr marL="0" indent="0" algn="r">
               <a:buNone/>
             </a:pPr>
             <a:r>
@@ -13203,13 +12514,12 @@
             <a:avLst/>
           </a:prstGeom>
           <a:noFill/>
-          <a:ln/>
-        </p:spPr>
-        <p:txBody>
-          <a:bodyPr wrap="square" lIns="0" tIns="0" rIns="0" bIns="0" rtlCol="0" anchor="ctr"/>
-          <a:lstStyle/>
-          <a:p>
-            <a:pPr indent="0" marL="0">
+        </p:spPr>
+        <p:txBody>
+          <a:bodyPr wrap="square" lIns="0" tIns="0" rIns="0" bIns="0" rtlCol="0" anchor="ctr"/>
+          <a:lstStyle/>
+          <a:p>
+            <a:pPr marL="0" indent="0">
               <a:buNone/>
             </a:pPr>
             <a:r>
@@ -13239,13 +12549,12 @@
             <a:avLst/>
           </a:prstGeom>
           <a:noFill/>
-          <a:ln/>
-        </p:spPr>
-        <p:txBody>
-          <a:bodyPr wrap="square" lIns="0" tIns="0" rIns="0" bIns="0" rtlCol="0" anchor="ctr"/>
-          <a:lstStyle/>
-          <a:p>
-            <a:pPr indent="0" marL="0">
+        </p:spPr>
+        <p:txBody>
+          <a:bodyPr wrap="square" lIns="0" tIns="0" rIns="0" bIns="0" rtlCol="0" anchor="ctr"/>
+          <a:lstStyle/>
+          <a:p>
+            <a:pPr marL="0" indent="0">
               <a:buNone/>
             </a:pPr>
             <a:r>
@@ -13253,9 +12562,9 @@
                 <a:solidFill>
                   <a:schemeClr val="tx1"/>
                 </a:solidFill>
-                <a:latin typeface="Courier New" pitchFamily="34" charset="0"/>
-                <a:ea typeface="Courier New" pitchFamily="34" charset="-122"/>
-                <a:cs typeface="Courier New" pitchFamily="34" charset="-120"/>
+                <a:latin typeface="Courier New" panose="02070609020205020404" pitchFamily="34" charset="0"/>
+                <a:ea typeface="Courier New" panose="02070609020205020404" pitchFamily="34" charset="-122"/>
+                <a:cs typeface="Courier New" panose="02070609020205020404" pitchFamily="34" charset="-120"/>
               </a:rPr>
               <a:t>/api/tickets/{id}</a:t>
             </a:r>
@@ -13278,13 +12587,12 @@
             <a:avLst/>
           </a:prstGeom>
           <a:noFill/>
-          <a:ln/>
-        </p:spPr>
-        <p:txBody>
-          <a:bodyPr wrap="square" lIns="0" tIns="0" rIns="0" bIns="0" rtlCol="0" anchor="ctr"/>
-          <a:lstStyle/>
-          <a:p>
-            <a:pPr indent="0" marL="0">
+        </p:spPr>
+        <p:txBody>
+          <a:bodyPr wrap="square" lIns="0" tIns="0" rIns="0" bIns="0" rtlCol="0" anchor="ctr"/>
+          <a:lstStyle/>
+          <a:p>
+            <a:pPr marL="0" indent="0">
               <a:buNone/>
             </a:pPr>
             <a:r>
@@ -13314,13 +12622,12 @@
             <a:avLst/>
           </a:prstGeom>
           <a:noFill/>
-          <a:ln/>
-        </p:spPr>
-        <p:txBody>
-          <a:bodyPr wrap="square" lIns="0" tIns="0" rIns="0" bIns="0" rtlCol="0" anchor="ctr"/>
-          <a:lstStyle/>
-          <a:p>
-            <a:pPr algn="r" indent="0" marL="0">
+        </p:spPr>
+        <p:txBody>
+          <a:bodyPr wrap="square" lIns="0" tIns="0" rIns="0" bIns="0" rtlCol="0" anchor="ctr"/>
+          <a:lstStyle/>
+          <a:p>
+            <a:pPr marL="0" indent="0" algn="r">
               <a:buNone/>
             </a:pPr>
             <a:r>
@@ -13375,13 +12682,12 @@
             <a:avLst/>
           </a:prstGeom>
           <a:noFill/>
-          <a:ln/>
-        </p:spPr>
-        <p:txBody>
-          <a:bodyPr wrap="square" lIns="0" tIns="0" rIns="0" bIns="0" rtlCol="0" anchor="ctr"/>
-          <a:lstStyle/>
-          <a:p>
-            <a:pPr indent="0" marL="0">
+        </p:spPr>
+        <p:txBody>
+          <a:bodyPr wrap="square" lIns="0" tIns="0" rIns="0" bIns="0" rtlCol="0" anchor="ctr"/>
+          <a:lstStyle/>
+          <a:p>
+            <a:pPr marL="0" indent="0">
               <a:buNone/>
             </a:pPr>
             <a:r>
@@ -13411,13 +12717,12 @@
             <a:avLst/>
           </a:prstGeom>
           <a:noFill/>
-          <a:ln/>
-        </p:spPr>
-        <p:txBody>
-          <a:bodyPr wrap="square" lIns="0" tIns="0" rIns="0" bIns="0" rtlCol="0" anchor="ctr"/>
-          <a:lstStyle/>
-          <a:p>
-            <a:pPr indent="0" marL="0">
+        </p:spPr>
+        <p:txBody>
+          <a:bodyPr wrap="square" lIns="0" tIns="0" rIns="0" bIns="0" rtlCol="0" anchor="ctr"/>
+          <a:lstStyle/>
+          <a:p>
+            <a:pPr marL="0" indent="0">
               <a:buNone/>
             </a:pPr>
             <a:r>
@@ -13425,9 +12730,9 @@
                 <a:solidFill>
                   <a:schemeClr val="tx1"/>
                 </a:solidFill>
-                <a:latin typeface="Courier New" pitchFamily="34" charset="0"/>
-                <a:ea typeface="Courier New" pitchFamily="34" charset="-122"/>
-                <a:cs typeface="Courier New" pitchFamily="34" charset="-120"/>
+                <a:latin typeface="Courier New" panose="02070609020205020404" pitchFamily="34" charset="0"/>
+                <a:ea typeface="Courier New" panose="02070609020205020404" pitchFamily="34" charset="-122"/>
+                <a:cs typeface="Courier New" panose="02070609020205020404" pitchFamily="34" charset="-120"/>
               </a:rPr>
               <a:t>/api/tickets/stats</a:t>
             </a:r>
@@ -13450,13 +12755,12 @@
             <a:avLst/>
           </a:prstGeom>
           <a:noFill/>
-          <a:ln/>
-        </p:spPr>
-        <p:txBody>
-          <a:bodyPr wrap="square" lIns="0" tIns="0" rIns="0" bIns="0" rtlCol="0" anchor="ctr"/>
-          <a:lstStyle/>
-          <a:p>
-            <a:pPr indent="0" marL="0">
+        </p:spPr>
+        <p:txBody>
+          <a:bodyPr wrap="square" lIns="0" tIns="0" rIns="0" bIns="0" rtlCol="0" anchor="ctr"/>
+          <a:lstStyle/>
+          <a:p>
+            <a:pPr marL="0" indent="0">
               <a:buNone/>
             </a:pPr>
             <a:r>
@@ -13486,13 +12790,12 @@
             <a:avLst/>
           </a:prstGeom>
           <a:noFill/>
-          <a:ln/>
-        </p:spPr>
-        <p:txBody>
-          <a:bodyPr wrap="square" lIns="0" tIns="0" rIns="0" bIns="0" rtlCol="0" anchor="ctr"/>
-          <a:lstStyle/>
-          <a:p>
-            <a:pPr algn="r" indent="0" marL="0">
+        </p:spPr>
+        <p:txBody>
+          <a:bodyPr wrap="square" lIns="0" tIns="0" rIns="0" bIns="0" rtlCol="0" anchor="ctr"/>
+          <a:lstStyle/>
+          <a:p>
+            <a:pPr marL="0" indent="0" algn="r">
               <a:buNone/>
             </a:pPr>
             <a:r>
@@ -13522,13 +12825,12 @@
             <a:avLst/>
           </a:prstGeom>
           <a:noFill/>
-          <a:ln/>
-        </p:spPr>
-        <p:txBody>
-          <a:bodyPr wrap="square" lIns="0" tIns="0" rIns="0" bIns="0" rtlCol="0" anchor="ctr"/>
-          <a:lstStyle/>
-          <a:p>
-            <a:pPr indent="0" marL="0">
+        </p:spPr>
+        <p:txBody>
+          <a:bodyPr wrap="square" lIns="0" tIns="0" rIns="0" bIns="0" rtlCol="0" anchor="ctr"/>
+          <a:lstStyle/>
+          <a:p>
+            <a:pPr marL="0" indent="0">
               <a:buNone/>
             </a:pPr>
             <a:r>
@@ -13558,13 +12860,12 @@
             <a:avLst/>
           </a:prstGeom>
           <a:noFill/>
-          <a:ln/>
-        </p:spPr>
-        <p:txBody>
-          <a:bodyPr wrap="square" lIns="0" tIns="0" rIns="0" bIns="0" rtlCol="0" anchor="ctr"/>
-          <a:lstStyle/>
-          <a:p>
-            <a:pPr indent="0" marL="0">
+        </p:spPr>
+        <p:txBody>
+          <a:bodyPr wrap="square" lIns="0" tIns="0" rIns="0" bIns="0" rtlCol="0" anchor="ctr"/>
+          <a:lstStyle/>
+          <a:p>
+            <a:pPr marL="0" indent="0">
               <a:buNone/>
             </a:pPr>
             <a:r>
@@ -13572,9 +12873,9 @@
                 <a:solidFill>
                   <a:schemeClr val="tx1"/>
                 </a:solidFill>
-                <a:latin typeface="Courier New" pitchFamily="34" charset="0"/>
-                <a:ea typeface="Courier New" pitchFamily="34" charset="-122"/>
-                <a:cs typeface="Courier New" pitchFamily="34" charset="-120"/>
+                <a:latin typeface="Courier New" panose="02070609020205020404" pitchFamily="34" charset="0"/>
+                <a:ea typeface="Courier New" panose="02070609020205020404" pitchFamily="34" charset="-122"/>
+                <a:cs typeface="Courier New" panose="02070609020205020404" pitchFamily="34" charset="-120"/>
               </a:rPr>
               <a:t>/api/categories</a:t>
             </a:r>
@@ -13597,13 +12898,12 @@
             <a:avLst/>
           </a:prstGeom>
           <a:noFill/>
-          <a:ln/>
-        </p:spPr>
-        <p:txBody>
-          <a:bodyPr wrap="square" lIns="0" tIns="0" rIns="0" bIns="0" rtlCol="0" anchor="ctr"/>
-          <a:lstStyle/>
-          <a:p>
-            <a:pPr indent="0" marL="0">
+        </p:spPr>
+        <p:txBody>
+          <a:bodyPr wrap="square" lIns="0" tIns="0" rIns="0" bIns="0" rtlCol="0" anchor="ctr"/>
+          <a:lstStyle/>
+          <a:p>
+            <a:pPr marL="0" indent="0">
               <a:buNone/>
             </a:pPr>
             <a:r>
@@ -13633,13 +12933,12 @@
             <a:avLst/>
           </a:prstGeom>
           <a:noFill/>
-          <a:ln/>
-        </p:spPr>
-        <p:txBody>
-          <a:bodyPr wrap="square" lIns="0" tIns="0" rIns="0" bIns="0" rtlCol="0" anchor="ctr"/>
-          <a:lstStyle/>
-          <a:p>
-            <a:pPr algn="r" indent="0" marL="0">
+        </p:spPr>
+        <p:txBody>
+          <a:bodyPr wrap="square" lIns="0" tIns="0" rIns="0" bIns="0" rtlCol="0" anchor="ctr"/>
+          <a:lstStyle/>
+          <a:p>
+            <a:pPr marL="0" indent="0" algn="r">
               <a:buNone/>
             </a:pPr>
             <a:r>
@@ -13694,13 +12993,12 @@
             <a:avLst/>
           </a:prstGeom>
           <a:noFill/>
-          <a:ln/>
-        </p:spPr>
-        <p:txBody>
-          <a:bodyPr wrap="square" lIns="0" tIns="0" rIns="0" bIns="0" rtlCol="0" anchor="ctr"/>
-          <a:lstStyle/>
-          <a:p>
-            <a:pPr indent="0" marL="0">
+        </p:spPr>
+        <p:txBody>
+          <a:bodyPr wrap="square" lIns="0" tIns="0" rIns="0" bIns="0" rtlCol="0" anchor="ctr"/>
+          <a:lstStyle/>
+          <a:p>
+            <a:pPr marL="0" indent="0">
               <a:buNone/>
             </a:pPr>
             <a:r>
@@ -13730,13 +13028,12 @@
             <a:avLst/>
           </a:prstGeom>
           <a:noFill/>
-          <a:ln/>
-        </p:spPr>
-        <p:txBody>
-          <a:bodyPr wrap="square" lIns="0" tIns="0" rIns="0" bIns="0" rtlCol="0" anchor="ctr"/>
-          <a:lstStyle/>
-          <a:p>
-            <a:pPr indent="0" marL="0">
+        </p:spPr>
+        <p:txBody>
+          <a:bodyPr wrap="square" lIns="0" tIns="0" rIns="0" bIns="0" rtlCol="0" anchor="ctr"/>
+          <a:lstStyle/>
+          <a:p>
+            <a:pPr marL="0" indent="0">
               <a:buNone/>
             </a:pPr>
             <a:r>
@@ -13744,9 +13041,9 @@
                 <a:solidFill>
                   <a:schemeClr val="tx1"/>
                 </a:solidFill>
-                <a:latin typeface="Courier New" pitchFamily="34" charset="0"/>
-                <a:ea typeface="Courier New" pitchFamily="34" charset="-122"/>
-                <a:cs typeface="Courier New" pitchFamily="34" charset="-120"/>
+                <a:latin typeface="Courier New" panose="02070609020205020404" pitchFamily="34" charset="0"/>
+                <a:ea typeface="Courier New" panose="02070609020205020404" pitchFamily="34" charset="-122"/>
+                <a:cs typeface="Courier New" panose="02070609020205020404" pitchFamily="34" charset="-120"/>
               </a:rPr>
               <a:t>/api/categories</a:t>
             </a:r>
@@ -13769,13 +13066,12 @@
             <a:avLst/>
           </a:prstGeom>
           <a:noFill/>
-          <a:ln/>
-        </p:spPr>
-        <p:txBody>
-          <a:bodyPr wrap="square" lIns="0" tIns="0" rIns="0" bIns="0" rtlCol="0" anchor="ctr"/>
-          <a:lstStyle/>
-          <a:p>
-            <a:pPr indent="0" marL="0">
+        </p:spPr>
+        <p:txBody>
+          <a:bodyPr wrap="square" lIns="0" tIns="0" rIns="0" bIns="0" rtlCol="0" anchor="ctr"/>
+          <a:lstStyle/>
+          <a:p>
+            <a:pPr marL="0" indent="0">
               <a:buNone/>
             </a:pPr>
             <a:r>
@@ -13805,13 +13101,12 @@
             <a:avLst/>
           </a:prstGeom>
           <a:noFill/>
-          <a:ln/>
-        </p:spPr>
-        <p:txBody>
-          <a:bodyPr wrap="square" lIns="0" tIns="0" rIns="0" bIns="0" rtlCol="0" anchor="ctr"/>
-          <a:lstStyle/>
-          <a:p>
-            <a:pPr algn="r" indent="0" marL="0">
+        </p:spPr>
+        <p:txBody>
+          <a:bodyPr wrap="square" lIns="0" tIns="0" rIns="0" bIns="0" rtlCol="0" anchor="ctr"/>
+          <a:lstStyle/>
+          <a:p>
+            <a:pPr marL="0" indent="0" algn="r">
               <a:buNone/>
             </a:pPr>
             <a:r>
@@ -13841,13 +13136,12 @@
             <a:avLst/>
           </a:prstGeom>
           <a:noFill/>
-          <a:ln/>
-        </p:spPr>
-        <p:txBody>
-          <a:bodyPr wrap="square" lIns="0" tIns="0" rIns="0" bIns="0" rtlCol="0" anchor="ctr"/>
-          <a:lstStyle/>
-          <a:p>
-            <a:pPr indent="0" marL="0">
+        </p:spPr>
+        <p:txBody>
+          <a:bodyPr wrap="square" lIns="0" tIns="0" rIns="0" bIns="0" rtlCol="0" anchor="ctr"/>
+          <a:lstStyle/>
+          <a:p>
+            <a:pPr marL="0" indent="0">
               <a:buNone/>
             </a:pPr>
             <a:r>
@@ -13864,7 +13158,7 @@
       </p:sp>
       <p:sp>
         <p:nvSpPr>
-          <p:cNvPr id="25" name="Slide Number Placeholder 0"/>
+          <p:cNvPr id="54" name="Slide Number Placeholder 0"/>
           <p:cNvSpPr>
             <a:spLocks noGrp="1"/>
           </p:cNvSpPr>
@@ -13880,11 +13174,6 @@
           <a:prstGeom prst="rect">
             <a:avLst/>
           </a:prstGeom>
-          <a:extLst>
-            <a:ext uri="{C572A759-6A51-4108-AA02-DFA0A04FC94B}">
-              <ma14:wrappingTextBoxFlag xmlns:ma14="http://schemas.microsoft.com/office/mac/drawingml/2011/main" val="0"/>
-            </a:ext>
-          </a:extLst>
         </p:spPr>
         <p:txBody>
           <a:bodyPr/>
@@ -13900,8 +13189,7 @@
           <a:p>
             <a:pPr algn="l"/>
             <a:fld id="{F7021451-1387-4CA6-816F-3879F97B5CBC}" type="slidenum">
-              <a:rPr b="0" lang="en-US"/>
-              <a:t>4</a:t>
+              <a:rPr lang="en-US" b="0"/>
             </a:fld>
             <a:endParaRPr lang="en-US"/>
           </a:p>
@@ -13917,7 +13205,7 @@
 
 <file path=ppt/slides/slide5.xml><?xml version="1.0" encoding="utf-8"?>
 <p:sld xmlns:a="http://schemas.openxmlformats.org/drawingml/2006/main" xmlns:r="http://schemas.openxmlformats.org/officeDocument/2006/relationships" xmlns:p="http://schemas.openxmlformats.org/presentationml/2006/main">
-  <p:cSld name="Slide 5">
+  <p:cSld>
     <p:spTree>
       <p:nvGrpSpPr>
         <p:cNvPr id="1" name=""/>
@@ -13937,7 +13225,7 @@
           <p:cNvPr id="2" name="Text 0"/>
           <p:cNvSpPr/>
           <p:nvPr>
-            <p:ph idx="100" type="title" hasCustomPrompt="1"/>
+            <p:ph type="title" idx="100" hasCustomPrompt="1"/>
           </p:nvPr>
         </p:nvSpPr>
         <p:spPr>
@@ -13949,13 +13237,12 @@
             <a:avLst/>
           </a:prstGeom>
           <a:noFill/>
-          <a:ln/>
         </p:spPr>
         <p:txBody>
           <a:bodyPr wrap="square" rtlCol="0"/>
           <a:lstStyle/>
           <a:p>
-            <a:pPr algn="l" indent="0" marL="0">
+            <a:pPr marL="0" indent="0" algn="l">
               <a:buNone/>
             </a:pPr>
             <a:r>
@@ -13972,7 +13259,7 @@
       </p:sp>
       <p:pic>
         <p:nvPicPr>
-          <p:cNvPr id="3" name="Image 0" descr="/Users/aman/Desktop/devops-heros/helpdesk-capstone/docs/screenshots/servicedesk-new-ticket-form.jpg">    </p:cNvPr>
+          <p:cNvPr id="3" name="Image 0" descr="/Users/aman/Desktop/devops-heros/helpdesk-capstone/docs/screenshots/servicedesk-new-ticket-form.jpg"/>
           <p:cNvPicPr>
             <a:picLocks noChangeAspect="1"/>
           </p:cNvPicPr>
@@ -14009,13 +13296,12 @@
             <a:avLst/>
           </a:prstGeom>
           <a:noFill/>
-          <a:ln/>
-        </p:spPr>
-        <p:txBody>
-          <a:bodyPr wrap="square" lIns="0" tIns="0" rIns="0" bIns="0" rtlCol="0" anchor="ctr"/>
-          <a:lstStyle/>
-          <a:p>
-            <a:pPr indent="0" marL="0">
+        </p:spPr>
+        <p:txBody>
+          <a:bodyPr wrap="square" lIns="0" tIns="0" rIns="0" bIns="0" rtlCol="0" anchor="ctr"/>
+          <a:lstStyle/>
+          <a:p>
+            <a:pPr marL="0" indent="0">
               <a:buNone/>
             </a:pPr>
             <a:r>
@@ -14045,13 +13331,12 @@
             <a:avLst/>
           </a:prstGeom>
           <a:noFill/>
-          <a:ln/>
-        </p:spPr>
-        <p:txBody>
-          <a:bodyPr wrap="square" lIns="0" tIns="0" rIns="0" bIns="0" rtlCol="0" anchor="ctr"/>
-          <a:lstStyle/>
-          <a:p>
-            <a:pPr indent="0" marL="0">
+        </p:spPr>
+        <p:txBody>
+          <a:bodyPr wrap="square" lIns="0" tIns="0" rIns="0" bIns="0" rtlCol="0" anchor="ctr"/>
+          <a:lstStyle/>
+          <a:p>
+            <a:pPr marL="0" indent="0">
               <a:buNone/>
             </a:pPr>
             <a:r>
@@ -14068,7 +13353,7 @@
       </p:sp>
       <p:pic>
         <p:nvPicPr>
-          <p:cNvPr id="6" name="Image 1" descr="/Users/aman/Desktop/devops-heros/helpdesk-capstone/docs/screenshots/servicedesk-ticket-created.jpg">    </p:cNvPr>
+          <p:cNvPr id="6" name="Image 1" descr="/Users/aman/Desktop/devops-heros/helpdesk-capstone/docs/screenshots/servicedesk-ticket-created.jpg"/>
           <p:cNvPicPr>
             <a:picLocks noChangeAspect="1"/>
           </p:cNvPicPr>
@@ -14105,13 +13390,12 @@
             <a:avLst/>
           </a:prstGeom>
           <a:noFill/>
-          <a:ln/>
-        </p:spPr>
-        <p:txBody>
-          <a:bodyPr wrap="square" lIns="0" tIns="0" rIns="0" bIns="0" rtlCol="0" anchor="ctr"/>
-          <a:lstStyle/>
-          <a:p>
-            <a:pPr indent="0" marL="0">
+        </p:spPr>
+        <p:txBody>
+          <a:bodyPr wrap="square" lIns="0" tIns="0" rIns="0" bIns="0" rtlCol="0" anchor="ctr"/>
+          <a:lstStyle/>
+          <a:p>
+            <a:pPr marL="0" indent="0">
               <a:buNone/>
             </a:pPr>
             <a:r>
@@ -14141,13 +13425,12 @@
             <a:avLst/>
           </a:prstGeom>
           <a:noFill/>
-          <a:ln/>
-        </p:spPr>
-        <p:txBody>
-          <a:bodyPr wrap="square" lIns="0" tIns="0" rIns="0" bIns="0" rtlCol="0" anchor="ctr"/>
-          <a:lstStyle/>
-          <a:p>
-            <a:pPr indent="0" marL="0">
+        </p:spPr>
+        <p:txBody>
+          <a:bodyPr wrap="square" lIns="0" tIns="0" rIns="0" bIns="0" rtlCol="0" anchor="ctr"/>
+          <a:lstStyle/>
+          <a:p>
+            <a:pPr marL="0" indent="0">
               <a:buNone/>
             </a:pPr>
             <a:r>
@@ -14164,7 +13447,7 @@
       </p:sp>
       <p:pic>
         <p:nvPicPr>
-          <p:cNvPr id="9" name="Image 2" descr="/Users/aman/Desktop/devops-heros/helpdesk-capstone/docs/screenshots/servicedesk-filter-sla-breached.jpg">    </p:cNvPr>
+          <p:cNvPr id="9" name="Image 2" descr="/Users/aman/Desktop/devops-heros/helpdesk-capstone/docs/screenshots/servicedesk-filter-sla-breached.jpg"/>
           <p:cNvPicPr>
             <a:picLocks noChangeAspect="1"/>
           </p:cNvPicPr>
@@ -14201,13 +13484,12 @@
             <a:avLst/>
           </a:prstGeom>
           <a:noFill/>
-          <a:ln/>
-        </p:spPr>
-        <p:txBody>
-          <a:bodyPr wrap="square" lIns="0" tIns="0" rIns="0" bIns="0" rtlCol="0" anchor="ctr"/>
-          <a:lstStyle/>
-          <a:p>
-            <a:pPr indent="0" marL="0">
+        </p:spPr>
+        <p:txBody>
+          <a:bodyPr wrap="square" lIns="0" tIns="0" rIns="0" bIns="0" rtlCol="0" anchor="ctr"/>
+          <a:lstStyle/>
+          <a:p>
+            <a:pPr marL="0" indent="0">
               <a:buNone/>
             </a:pPr>
             <a:r>
@@ -14237,13 +13519,12 @@
             <a:avLst/>
           </a:prstGeom>
           <a:noFill/>
-          <a:ln/>
-        </p:spPr>
-        <p:txBody>
-          <a:bodyPr wrap="square" lIns="0" tIns="0" rIns="0" bIns="0" rtlCol="0" anchor="ctr"/>
-          <a:lstStyle/>
-          <a:p>
-            <a:pPr indent="0" marL="0">
+        </p:spPr>
+        <p:txBody>
+          <a:bodyPr wrap="square" lIns="0" tIns="0" rIns="0" bIns="0" rtlCol="0" anchor="ctr"/>
+          <a:lstStyle/>
+          <a:p>
+            <a:pPr marL="0" indent="0">
               <a:buNone/>
             </a:pPr>
             <a:r>
@@ -14300,13 +13581,12 @@
             <a:avLst/>
           </a:prstGeom>
           <a:noFill/>
-          <a:ln/>
-        </p:spPr>
-        <p:txBody>
-          <a:bodyPr wrap="square" lIns="0" tIns="0" rIns="0" bIns="0" rtlCol="0" anchor="ctr"/>
-          <a:lstStyle/>
-          <a:p>
-            <a:pPr indent="0" marL="0">
+        </p:spPr>
+        <p:txBody>
+          <a:bodyPr wrap="square" lIns="0" tIns="0" rIns="0" bIns="0" rtlCol="0" anchor="ctr"/>
+          <a:lstStyle/>
+          <a:p>
+            <a:pPr marL="0" indent="0">
               <a:buNone/>
             </a:pPr>
             <a:r>
@@ -14336,13 +13616,12 @@
             <a:avLst/>
           </a:prstGeom>
           <a:noFill/>
-          <a:ln/>
-        </p:spPr>
-        <p:txBody>
-          <a:bodyPr wrap="square" lIns="0" tIns="0" rIns="0" bIns="0" rtlCol="0" anchor="ctr"/>
-          <a:lstStyle/>
-          <a:p>
-            <a:pPr indent="0" marL="0">
+        </p:spPr>
+        <p:txBody>
+          <a:bodyPr wrap="square" lIns="0" tIns="0" rIns="0" bIns="0" rtlCol="0" anchor="ctr"/>
+          <a:lstStyle/>
+          <a:p>
+            <a:pPr marL="0" indent="0">
               <a:buNone/>
             </a:pPr>
             <a:r>
@@ -14375,11 +13654,6 @@
           <a:prstGeom prst="rect">
             <a:avLst/>
           </a:prstGeom>
-          <a:extLst>
-            <a:ext uri="{C572A759-6A51-4108-AA02-DFA0A04FC94B}">
-              <ma14:wrappingTextBoxFlag xmlns:ma14="http://schemas.microsoft.com/office/mac/drawingml/2011/main" val="0"/>
-            </a:ext>
-          </a:extLst>
         </p:spPr>
         <p:txBody>
           <a:bodyPr/>
@@ -14395,8 +13669,7 @@
           <a:p>
             <a:pPr algn="l"/>
             <a:fld id="{F7021451-1387-4CA6-816F-3879F97B5CBC}" type="slidenum">
-              <a:rPr b="0" lang="en-US"/>
-              <a:t>5</a:t>
+              <a:rPr lang="en-US" b="0"/>
             </a:fld>
             <a:endParaRPr lang="en-US"/>
           </a:p>
@@ -14412,7 +13685,7 @@
 
 <file path=ppt/slides/slide6.xml><?xml version="1.0" encoding="utf-8"?>
 <p:sld xmlns:a="http://schemas.openxmlformats.org/drawingml/2006/main" xmlns:r="http://schemas.openxmlformats.org/officeDocument/2006/relationships" xmlns:p="http://schemas.openxmlformats.org/presentationml/2006/main">
-  <p:cSld name="Slide 6">
+  <p:cSld>
     <p:spTree>
       <p:nvGrpSpPr>
         <p:cNvPr id="1" name=""/>
@@ -14432,7 +13705,7 @@
           <p:cNvPr id="2" name="Text 0"/>
           <p:cNvSpPr/>
           <p:nvPr>
-            <p:ph idx="100" type="title" hasCustomPrompt="1"/>
+            <p:ph type="title" idx="100" hasCustomPrompt="1"/>
           </p:nvPr>
         </p:nvSpPr>
         <p:spPr>
@@ -14444,13 +13717,12 @@
             <a:avLst/>
           </a:prstGeom>
           <a:noFill/>
-          <a:ln/>
         </p:spPr>
         <p:txBody>
           <a:bodyPr wrap="square" rtlCol="0"/>
           <a:lstStyle/>
           <a:p>
-            <a:pPr algn="l" indent="0" marL="0">
+            <a:pPr marL="0" indent="0" algn="l">
               <a:buNone/>
             </a:pPr>
             <a:r>
@@ -14467,7 +13739,7 @@
       </p:sp>
       <p:pic>
         <p:nvPicPr>
-          <p:cNvPr id="3" name="Image 0" descr="/Users/aman/Desktop/devops-heros/helpdesk-capstone/docs/screenshots/servicedesk-queue-desktop.png">    </p:cNvPr>
+          <p:cNvPr id="3" name="Image 0" descr="/Users/aman/Desktop/devops-heros/helpdesk-capstone/docs/screenshots/servicedesk-queue-desktop.png"/>
           <p:cNvPicPr>
             <a:picLocks noChangeAspect="1"/>
           </p:cNvPicPr>
@@ -14504,13 +13776,12 @@
             <a:avLst/>
           </a:prstGeom>
           <a:noFill/>
-          <a:ln/>
-        </p:spPr>
-        <p:txBody>
-          <a:bodyPr wrap="square" lIns="0" tIns="0" rIns="0" bIns="0" rtlCol="0" anchor="ctr"/>
-          <a:lstStyle/>
-          <a:p>
-            <a:pPr algn="ctr" indent="0" marL="0">
+        </p:spPr>
+        <p:txBody>
+          <a:bodyPr wrap="square" lIns="0" tIns="0" rIns="0" bIns="0" rtlCol="0" anchor="ctr"/>
+          <a:lstStyle/>
+          <a:p>
+            <a:pPr marL="0" indent="0" algn="ctr">
               <a:buNone/>
             </a:pPr>
             <a:r>
@@ -14527,7 +13798,7 @@
       </p:sp>
       <p:pic>
         <p:nvPicPr>
-          <p:cNvPr id="5" name="Image 1" descr="/Users/aman/Desktop/devops-heros/helpdesk-capstone/docs/screenshots/servicedesk-queue-tablet.png">    </p:cNvPr>
+          <p:cNvPr id="5" name="Image 1" descr="/Users/aman/Desktop/devops-heros/helpdesk-capstone/docs/screenshots/servicedesk-queue-tablet.png"/>
           <p:cNvPicPr>
             <a:picLocks noChangeAspect="1"/>
           </p:cNvPicPr>
@@ -14564,13 +13835,12 @@
             <a:avLst/>
           </a:prstGeom>
           <a:noFill/>
-          <a:ln/>
-        </p:spPr>
-        <p:txBody>
-          <a:bodyPr wrap="square" lIns="0" tIns="0" rIns="0" bIns="0" rtlCol="0" anchor="ctr"/>
-          <a:lstStyle/>
-          <a:p>
-            <a:pPr algn="ctr" indent="0" marL="0">
+        </p:spPr>
+        <p:txBody>
+          <a:bodyPr wrap="square" lIns="0" tIns="0" rIns="0" bIns="0" rtlCol="0" anchor="ctr"/>
+          <a:lstStyle/>
+          <a:p>
+            <a:pPr marL="0" indent="0" algn="ctr">
               <a:buNone/>
             </a:pPr>
             <a:r>
@@ -14587,7 +13857,7 @@
       </p:sp>
       <p:pic>
         <p:nvPicPr>
-          <p:cNvPr id="7" name="Image 2" descr="/Users/aman/Desktop/devops-heros/helpdesk-capstone/docs/screenshots/servicedesk-queue-mobile.png">    </p:cNvPr>
+          <p:cNvPr id="7" name="Image 2" descr="/Users/aman/Desktop/devops-heros/helpdesk-capstone/docs/screenshots/servicedesk-queue-mobile.png"/>
           <p:cNvPicPr>
             <a:picLocks noChangeAspect="1"/>
           </p:cNvPicPr>
@@ -14624,13 +13894,12 @@
             <a:avLst/>
           </a:prstGeom>
           <a:noFill/>
-          <a:ln/>
-        </p:spPr>
-        <p:txBody>
-          <a:bodyPr wrap="square" lIns="0" tIns="0" rIns="0" bIns="0" rtlCol="0" anchor="ctr"/>
-          <a:lstStyle/>
-          <a:p>
-            <a:pPr algn="ctr" indent="0" marL="0">
+        </p:spPr>
+        <p:txBody>
+          <a:bodyPr wrap="square" lIns="0" tIns="0" rIns="0" bIns="0" rtlCol="0" anchor="ctr"/>
+          <a:lstStyle/>
+          <a:p>
+            <a:pPr marL="0" indent="0" algn="ctr">
               <a:buNone/>
             </a:pPr>
             <a:r>
@@ -14687,13 +13956,12 @@
             <a:avLst/>
           </a:prstGeom>
           <a:noFill/>
-          <a:ln/>
-        </p:spPr>
-        <p:txBody>
-          <a:bodyPr wrap="square" lIns="0" tIns="0" rIns="0" bIns="0" rtlCol="0" anchor="ctr"/>
-          <a:lstStyle/>
-          <a:p>
-            <a:pPr indent="0" marL="0">
+        </p:spPr>
+        <p:txBody>
+          <a:bodyPr wrap="square" lIns="0" tIns="0" rIns="0" bIns="0" rtlCol="0" anchor="ctr"/>
+          <a:lstStyle/>
+          <a:p>
+            <a:pPr marL="0" indent="0">
               <a:buNone/>
             </a:pPr>
             <a:r>
@@ -14723,13 +13991,12 @@
             <a:avLst/>
           </a:prstGeom>
           <a:noFill/>
-          <a:ln/>
-        </p:spPr>
-        <p:txBody>
-          <a:bodyPr wrap="square" lIns="0" tIns="0" rIns="0" bIns="0" rtlCol="0" anchor="ctr"/>
-          <a:lstStyle/>
-          <a:p>
-            <a:pPr indent="0" marL="0">
+        </p:spPr>
+        <p:txBody>
+          <a:bodyPr wrap="square" lIns="0" tIns="0" rIns="0" bIns="0" rtlCol="0" anchor="ctr"/>
+          <a:lstStyle/>
+          <a:p>
+            <a:pPr marL="0" indent="0">
               <a:buNone/>
             </a:pPr>
             <a:r>
@@ -14743,13 +14010,13 @@
             <a:endParaRPr lang="en-US" sz="1100" dirty="0"/>
           </a:p>
           <a:p>
-            <a:pPr indent="0" marL="0">
+            <a:pPr marL="0" indent="0">
               <a:buNone/>
             </a:pPr>
             <a:endParaRPr lang="en-US" sz="1100" dirty="0"/>
           </a:p>
           <a:p>
-            <a:pPr indent="0" marL="0">
+            <a:pPr marL="0" indent="0">
               <a:buNone/>
             </a:pPr>
             <a:r>
@@ -14763,13 +14030,13 @@
             <a:endParaRPr lang="en-US" sz="1100" dirty="0"/>
           </a:p>
           <a:p>
-            <a:pPr indent="0" marL="0">
+            <a:pPr marL="0" indent="0">
               <a:buNone/>
             </a:pPr>
             <a:endParaRPr lang="en-US" sz="1100" dirty="0"/>
           </a:p>
           <a:p>
-            <a:pPr indent="0" marL="0">
+            <a:pPr marL="0" indent="0">
               <a:buNone/>
             </a:pPr>
             <a:r>
@@ -14799,13 +14066,12 @@
             <a:avLst/>
           </a:prstGeom>
           <a:noFill/>
-          <a:ln/>
-        </p:spPr>
-        <p:txBody>
-          <a:bodyPr wrap="square" lIns="0" tIns="0" rIns="0" bIns="0" rtlCol="0" anchor="ctr"/>
-          <a:lstStyle/>
-          <a:p>
-            <a:pPr indent="0" marL="0">
+        </p:spPr>
+        <p:txBody>
+          <a:bodyPr wrap="square" lIns="0" tIns="0" rIns="0" bIns="0" rtlCol="0" anchor="ctr"/>
+          <a:lstStyle/>
+          <a:p>
+            <a:pPr marL="0" indent="0">
               <a:buNone/>
             </a:pPr>
             <a:r>
@@ -14838,11 +14104,6 @@
           <a:prstGeom prst="rect">
             <a:avLst/>
           </a:prstGeom>
-          <a:extLst>
-            <a:ext uri="{C572A759-6A51-4108-AA02-DFA0A04FC94B}">
-              <ma14:wrappingTextBoxFlag xmlns:ma14="http://schemas.microsoft.com/office/mac/drawingml/2011/main" val="0"/>
-            </a:ext>
-          </a:extLst>
         </p:spPr>
         <p:txBody>
           <a:bodyPr/>
@@ -14858,8 +14119,7 @@
           <a:p>
             <a:pPr algn="l"/>
             <a:fld id="{F7021451-1387-4CA6-816F-3879F97B5CBC}" type="slidenum">
-              <a:rPr b="0" lang="en-US"/>
-              <a:t>6</a:t>
+              <a:rPr lang="en-US" b="0"/>
             </a:fld>
             <a:endParaRPr lang="en-US"/>
           </a:p>
@@ -14875,7 +14135,7 @@
 
 <file path=ppt/slides/slide7.xml><?xml version="1.0" encoding="utf-8"?>
 <p:sld xmlns:a="http://schemas.openxmlformats.org/drawingml/2006/main" xmlns:r="http://schemas.openxmlformats.org/officeDocument/2006/relationships" xmlns:p="http://schemas.openxmlformats.org/presentationml/2006/main">
-  <p:cSld name="Slide 7">
+  <p:cSld>
     <p:spTree>
       <p:nvGrpSpPr>
         <p:cNvPr id="1" name=""/>
@@ -14895,7 +14155,7 @@
           <p:cNvPr id="2" name="Text 0"/>
           <p:cNvSpPr/>
           <p:nvPr>
-            <p:ph idx="100" type="title" hasCustomPrompt="1"/>
+            <p:ph type="title" idx="100" hasCustomPrompt="1"/>
           </p:nvPr>
         </p:nvSpPr>
         <p:spPr>
@@ -14907,13 +14167,12 @@
             <a:avLst/>
           </a:prstGeom>
           <a:noFill/>
-          <a:ln/>
         </p:spPr>
         <p:txBody>
           <a:bodyPr wrap="square" rtlCol="0"/>
           <a:lstStyle/>
           <a:p>
-            <a:pPr algn="l" indent="0" marL="0">
+            <a:pPr marL="0" indent="0" algn="l">
               <a:buNone/>
             </a:pPr>
             <a:r>
@@ -14970,13 +14229,12 @@
             <a:avLst/>
           </a:prstGeom>
           <a:noFill/>
-          <a:ln/>
-        </p:spPr>
-        <p:txBody>
-          <a:bodyPr wrap="square" lIns="0" tIns="0" rIns="0" bIns="0" rtlCol="0" anchor="ctr"/>
-          <a:lstStyle/>
-          <a:p>
-            <a:pPr indent="0" marL="0">
+        </p:spPr>
+        <p:txBody>
+          <a:bodyPr wrap="square" lIns="0" tIns="0" rIns="0" bIns="0" rtlCol="0" anchor="ctr"/>
+          <a:lstStyle/>
+          <a:p>
+            <a:pPr marL="0" indent="0">
               <a:buNone/>
             </a:pPr>
             <a:r>
@@ -15006,13 +14264,12 @@
             <a:avLst/>
           </a:prstGeom>
           <a:noFill/>
-          <a:ln/>
-        </p:spPr>
-        <p:txBody>
-          <a:bodyPr wrap="square" lIns="0" tIns="0" rIns="0" bIns="0" rtlCol="0" anchor="ctr"/>
-          <a:lstStyle/>
-          <a:p>
-            <a:pPr indent="0" marL="0">
+        </p:spPr>
+        <p:txBody>
+          <a:bodyPr wrap="square" lIns="0" tIns="0" rIns="0" bIns="0" rtlCol="0" anchor="ctr"/>
+          <a:lstStyle/>
+          <a:p>
+            <a:pPr marL="0" indent="0">
               <a:buNone/>
             </a:pPr>
             <a:r>
@@ -15042,13 +14299,12 @@
             <a:avLst/>
           </a:prstGeom>
           <a:noFill/>
-          <a:ln/>
-        </p:spPr>
-        <p:txBody>
-          <a:bodyPr wrap="square" lIns="0" tIns="0" rIns="0" bIns="0" rtlCol="0" anchor="ctr"/>
-          <a:lstStyle/>
-          <a:p>
-            <a:pPr indent="0" marL="0">
+        </p:spPr>
+        <p:txBody>
+          <a:bodyPr wrap="square" lIns="0" tIns="0" rIns="0" bIns="0" rtlCol="0" anchor="ctr"/>
+          <a:lstStyle/>
+          <a:p>
+            <a:pPr marL="0" indent="0">
               <a:buNone/>
             </a:pPr>
             <a:r>
@@ -15078,13 +14334,12 @@
             <a:avLst/>
           </a:prstGeom>
           <a:noFill/>
-          <a:ln/>
-        </p:spPr>
-        <p:txBody>
-          <a:bodyPr wrap="square" lIns="0" tIns="0" rIns="0" bIns="0" rtlCol="0" anchor="ctr"/>
-          <a:lstStyle/>
-          <a:p>
-            <a:pPr algn="ctr" indent="0" marL="0">
+        </p:spPr>
+        <p:txBody>
+          <a:bodyPr wrap="square" lIns="0" tIns="0" rIns="0" bIns="0" rtlCol="0" anchor="ctr"/>
+          <a:lstStyle/>
+          <a:p>
+            <a:pPr marL="0" indent="0" algn="ctr">
               <a:buNone/>
             </a:pPr>
             <a:r>
@@ -15141,13 +14396,12 @@
             <a:avLst/>
           </a:prstGeom>
           <a:noFill/>
-          <a:ln/>
-        </p:spPr>
-        <p:txBody>
-          <a:bodyPr wrap="square" lIns="0" tIns="0" rIns="0" bIns="0" rtlCol="0" anchor="ctr"/>
-          <a:lstStyle/>
-          <a:p>
-            <a:pPr indent="0" marL="0">
+        </p:spPr>
+        <p:txBody>
+          <a:bodyPr wrap="square" lIns="0" tIns="0" rIns="0" bIns="0" rtlCol="0" anchor="ctr"/>
+          <a:lstStyle/>
+          <a:p>
+            <a:pPr marL="0" indent="0">
               <a:buNone/>
             </a:pPr>
             <a:r>
@@ -15177,13 +14431,12 @@
             <a:avLst/>
           </a:prstGeom>
           <a:noFill/>
-          <a:ln/>
-        </p:spPr>
-        <p:txBody>
-          <a:bodyPr wrap="square" lIns="0" tIns="0" rIns="0" bIns="0" rtlCol="0" anchor="ctr"/>
-          <a:lstStyle/>
-          <a:p>
-            <a:pPr indent="0" marL="0">
+        </p:spPr>
+        <p:txBody>
+          <a:bodyPr wrap="square" lIns="0" tIns="0" rIns="0" bIns="0" rtlCol="0" anchor="ctr"/>
+          <a:lstStyle/>
+          <a:p>
+            <a:pPr marL="0" indent="0">
               <a:buNone/>
             </a:pPr>
             <a:r>
@@ -15213,13 +14466,12 @@
             <a:avLst/>
           </a:prstGeom>
           <a:noFill/>
-          <a:ln/>
-        </p:spPr>
-        <p:txBody>
-          <a:bodyPr wrap="square" lIns="0" tIns="0" rIns="0" bIns="0" rtlCol="0" anchor="ctr"/>
-          <a:lstStyle/>
-          <a:p>
-            <a:pPr indent="0" marL="0">
+        </p:spPr>
+        <p:txBody>
+          <a:bodyPr wrap="square" lIns="0" tIns="0" rIns="0" bIns="0" rtlCol="0" anchor="ctr"/>
+          <a:lstStyle/>
+          <a:p>
+            <a:pPr marL="0" indent="0">
               <a:buNone/>
             </a:pPr>
             <a:r>
@@ -15249,13 +14501,12 @@
             <a:avLst/>
           </a:prstGeom>
           <a:noFill/>
-          <a:ln/>
-        </p:spPr>
-        <p:txBody>
-          <a:bodyPr wrap="square" lIns="0" tIns="0" rIns="0" bIns="0" rtlCol="0" anchor="ctr"/>
-          <a:lstStyle/>
-          <a:p>
-            <a:pPr algn="ctr" indent="0" marL="0">
+        </p:spPr>
+        <p:txBody>
+          <a:bodyPr wrap="square" lIns="0" tIns="0" rIns="0" bIns="0" rtlCol="0" anchor="ctr"/>
+          <a:lstStyle/>
+          <a:p>
+            <a:pPr marL="0" indent="0" algn="ctr">
               <a:buNone/>
             </a:pPr>
             <a:r>
@@ -15312,13 +14563,12 @@
             <a:avLst/>
           </a:prstGeom>
           <a:noFill/>
-          <a:ln/>
-        </p:spPr>
-        <p:txBody>
-          <a:bodyPr wrap="square" lIns="0" tIns="0" rIns="0" bIns="0" rtlCol="0" anchor="ctr"/>
-          <a:lstStyle/>
-          <a:p>
-            <a:pPr indent="0" marL="0">
+        </p:spPr>
+        <p:txBody>
+          <a:bodyPr wrap="square" lIns="0" tIns="0" rIns="0" bIns="0" rtlCol="0" anchor="ctr"/>
+          <a:lstStyle/>
+          <a:p>
+            <a:pPr marL="0" indent="0">
               <a:buNone/>
             </a:pPr>
             <a:r>
@@ -15348,13 +14598,12 @@
             <a:avLst/>
           </a:prstGeom>
           <a:noFill/>
-          <a:ln/>
-        </p:spPr>
-        <p:txBody>
-          <a:bodyPr wrap="square" lIns="0" tIns="0" rIns="0" bIns="0" rtlCol="0" anchor="ctr"/>
-          <a:lstStyle/>
-          <a:p>
-            <a:pPr indent="0" marL="0">
+        </p:spPr>
+        <p:txBody>
+          <a:bodyPr wrap="square" lIns="0" tIns="0" rIns="0" bIns="0" rtlCol="0" anchor="ctr"/>
+          <a:lstStyle/>
+          <a:p>
+            <a:pPr marL="0" indent="0">
               <a:buNone/>
             </a:pPr>
             <a:r>
@@ -15384,13 +14633,12 @@
             <a:avLst/>
           </a:prstGeom>
           <a:noFill/>
-          <a:ln/>
-        </p:spPr>
-        <p:txBody>
-          <a:bodyPr wrap="square" lIns="0" tIns="0" rIns="0" bIns="0" rtlCol="0" anchor="ctr"/>
-          <a:lstStyle/>
-          <a:p>
-            <a:pPr indent="0" marL="0">
+        </p:spPr>
+        <p:txBody>
+          <a:bodyPr wrap="square" lIns="0" tIns="0" rIns="0" bIns="0" rtlCol="0" anchor="ctr"/>
+          <a:lstStyle/>
+          <a:p>
+            <a:pPr marL="0" indent="0">
               <a:buNone/>
             </a:pPr>
             <a:r>
@@ -15420,13 +14668,12 @@
             <a:avLst/>
           </a:prstGeom>
           <a:noFill/>
-          <a:ln/>
-        </p:spPr>
-        <p:txBody>
-          <a:bodyPr wrap="square" lIns="0" tIns="0" rIns="0" bIns="0" rtlCol="0" anchor="ctr"/>
-          <a:lstStyle/>
-          <a:p>
-            <a:pPr algn="ctr" indent="0" marL="0">
+        </p:spPr>
+        <p:txBody>
+          <a:bodyPr wrap="square" lIns="0" tIns="0" rIns="0" bIns="0" rtlCol="0" anchor="ctr"/>
+          <a:lstStyle/>
+          <a:p>
+            <a:pPr marL="0" indent="0" algn="ctr">
               <a:buNone/>
             </a:pPr>
             <a:r>
@@ -15483,13 +14730,12 @@
             <a:avLst/>
           </a:prstGeom>
           <a:noFill/>
-          <a:ln/>
-        </p:spPr>
-        <p:txBody>
-          <a:bodyPr wrap="square" lIns="0" tIns="0" rIns="0" bIns="0" rtlCol="0" anchor="ctr"/>
-          <a:lstStyle/>
-          <a:p>
-            <a:pPr indent="0" marL="0">
+        </p:spPr>
+        <p:txBody>
+          <a:bodyPr wrap="square" lIns="0" tIns="0" rIns="0" bIns="0" rtlCol="0" anchor="ctr"/>
+          <a:lstStyle/>
+          <a:p>
+            <a:pPr marL="0" indent="0">
               <a:buNone/>
             </a:pPr>
             <a:r>
@@ -15519,13 +14765,12 @@
             <a:avLst/>
           </a:prstGeom>
           <a:noFill/>
-          <a:ln/>
-        </p:spPr>
-        <p:txBody>
-          <a:bodyPr wrap="square" lIns="0" tIns="0" rIns="0" bIns="0" rtlCol="0" anchor="ctr"/>
-          <a:lstStyle/>
-          <a:p>
-            <a:pPr indent="0" marL="0">
+        </p:spPr>
+        <p:txBody>
+          <a:bodyPr wrap="square" lIns="0" tIns="0" rIns="0" bIns="0" rtlCol="0" anchor="ctr"/>
+          <a:lstStyle/>
+          <a:p>
+            <a:pPr marL="0" indent="0">
               <a:buNone/>
             </a:pPr>
             <a:r>
@@ -15555,13 +14800,12 @@
             <a:avLst/>
           </a:prstGeom>
           <a:noFill/>
-          <a:ln/>
-        </p:spPr>
-        <p:txBody>
-          <a:bodyPr wrap="square" lIns="0" tIns="0" rIns="0" bIns="0" rtlCol="0" anchor="ctr"/>
-          <a:lstStyle/>
-          <a:p>
-            <a:pPr indent="0" marL="0">
+        </p:spPr>
+        <p:txBody>
+          <a:bodyPr wrap="square" lIns="0" tIns="0" rIns="0" bIns="0" rtlCol="0" anchor="ctr"/>
+          <a:lstStyle/>
+          <a:p>
+            <a:pPr marL="0" indent="0">
               <a:buNone/>
             </a:pPr>
             <a:r>
@@ -15591,13 +14835,12 @@
             <a:avLst/>
           </a:prstGeom>
           <a:noFill/>
-          <a:ln/>
-        </p:spPr>
-        <p:txBody>
-          <a:bodyPr wrap="square" lIns="0" tIns="0" rIns="0" bIns="0" rtlCol="0" anchor="ctr"/>
-          <a:lstStyle/>
-          <a:p>
-            <a:pPr algn="ctr" indent="0" marL="0">
+        </p:spPr>
+        <p:txBody>
+          <a:bodyPr wrap="square" lIns="0" tIns="0" rIns="0" bIns="0" rtlCol="0" anchor="ctr"/>
+          <a:lstStyle/>
+          <a:p>
+            <a:pPr marL="0" indent="0" algn="ctr">
               <a:buNone/>
             </a:pPr>
             <a:r>
@@ -15654,13 +14897,12 @@
             <a:avLst/>
           </a:prstGeom>
           <a:noFill/>
-          <a:ln/>
-        </p:spPr>
-        <p:txBody>
-          <a:bodyPr wrap="square" lIns="0" tIns="0" rIns="0" bIns="0" rtlCol="0" anchor="ctr"/>
-          <a:lstStyle/>
-          <a:p>
-            <a:pPr indent="0" marL="0">
+        </p:spPr>
+        <p:txBody>
+          <a:bodyPr wrap="square" lIns="0" tIns="0" rIns="0" bIns="0" rtlCol="0" anchor="ctr"/>
+          <a:lstStyle/>
+          <a:p>
+            <a:pPr marL="0" indent="0">
               <a:buNone/>
             </a:pPr>
             <a:r>
@@ -15690,13 +14932,12 @@
             <a:avLst/>
           </a:prstGeom>
           <a:noFill/>
-          <a:ln/>
-        </p:spPr>
-        <p:txBody>
-          <a:bodyPr wrap="square" lIns="0" tIns="0" rIns="0" bIns="0" rtlCol="0" anchor="ctr"/>
-          <a:lstStyle/>
-          <a:p>
-            <a:pPr indent="0" marL="0">
+        </p:spPr>
+        <p:txBody>
+          <a:bodyPr wrap="square" lIns="0" tIns="0" rIns="0" bIns="0" rtlCol="0" anchor="ctr"/>
+          <a:lstStyle/>
+          <a:p>
+            <a:pPr marL="0" indent="0">
               <a:buNone/>
             </a:pPr>
             <a:r>
@@ -15726,13 +14967,12 @@
             <a:avLst/>
           </a:prstGeom>
           <a:noFill/>
-          <a:ln/>
-        </p:spPr>
-        <p:txBody>
-          <a:bodyPr wrap="square" lIns="0" tIns="0" rIns="0" bIns="0" rtlCol="0" anchor="ctr"/>
-          <a:lstStyle/>
-          <a:p>
-            <a:pPr indent="0" marL="0">
+        </p:spPr>
+        <p:txBody>
+          <a:bodyPr wrap="square" lIns="0" tIns="0" rIns="0" bIns="0" rtlCol="0" anchor="ctr"/>
+          <a:lstStyle/>
+          <a:p>
+            <a:pPr marL="0" indent="0">
               <a:buNone/>
             </a:pPr>
             <a:r>
@@ -15762,13 +15002,12 @@
             <a:avLst/>
           </a:prstGeom>
           <a:noFill/>
-          <a:ln/>
-        </p:spPr>
-        <p:txBody>
-          <a:bodyPr wrap="square" lIns="0" tIns="0" rIns="0" bIns="0" rtlCol="0" anchor="ctr"/>
-          <a:lstStyle/>
-          <a:p>
-            <a:pPr algn="ctr" indent="0" marL="0">
+        </p:spPr>
+        <p:txBody>
+          <a:bodyPr wrap="square" lIns="0" tIns="0" rIns="0" bIns="0" rtlCol="0" anchor="ctr"/>
+          <a:lstStyle/>
+          <a:p>
+            <a:pPr marL="0" indent="0" algn="ctr">
               <a:buNone/>
             </a:pPr>
             <a:r>
@@ -15825,13 +15064,12 @@
             <a:avLst/>
           </a:prstGeom>
           <a:noFill/>
-          <a:ln/>
-        </p:spPr>
-        <p:txBody>
-          <a:bodyPr wrap="square" lIns="0" tIns="0" rIns="0" bIns="0" rtlCol="0" anchor="ctr"/>
-          <a:lstStyle/>
-          <a:p>
-            <a:pPr indent="0" marL="0">
+        </p:spPr>
+        <p:txBody>
+          <a:bodyPr wrap="square" lIns="0" tIns="0" rIns="0" bIns="0" rtlCol="0" anchor="ctr"/>
+          <a:lstStyle/>
+          <a:p>
+            <a:pPr marL="0" indent="0">
               <a:buNone/>
             </a:pPr>
             <a:r>
@@ -15861,13 +15099,12 @@
             <a:avLst/>
           </a:prstGeom>
           <a:noFill/>
-          <a:ln/>
-        </p:spPr>
-        <p:txBody>
-          <a:bodyPr wrap="square" lIns="0" tIns="0" rIns="0" bIns="0" rtlCol="0" anchor="ctr"/>
-          <a:lstStyle/>
-          <a:p>
-            <a:pPr indent="0" marL="0">
+        </p:spPr>
+        <p:txBody>
+          <a:bodyPr wrap="square" lIns="0" tIns="0" rIns="0" bIns="0" rtlCol="0" anchor="ctr"/>
+          <a:lstStyle/>
+          <a:p>
+            <a:pPr marL="0" indent="0">
               <a:buNone/>
             </a:pPr>
             <a:r>
@@ -15897,13 +15134,12 @@
             <a:avLst/>
           </a:prstGeom>
           <a:noFill/>
-          <a:ln/>
-        </p:spPr>
-        <p:txBody>
-          <a:bodyPr wrap="square" lIns="0" tIns="0" rIns="0" bIns="0" rtlCol="0" anchor="ctr"/>
-          <a:lstStyle/>
-          <a:p>
-            <a:pPr indent="0" marL="0">
+        </p:spPr>
+        <p:txBody>
+          <a:bodyPr wrap="square" lIns="0" tIns="0" rIns="0" bIns="0" rtlCol="0" anchor="ctr"/>
+          <a:lstStyle/>
+          <a:p>
+            <a:pPr marL="0" indent="0">
               <a:buNone/>
             </a:pPr>
             <a:r>
@@ -15933,13 +15169,12 @@
             <a:avLst/>
           </a:prstGeom>
           <a:noFill/>
-          <a:ln/>
-        </p:spPr>
-        <p:txBody>
-          <a:bodyPr wrap="square" lIns="0" tIns="0" rIns="0" bIns="0" rtlCol="0" anchor="ctr"/>
-          <a:lstStyle/>
-          <a:p>
-            <a:pPr indent="0" marL="0">
+        </p:spPr>
+        <p:txBody>
+          <a:bodyPr wrap="square" lIns="0" tIns="0" rIns="0" bIns="0" rtlCol="0" anchor="ctr"/>
+          <a:lstStyle/>
+          <a:p>
+            <a:pPr marL="0" indent="0">
               <a:buNone/>
             </a:pPr>
             <a:r>
@@ -16021,13 +15256,12 @@
             <a:avLst/>
           </a:prstGeom>
           <a:noFill/>
-          <a:ln/>
-        </p:spPr>
-        <p:txBody>
-          <a:bodyPr wrap="square" lIns="0" tIns="0" rIns="0" bIns="0" rtlCol="0" anchor="ctr"/>
-          <a:lstStyle/>
-          <a:p>
-            <a:pPr indent="0" marL="0">
+        </p:spPr>
+        <p:txBody>
+          <a:bodyPr wrap="square" lIns="0" tIns="0" rIns="0" bIns="0" rtlCol="0" anchor="ctr"/>
+          <a:lstStyle/>
+          <a:p>
+            <a:pPr marL="0" indent="0">
               <a:buNone/>
             </a:pPr>
             <a:r>
@@ -16057,13 +15291,12 @@
             <a:avLst/>
           </a:prstGeom>
           <a:noFill/>
-          <a:ln/>
-        </p:spPr>
-        <p:txBody>
-          <a:bodyPr wrap="square" lIns="0" tIns="0" rIns="0" bIns="0" rtlCol="0" anchor="ctr"/>
-          <a:lstStyle/>
-          <a:p>
-            <a:pPr indent="0" marL="0">
+        </p:spPr>
+        <p:txBody>
+          <a:bodyPr wrap="square" lIns="0" tIns="0" rIns="0" bIns="0" rtlCol="0" anchor="ctr"/>
+          <a:lstStyle/>
+          <a:p>
+            <a:pPr marL="0" indent="0">
               <a:buNone/>
             </a:pPr>
             <a:r>
@@ -16145,13 +15378,12 @@
             <a:avLst/>
           </a:prstGeom>
           <a:noFill/>
-          <a:ln/>
-        </p:spPr>
-        <p:txBody>
-          <a:bodyPr wrap="square" lIns="0" tIns="0" rIns="0" bIns="0" rtlCol="0" anchor="ctr"/>
-          <a:lstStyle/>
-          <a:p>
-            <a:pPr indent="0" marL="0">
+        </p:spPr>
+        <p:txBody>
+          <a:bodyPr wrap="square" lIns="0" tIns="0" rIns="0" bIns="0" rtlCol="0" anchor="ctr"/>
+          <a:lstStyle/>
+          <a:p>
+            <a:pPr marL="0" indent="0">
               <a:buNone/>
             </a:pPr>
             <a:r>
@@ -16181,13 +15413,12 @@
             <a:avLst/>
           </a:prstGeom>
           <a:noFill/>
-          <a:ln/>
-        </p:spPr>
-        <p:txBody>
-          <a:bodyPr wrap="square" lIns="0" tIns="0" rIns="0" bIns="0" rtlCol="0" anchor="ctr"/>
-          <a:lstStyle/>
-          <a:p>
-            <a:pPr indent="0" marL="0">
+        </p:spPr>
+        <p:txBody>
+          <a:bodyPr wrap="square" lIns="0" tIns="0" rIns="0" bIns="0" rtlCol="0" anchor="ctr"/>
+          <a:lstStyle/>
+          <a:p>
+            <a:pPr marL="0" indent="0">
               <a:buNone/>
             </a:pPr>
             <a:r>
@@ -16269,13 +15500,12 @@
             <a:avLst/>
           </a:prstGeom>
           <a:noFill/>
-          <a:ln/>
-        </p:spPr>
-        <p:txBody>
-          <a:bodyPr wrap="square" lIns="0" tIns="0" rIns="0" bIns="0" rtlCol="0" anchor="ctr"/>
-          <a:lstStyle/>
-          <a:p>
-            <a:pPr indent="0" marL="0">
+        </p:spPr>
+        <p:txBody>
+          <a:bodyPr wrap="square" lIns="0" tIns="0" rIns="0" bIns="0" rtlCol="0" anchor="ctr"/>
+          <a:lstStyle/>
+          <a:p>
+            <a:pPr marL="0" indent="0">
               <a:buNone/>
             </a:pPr>
             <a:r>
@@ -16305,13 +15535,12 @@
             <a:avLst/>
           </a:prstGeom>
           <a:noFill/>
-          <a:ln/>
-        </p:spPr>
-        <p:txBody>
-          <a:bodyPr wrap="square" lIns="0" tIns="0" rIns="0" bIns="0" rtlCol="0" anchor="ctr"/>
-          <a:lstStyle/>
-          <a:p>
-            <a:pPr indent="0" marL="0">
+        </p:spPr>
+        <p:txBody>
+          <a:bodyPr wrap="square" lIns="0" tIns="0" rIns="0" bIns="0" rtlCol="0" anchor="ctr"/>
+          <a:lstStyle/>
+          <a:p>
+            <a:pPr marL="0" indent="0">
               <a:buNone/>
             </a:pPr>
             <a:r>
@@ -16328,7 +15557,7 @@
       </p:sp>
       <p:sp>
         <p:nvSpPr>
-          <p:cNvPr id="25" name="Slide Number Placeholder 0"/>
+          <p:cNvPr id="45" name="Slide Number Placeholder 0"/>
           <p:cNvSpPr>
             <a:spLocks noGrp="1"/>
           </p:cNvSpPr>
@@ -16344,11 +15573,6 @@
           <a:prstGeom prst="rect">
             <a:avLst/>
           </a:prstGeom>
-          <a:extLst>
-            <a:ext uri="{C572A759-6A51-4108-AA02-DFA0A04FC94B}">
-              <ma14:wrappingTextBoxFlag xmlns:ma14="http://schemas.microsoft.com/office/mac/drawingml/2011/main" val="0"/>
-            </a:ext>
-          </a:extLst>
         </p:spPr>
         <p:txBody>
           <a:bodyPr/>
@@ -16364,8 +15588,7 @@
           <a:p>
             <a:pPr algn="l"/>
             <a:fld id="{F7021451-1387-4CA6-816F-3879F97B5CBC}" type="slidenum">
-              <a:rPr b="0" lang="en-US"/>
-              <a:t>7</a:t>
+              <a:rPr lang="en-US" b="0"/>
             </a:fld>
             <a:endParaRPr lang="en-US"/>
           </a:p>
@@ -16381,7 +15604,7 @@
 
 <file path=ppt/slides/slide8.xml><?xml version="1.0" encoding="utf-8"?>
 <p:sld xmlns:a="http://schemas.openxmlformats.org/drawingml/2006/main" xmlns:r="http://schemas.openxmlformats.org/officeDocument/2006/relationships" xmlns:p="http://schemas.openxmlformats.org/presentationml/2006/main">
-  <p:cSld name="Slide 8">
+  <p:cSld>
     <p:spTree>
       <p:nvGrpSpPr>
         <p:cNvPr id="1" name=""/>
@@ -16401,7 +15624,7 @@
           <p:cNvPr id="2" name="Text 0"/>
           <p:cNvSpPr/>
           <p:nvPr>
-            <p:ph idx="100" type="title" hasCustomPrompt="1"/>
+            <p:ph type="title" idx="100" hasCustomPrompt="1"/>
           </p:nvPr>
         </p:nvSpPr>
         <p:spPr>
@@ -16413,13 +15636,12 @@
             <a:avLst/>
           </a:prstGeom>
           <a:noFill/>
-          <a:ln/>
         </p:spPr>
         <p:txBody>
           <a:bodyPr wrap="square" rtlCol="0"/>
           <a:lstStyle/>
           <a:p>
-            <a:pPr algn="l" indent="0" marL="0">
+            <a:pPr marL="0" indent="0" algn="l">
               <a:buNone/>
             </a:pPr>
             <a:r>
@@ -16476,13 +15698,12 @@
             <a:avLst/>
           </a:prstGeom>
           <a:noFill/>
-          <a:ln/>
-        </p:spPr>
-        <p:txBody>
-          <a:bodyPr wrap="square" lIns="0" tIns="0" rIns="0" bIns="0" rtlCol="0" anchor="ctr"/>
-          <a:lstStyle/>
-          <a:p>
-            <a:pPr indent="0" marL="0">
+        </p:spPr>
+        <p:txBody>
+          <a:bodyPr wrap="square" lIns="0" tIns="0" rIns="0" bIns="0" rtlCol="0" anchor="ctr"/>
+          <a:lstStyle/>
+          <a:p>
+            <a:pPr marL="0" indent="0">
               <a:buNone/>
             </a:pPr>
             <a:r>
@@ -16512,13 +15733,12 @@
             <a:avLst/>
           </a:prstGeom>
           <a:noFill/>
-          <a:ln/>
-        </p:spPr>
-        <p:txBody>
-          <a:bodyPr wrap="square" lIns="0" tIns="0" rIns="0" bIns="0" rtlCol="0" anchor="ctr"/>
-          <a:lstStyle/>
-          <a:p>
-            <a:pPr indent="0" marL="0">
+        </p:spPr>
+        <p:txBody>
+          <a:bodyPr wrap="square" lIns="0" tIns="0" rIns="0" bIns="0" rtlCol="0" anchor="ctr"/>
+          <a:lstStyle/>
+          <a:p>
+            <a:pPr marL="0" indent="0">
               <a:buNone/>
             </a:pPr>
             <a:r>
@@ -16575,13 +15795,12 @@
             <a:avLst/>
           </a:prstGeom>
           <a:noFill/>
-          <a:ln/>
-        </p:spPr>
-        <p:txBody>
-          <a:bodyPr wrap="square" lIns="0" tIns="0" rIns="0" bIns="0" rtlCol="0" anchor="ctr"/>
-          <a:lstStyle/>
-          <a:p>
-            <a:pPr indent="0" marL="0">
+        </p:spPr>
+        <p:txBody>
+          <a:bodyPr wrap="square" lIns="0" tIns="0" rIns="0" bIns="0" rtlCol="0" anchor="ctr"/>
+          <a:lstStyle/>
+          <a:p>
+            <a:pPr marL="0" indent="0">
               <a:buNone/>
             </a:pPr>
             <a:r>
@@ -16611,13 +15830,12 @@
             <a:avLst/>
           </a:prstGeom>
           <a:noFill/>
-          <a:ln/>
-        </p:spPr>
-        <p:txBody>
-          <a:bodyPr wrap="square" lIns="0" tIns="0" rIns="0" bIns="0" rtlCol="0" anchor="ctr"/>
-          <a:lstStyle/>
-          <a:p>
-            <a:pPr indent="0" marL="0">
+        </p:spPr>
+        <p:txBody>
+          <a:bodyPr wrap="square" lIns="0" tIns="0" rIns="0" bIns="0" rtlCol="0" anchor="ctr"/>
+          <a:lstStyle/>
+          <a:p>
+            <a:pPr marL="0" indent="0">
               <a:buNone/>
             </a:pPr>
             <a:r>
@@ -16674,13 +15892,12 @@
             <a:avLst/>
           </a:prstGeom>
           <a:noFill/>
-          <a:ln/>
-        </p:spPr>
-        <p:txBody>
-          <a:bodyPr wrap="square" lIns="0" tIns="0" rIns="0" bIns="0" rtlCol="0" anchor="ctr"/>
-          <a:lstStyle/>
-          <a:p>
-            <a:pPr indent="0" marL="0">
+        </p:spPr>
+        <p:txBody>
+          <a:bodyPr wrap="square" lIns="0" tIns="0" rIns="0" bIns="0" rtlCol="0" anchor="ctr"/>
+          <a:lstStyle/>
+          <a:p>
+            <a:pPr marL="0" indent="0">
               <a:buNone/>
             </a:pPr>
             <a:r>
@@ -16710,13 +15927,12 @@
             <a:avLst/>
           </a:prstGeom>
           <a:noFill/>
-          <a:ln/>
-        </p:spPr>
-        <p:txBody>
-          <a:bodyPr wrap="square" lIns="0" tIns="0" rIns="0" bIns="0" rtlCol="0" anchor="ctr"/>
-          <a:lstStyle/>
-          <a:p>
-            <a:pPr indent="0" marL="0">
+        </p:spPr>
+        <p:txBody>
+          <a:bodyPr wrap="square" lIns="0" tIns="0" rIns="0" bIns="0" rtlCol="0" anchor="ctr"/>
+          <a:lstStyle/>
+          <a:p>
+            <a:pPr marL="0" indent="0">
               <a:buNone/>
             </a:pPr>
             <a:r>
@@ -16773,13 +15989,12 @@
             <a:avLst/>
           </a:prstGeom>
           <a:noFill/>
-          <a:ln/>
-        </p:spPr>
-        <p:txBody>
-          <a:bodyPr wrap="square" lIns="0" tIns="0" rIns="0" bIns="0" rtlCol="0" anchor="ctr"/>
-          <a:lstStyle/>
-          <a:p>
-            <a:pPr indent="0" marL="0">
+        </p:spPr>
+        <p:txBody>
+          <a:bodyPr wrap="square" lIns="0" tIns="0" rIns="0" bIns="0" rtlCol="0" anchor="ctr"/>
+          <a:lstStyle/>
+          <a:p>
+            <a:pPr marL="0" indent="0">
               <a:buNone/>
             </a:pPr>
             <a:r>
@@ -16809,13 +16024,12 @@
             <a:avLst/>
           </a:prstGeom>
           <a:noFill/>
-          <a:ln/>
-        </p:spPr>
-        <p:txBody>
-          <a:bodyPr wrap="square" lIns="0" tIns="0" rIns="0" bIns="0" rtlCol="0" anchor="ctr"/>
-          <a:lstStyle/>
-          <a:p>
-            <a:pPr indent="0" marL="0">
+        </p:spPr>
+        <p:txBody>
+          <a:bodyPr wrap="square" lIns="0" tIns="0" rIns="0" bIns="0" rtlCol="0" anchor="ctr"/>
+          <a:lstStyle/>
+          <a:p>
+            <a:pPr marL="0" indent="0">
               <a:buNone/>
             </a:pPr>
             <a:r>
@@ -16872,13 +16086,12 @@
             <a:avLst/>
           </a:prstGeom>
           <a:noFill/>
-          <a:ln/>
-        </p:spPr>
-        <p:txBody>
-          <a:bodyPr wrap="square" lIns="0" tIns="0" rIns="0" bIns="0" rtlCol="0" anchor="ctr"/>
-          <a:lstStyle/>
-          <a:p>
-            <a:pPr indent="0" marL="0">
+        </p:spPr>
+        <p:txBody>
+          <a:bodyPr wrap="square" lIns="0" tIns="0" rIns="0" bIns="0" rtlCol="0" anchor="ctr"/>
+          <a:lstStyle/>
+          <a:p>
+            <a:pPr marL="0" indent="0">
               <a:buNone/>
             </a:pPr>
             <a:r>
@@ -16908,7 +16121,6 @@
             <a:avLst/>
           </a:prstGeom>
           <a:noFill/>
-          <a:ln/>
         </p:spPr>
         <p:txBody>
           <a:bodyPr wrap="square" lIns="0" tIns="0" rIns="0" bIns="0" rtlCol="0" anchor="ctr"/>
@@ -17047,13 +16259,12 @@
             <a:avLst/>
           </a:prstGeom>
           <a:noFill/>
-          <a:ln/>
-        </p:spPr>
-        <p:txBody>
-          <a:bodyPr wrap="square" lIns="0" tIns="0" rIns="0" bIns="0" rtlCol="0" anchor="ctr"/>
-          <a:lstStyle/>
-          <a:p>
-            <a:pPr indent="0" marL="0">
+        </p:spPr>
+        <p:txBody>
+          <a:bodyPr wrap="square" lIns="0" tIns="0" rIns="0" bIns="0" rtlCol="0" anchor="ctr"/>
+          <a:lstStyle/>
+          <a:p>
+            <a:pPr marL="0" indent="0">
               <a:buNone/>
             </a:pPr>
             <a:r>
@@ -17083,13 +16294,12 @@
             <a:avLst/>
           </a:prstGeom>
           <a:noFill/>
-          <a:ln/>
-        </p:spPr>
-        <p:txBody>
-          <a:bodyPr wrap="square" lIns="0" tIns="0" rIns="0" bIns="0" rtlCol="0" anchor="ctr"/>
-          <a:lstStyle/>
-          <a:p>
-            <a:pPr indent="0" marL="0">
+        </p:spPr>
+        <p:txBody>
+          <a:bodyPr wrap="square" lIns="0" tIns="0" rIns="0" bIns="0" rtlCol="0" anchor="ctr"/>
+          <a:lstStyle/>
+          <a:p>
+            <a:pPr marL="0" indent="0">
               <a:spcAft>
                 <a:spcPts val="900"/>
               </a:spcAft>
@@ -17106,7 +16316,7 @@
             <a:endParaRPr lang="en-US" sz="1200" dirty="0"/>
           </a:p>
           <a:p>
-            <a:pPr indent="0" marL="0">
+            <a:pPr marL="0" indent="0">
               <a:spcAft>
                 <a:spcPts val="900"/>
               </a:spcAft>
@@ -17123,7 +16333,7 @@
             <a:endParaRPr lang="en-US" sz="1200" dirty="0"/>
           </a:p>
           <a:p>
-            <a:pPr indent="0" marL="0">
+            <a:pPr marL="0" indent="0">
               <a:spcAft>
                 <a:spcPts val="900"/>
               </a:spcAft>
@@ -17159,11 +16369,6 @@
           <a:prstGeom prst="rect">
             <a:avLst/>
           </a:prstGeom>
-          <a:extLst>
-            <a:ext uri="{C572A759-6A51-4108-AA02-DFA0A04FC94B}">
-              <ma14:wrappingTextBoxFlag xmlns:ma14="http://schemas.microsoft.com/office/mac/drawingml/2011/main" val="0"/>
-            </a:ext>
-          </a:extLst>
         </p:spPr>
         <p:txBody>
           <a:bodyPr/>
@@ -17179,8 +16384,7 @@
           <a:p>
             <a:pPr algn="l"/>
             <a:fld id="{F7021451-1387-4CA6-816F-3879F97B5CBC}" type="slidenum">
-              <a:rPr b="0" lang="en-US"/>
-              <a:t>8</a:t>
+              <a:rPr lang="en-US" b="0"/>
             </a:fld>
             <a:endParaRPr lang="en-US"/>
           </a:p>
@@ -17196,7 +16400,7 @@
 
 <file path=ppt/slides/slide9.xml><?xml version="1.0" encoding="utf-8"?>
 <p:sld xmlns:a="http://schemas.openxmlformats.org/drawingml/2006/main" xmlns:r="http://schemas.openxmlformats.org/officeDocument/2006/relationships" xmlns:p="http://schemas.openxmlformats.org/presentationml/2006/main">
-  <p:cSld name="Slide 9">
+  <p:cSld>
     <p:spTree>
       <p:nvGrpSpPr>
         <p:cNvPr id="1" name=""/>
@@ -17216,7 +16420,7 @@
           <p:cNvPr id="2" name="Text 0"/>
           <p:cNvSpPr/>
           <p:nvPr>
-            <p:ph idx="100" type="title" hasCustomPrompt="1"/>
+            <p:ph type="title" idx="100" hasCustomPrompt="1"/>
           </p:nvPr>
         </p:nvSpPr>
         <p:spPr>
@@ -17228,13 +16432,12 @@
             <a:avLst/>
           </a:prstGeom>
           <a:noFill/>
-          <a:ln/>
         </p:spPr>
         <p:txBody>
           <a:bodyPr wrap="square" rtlCol="0"/>
           <a:lstStyle/>
           <a:p>
-            <a:pPr algn="l" indent="0" marL="0">
+            <a:pPr marL="0" indent="0" algn="l">
               <a:buNone/>
             </a:pPr>
             <a:r>
@@ -17291,13 +16494,12 @@
             <a:avLst/>
           </a:prstGeom>
           <a:noFill/>
-          <a:ln/>
-        </p:spPr>
-        <p:txBody>
-          <a:bodyPr wrap="square" lIns="0" tIns="0" rIns="0" bIns="0" rtlCol="0" anchor="ctr"/>
-          <a:lstStyle/>
-          <a:p>
-            <a:pPr indent="0" marL="0">
+        </p:spPr>
+        <p:txBody>
+          <a:bodyPr wrap="square" lIns="0" tIns="0" rIns="0" bIns="0" rtlCol="0" anchor="ctr"/>
+          <a:lstStyle/>
+          <a:p>
+            <a:pPr marL="0" indent="0">
               <a:buNone/>
             </a:pPr>
             <a:r>
@@ -17327,13 +16529,12 @@
             <a:avLst/>
           </a:prstGeom>
           <a:noFill/>
-          <a:ln/>
-        </p:spPr>
-        <p:txBody>
-          <a:bodyPr wrap="square" lIns="0" tIns="0" rIns="0" bIns="0" rtlCol="0" anchor="ctr"/>
-          <a:lstStyle/>
-          <a:p>
-            <a:pPr indent="0" marL="0">
+        </p:spPr>
+        <p:txBody>
+          <a:bodyPr wrap="square" lIns="0" tIns="0" rIns="0" bIns="0" rtlCol="0" anchor="ctr"/>
+          <a:lstStyle/>
+          <a:p>
+            <a:pPr marL="0" indent="0">
               <a:buNone/>
             </a:pPr>
             <a:r>
@@ -17363,13 +16564,12 @@
             <a:avLst/>
           </a:prstGeom>
           <a:noFill/>
-          <a:ln/>
-        </p:spPr>
-        <p:txBody>
-          <a:bodyPr wrap="square" lIns="0" tIns="0" rIns="0" bIns="0" rtlCol="0" anchor="ctr"/>
-          <a:lstStyle/>
-          <a:p>
-            <a:pPr indent="0" marL="0">
+        </p:spPr>
+        <p:txBody>
+          <a:bodyPr wrap="square" lIns="0" tIns="0" rIns="0" bIns="0" rtlCol="0" anchor="ctr"/>
+          <a:lstStyle/>
+          <a:p>
+            <a:pPr marL="0" indent="0">
               <a:buNone/>
             </a:pPr>
             <a:r>
@@ -17426,13 +16626,12 @@
             <a:avLst/>
           </a:prstGeom>
           <a:noFill/>
-          <a:ln/>
-        </p:spPr>
-        <p:txBody>
-          <a:bodyPr wrap="square" lIns="0" tIns="0" rIns="0" bIns="0" rtlCol="0" anchor="ctr"/>
-          <a:lstStyle/>
-          <a:p>
-            <a:pPr indent="0" marL="0">
+        </p:spPr>
+        <p:txBody>
+          <a:bodyPr wrap="square" lIns="0" tIns="0" rIns="0" bIns="0" rtlCol="0" anchor="ctr"/>
+          <a:lstStyle/>
+          <a:p>
+            <a:pPr marL="0" indent="0">
               <a:buNone/>
             </a:pPr>
             <a:r>
@@ -17462,13 +16661,12 @@
             <a:avLst/>
           </a:prstGeom>
           <a:noFill/>
-          <a:ln/>
-        </p:spPr>
-        <p:txBody>
-          <a:bodyPr wrap="square" lIns="0" tIns="0" rIns="0" bIns="0" rtlCol="0" anchor="ctr"/>
-          <a:lstStyle/>
-          <a:p>
-            <a:pPr indent="0" marL="0">
+        </p:spPr>
+        <p:txBody>
+          <a:bodyPr wrap="square" lIns="0" tIns="0" rIns="0" bIns="0" rtlCol="0" anchor="ctr"/>
+          <a:lstStyle/>
+          <a:p>
+            <a:pPr marL="0" indent="0">
               <a:buNone/>
             </a:pPr>
             <a:r>
@@ -17498,13 +16696,12 @@
             <a:avLst/>
           </a:prstGeom>
           <a:noFill/>
-          <a:ln/>
-        </p:spPr>
-        <p:txBody>
-          <a:bodyPr wrap="square" lIns="0" tIns="0" rIns="0" bIns="0" rtlCol="0" anchor="ctr"/>
-          <a:lstStyle/>
-          <a:p>
-            <a:pPr indent="0" marL="0">
+        </p:spPr>
+        <p:txBody>
+          <a:bodyPr wrap="square" lIns="0" tIns="0" rIns="0" bIns="0" rtlCol="0" anchor="ctr"/>
+          <a:lstStyle/>
+          <a:p>
+            <a:pPr marL="0" indent="0">
               <a:buNone/>
             </a:pPr>
             <a:r>
@@ -17561,13 +16758,12 @@
             <a:avLst/>
           </a:prstGeom>
           <a:noFill/>
-          <a:ln/>
-        </p:spPr>
-        <p:txBody>
-          <a:bodyPr wrap="square" lIns="0" tIns="0" rIns="0" bIns="0" rtlCol="0" anchor="ctr"/>
-          <a:lstStyle/>
-          <a:p>
-            <a:pPr indent="0" marL="0">
+        </p:spPr>
+        <p:txBody>
+          <a:bodyPr wrap="square" lIns="0" tIns="0" rIns="0" bIns="0" rtlCol="0" anchor="ctr"/>
+          <a:lstStyle/>
+          <a:p>
+            <a:pPr marL="0" indent="0">
               <a:buNone/>
             </a:pPr>
             <a:r>
@@ -17597,13 +16793,12 @@
             <a:avLst/>
           </a:prstGeom>
           <a:noFill/>
-          <a:ln/>
-        </p:spPr>
-        <p:txBody>
-          <a:bodyPr wrap="square" lIns="0" tIns="0" rIns="0" bIns="0" rtlCol="0" anchor="ctr"/>
-          <a:lstStyle/>
-          <a:p>
-            <a:pPr indent="0" marL="0">
+        </p:spPr>
+        <p:txBody>
+          <a:bodyPr wrap="square" lIns="0" tIns="0" rIns="0" bIns="0" rtlCol="0" anchor="ctr"/>
+          <a:lstStyle/>
+          <a:p>
+            <a:pPr marL="0" indent="0">
               <a:buNone/>
             </a:pPr>
             <a:r>
@@ -17611,16 +16806,16 @@
                 <a:solidFill>
                   <a:srgbClr val="7DD3FC"/>
                 </a:solidFill>
-                <a:latin typeface="Courier New" pitchFamily="34" charset="0"/>
-                <a:ea typeface="Courier New" pitchFamily="34" charset="-122"/>
-                <a:cs typeface="Courier New" pitchFamily="34" charset="-120"/>
+                <a:latin typeface="Courier New" panose="02070609020205020404" pitchFamily="34" charset="0"/>
+                <a:ea typeface="Courier New" panose="02070609020205020404" pitchFamily="34" charset="-122"/>
+                <a:cs typeface="Courier New" panose="02070609020205020404" pitchFamily="34" charset="-120"/>
               </a:rPr>
               <a:t>$ docker run --rm --entrypoint id ghcr.io/amanyadav7015/servicedesk-backend:5041ecb</a:t>
             </a:r>
             <a:endParaRPr lang="en-US" sz="1200" dirty="0"/>
           </a:p>
           <a:p>
-            <a:pPr indent="0" marL="0">
+            <a:pPr marL="0" indent="0">
               <a:buNone/>
             </a:pPr>
             <a:r>
@@ -17628,9 +16823,9 @@
                 <a:solidFill>
                   <a:srgbClr val="7DD3FC"/>
                 </a:solidFill>
-                <a:latin typeface="Courier New" pitchFamily="34" charset="0"/>
-                <a:ea typeface="Courier New" pitchFamily="34" charset="-122"/>
-                <a:cs typeface="Courier New" pitchFamily="34" charset="-120"/>
+                <a:latin typeface="Courier New" panose="02070609020205020404" pitchFamily="34" charset="0"/>
+                <a:ea typeface="Courier New" panose="02070609020205020404" pitchFamily="34" charset="-122"/>
+                <a:cs typeface="Courier New" panose="02070609020205020404" pitchFamily="34" charset="-120"/>
               </a:rPr>
               <a:t>  uid=10001(servicedesk) gid=10001(servicedesk) groups=10001(servicedesk)</a:t>
             </a:r>
@@ -17653,13 +16848,12 @@
             <a:avLst/>
           </a:prstGeom>
           <a:noFill/>
-          <a:ln/>
-        </p:spPr>
-        <p:txBody>
-          <a:bodyPr wrap="square" lIns="0" tIns="0" rIns="0" bIns="0" rtlCol="0" anchor="ctr"/>
-          <a:lstStyle/>
-          <a:p>
-            <a:pPr indent="0" marL="0">
+        </p:spPr>
+        <p:txBody>
+          <a:bodyPr wrap="square" lIns="0" tIns="0" rIns="0" bIns="0" rtlCol="0" anchor="ctr"/>
+          <a:lstStyle/>
+          <a:p>
+            <a:pPr marL="0" indent="0">
               <a:buNone/>
             </a:pPr>
             <a:r>
@@ -17692,11 +16886,6 @@
           <a:prstGeom prst="rect">
             <a:avLst/>
           </a:prstGeom>
-          <a:extLst>
-            <a:ext uri="{C572A759-6A51-4108-AA02-DFA0A04FC94B}">
-              <ma14:wrappingTextBoxFlag xmlns:ma14="http://schemas.microsoft.com/office/mac/drawingml/2011/main" val="0"/>
-            </a:ext>
-          </a:extLst>
         </p:spPr>
         <p:txBody>
           <a:bodyPr/>
@@ -17712,8 +16901,7 @@
           <a:p>
             <a:pPr algn="l"/>
             <a:fld id="{F7021451-1387-4CA6-816F-3879F97B5CBC}" type="slidenum">
-              <a:rPr b="0" lang="en-US"/>
-              <a:t>9</a:t>
+              <a:rPr lang="en-US" b="0"/>
             </a:fld>
             <a:endParaRPr lang="en-US"/>
           </a:p>
@@ -17803,23 +16991,6 @@
         <a:font script="Viet" typeface="Times New Roman"/>
         <a:font script="Uigh" typeface="Microsoft Uighur"/>
         <a:font script="Geor" typeface="Sylfaen"/>
-        <a:font script="Armn" typeface="Arial"/>
-        <a:font script="Bugi" typeface="Leelawadee UI"/>
-        <a:font script="Bopo" typeface="Microsoft JhengHei"/>
-        <a:font script="Java" typeface="Javanese Text"/>
-        <a:font script="Lisu" typeface="Segoe UI"/>
-        <a:font script="Mymr" typeface="Myanmar Text"/>
-        <a:font script="Nkoo" typeface="Ebrima"/>
-        <a:font script="Olck" typeface="Nirmala UI"/>
-        <a:font script="Osma" typeface="Ebrima"/>
-        <a:font script="Phag" typeface="Phagspa"/>
-        <a:font script="Syrn" typeface="Estrangelo Edessa"/>
-        <a:font script="Syrj" typeface="Estrangelo Edessa"/>
-        <a:font script="Syre" typeface="Estrangelo Edessa"/>
-        <a:font script="Sora" typeface="Nirmala UI"/>
-        <a:font script="Tale" typeface="Microsoft Tai Le"/>
-        <a:font script="Talu" typeface="Microsoft New Tai Lue"/>
-        <a:font script="Tfng" typeface="Ebrima"/>
       </a:majorFont>
       <a:minorFont>
         <a:latin typeface="Calibri"/>
@@ -17855,23 +17026,6 @@
         <a:font script="Viet" typeface="Arial"/>
         <a:font script="Uigh" typeface="Microsoft Uighur"/>
         <a:font script="Geor" typeface="Sylfaen"/>
-        <a:font script="Armn" typeface="Arial"/>
-        <a:font script="Bugi" typeface="Leelawadee UI"/>
-        <a:font script="Bopo" typeface="Microsoft JhengHei"/>
-        <a:font script="Java" typeface="Javanese Text"/>
-        <a:font script="Lisu" typeface="Segoe UI"/>
-        <a:font script="Mymr" typeface="Myanmar Text"/>
-        <a:font script="Nkoo" typeface="Ebrima"/>
-        <a:font script="Olck" typeface="Nirmala UI"/>
-        <a:font script="Osma" typeface="Ebrima"/>
-        <a:font script="Phag" typeface="Phagspa"/>
-        <a:font script="Syrn" typeface="Estrangelo Edessa"/>
-        <a:font script="Syrj" typeface="Estrangelo Edessa"/>
-        <a:font script="Syre" typeface="Estrangelo Edessa"/>
-        <a:font script="Sora" typeface="Nirmala UI"/>
-        <a:font script="Tale" typeface="Microsoft Tai Le"/>
-        <a:font script="Talu" typeface="Microsoft New Tai Lue"/>
-        <a:font script="Tfng" typeface="Ebrima"/>
       </a:minorFont>
     </a:fontScheme>
     <a:fmtScheme name="Office">
@@ -18012,8 +17166,265 @@
       </a:bgFillStyleLst>
     </a:fmtScheme>
   </a:themeElements>
-  <a:objectDefaults/>
-  <a:extraClrSchemeLst/>
+  <a:extLst>
+    <a:ext uri="{05A4C25C-085E-4340-85A3-A5531E510DB2}">
+      <thm15:themeFamily xmlns:thm15="http://schemas.microsoft.com/office/thememl/2012/main" name="Office Theme" id="{62F939B6-93AF-4DB8-9C6B-D6C7DFDC589F}" vid="{4A3C46E8-61CC-4603-A589-7422A47A8E4A}"/>
+    </a:ext>
+  </a:extLst>
+</a:theme>
+</file>
+
+<file path=ppt/theme/theme2.xml><?xml version="1.0" encoding="utf-8"?>
+<a:theme xmlns:a="http://schemas.openxmlformats.org/drawingml/2006/main" name="ServiceDesk Capstone">
+  <a:themeElements>
+    <a:clrScheme name="ServiceDesk Capstone">
+      <a:dk1>
+        <a:srgbClr val="0F172A"/>
+      </a:dk1>
+      <a:lt1>
+        <a:srgbClr val="FFFFFF"/>
+      </a:lt1>
+      <a:dk2>
+        <a:srgbClr val="1C7293"/>
+      </a:dk2>
+      <a:lt2>
+        <a:srgbClr val="F1F5F9"/>
+      </a:lt2>
+      <a:accent1>
+        <a:srgbClr val="0EA5A4"/>
+      </a:accent1>
+      <a:accent2>
+        <a:srgbClr val="F59E0B"/>
+      </a:accent2>
+      <a:accent3>
+        <a:srgbClr val="EF4444"/>
+      </a:accent3>
+      <a:accent4>
+        <a:srgbClr val="22C55E"/>
+      </a:accent4>
+      <a:accent5>
+        <a:srgbClr val="065A82"/>
+      </a:accent5>
+      <a:accent6>
+        <a:srgbClr val="64748B"/>
+      </a:accent6>
+      <a:hlink>
+        <a:srgbClr val="0EA5A4"/>
+      </a:hlink>
+      <a:folHlink>
+        <a:srgbClr val="64748B"/>
+      </a:folHlink>
+    </a:clrScheme>
+    <a:fontScheme name="ServiceDesk Capstone">
+      <a:majorFont>
+        <a:latin typeface="Cambria"/>
+        <a:ea typeface=""/>
+        <a:cs typeface=""/>
+        <a:font script="Jpan" typeface="游ゴシック Light"/>
+        <a:font script="Hang" typeface="맑은 고딕"/>
+        <a:font script="Hans" typeface="等线 Light"/>
+        <a:font script="Hant" typeface="新細明體"/>
+        <a:font script="Arab" typeface="Times New Roman"/>
+        <a:font script="Hebr" typeface="Times New Roman"/>
+        <a:font script="Thai" typeface="Angsana New"/>
+        <a:font script="Ethi" typeface="Nyala"/>
+        <a:font script="Beng" typeface="Vrinda"/>
+        <a:font script="Gujr" typeface="Shruti"/>
+        <a:font script="Khmr" typeface="MoolBoran"/>
+        <a:font script="Knda" typeface="Tunga"/>
+        <a:font script="Guru" typeface="Raavi"/>
+        <a:font script="Cans" typeface="Euphemia"/>
+        <a:font script="Cher" typeface="Plantagenet Cherokee"/>
+        <a:font script="Yiii" typeface="Microsoft Yi Baiti"/>
+        <a:font script="Tibt" typeface="Microsoft Himalaya"/>
+        <a:font script="Thaa" typeface="MV Boli"/>
+        <a:font script="Deva" typeface="Mangal"/>
+        <a:font script="Telu" typeface="Gautami"/>
+        <a:font script="Taml" typeface="Latha"/>
+        <a:font script="Syrc" typeface="Estrangelo Edessa"/>
+        <a:font script="Orya" typeface="Kalinga"/>
+        <a:font script="Mlym" typeface="Kartika"/>
+        <a:font script="Laoo" typeface="DokChampa"/>
+        <a:font script="Sinh" typeface="Iskoola Pota"/>
+        <a:font script="Mong" typeface="Mongolian Baiti"/>
+        <a:font script="Viet" typeface="Times New Roman"/>
+        <a:font script="Uigh" typeface="Microsoft Uighur"/>
+        <a:font script="Geor" typeface="Sylfaen"/>
+      </a:majorFont>
+      <a:minorFont>
+        <a:latin typeface="Calibri"/>
+        <a:ea typeface=""/>
+        <a:cs typeface=""/>
+        <a:font script="Jpan" typeface="游ゴシック"/>
+        <a:font script="Hang" typeface="맑은 고딕"/>
+        <a:font script="Hans" typeface="等线"/>
+        <a:font script="Hant" typeface="新細明體"/>
+        <a:font script="Arab" typeface="Arial"/>
+        <a:font script="Hebr" typeface="Arial"/>
+        <a:font script="Thai" typeface="Cordia New"/>
+        <a:font script="Ethi" typeface="Nyala"/>
+        <a:font script="Beng" typeface="Vrinda"/>
+        <a:font script="Gujr" typeface="Shruti"/>
+        <a:font script="Khmr" typeface="DaunPenh"/>
+        <a:font script="Knda" typeface="Tunga"/>
+        <a:font script="Guru" typeface="Raavi"/>
+        <a:font script="Cans" typeface="Euphemia"/>
+        <a:font script="Cher" typeface="Plantagenet Cherokee"/>
+        <a:font script="Yiii" typeface="Microsoft Yi Baiti"/>
+        <a:font script="Tibt" typeface="Microsoft Himalaya"/>
+        <a:font script="Thaa" typeface="MV Boli"/>
+        <a:font script="Deva" typeface="Mangal"/>
+        <a:font script="Telu" typeface="Gautami"/>
+        <a:font script="Taml" typeface="Latha"/>
+        <a:font script="Syrc" typeface="Estrangelo Edessa"/>
+        <a:font script="Orya" typeface="Kalinga"/>
+        <a:font script="Mlym" typeface="Kartika"/>
+        <a:font script="Laoo" typeface="DokChampa"/>
+        <a:font script="Sinh" typeface="Iskoola Pota"/>
+        <a:font script="Mong" typeface="Mongolian Baiti"/>
+        <a:font script="Viet" typeface="Arial"/>
+        <a:font script="Uigh" typeface="Microsoft Uighur"/>
+        <a:font script="Geor" typeface="Sylfaen"/>
+      </a:minorFont>
+    </a:fontScheme>
+    <a:fmtScheme name="Office">
+      <a:fillStyleLst>
+        <a:solidFill>
+          <a:schemeClr val="phClr"/>
+        </a:solidFill>
+        <a:gradFill rotWithShape="1">
+          <a:gsLst>
+            <a:gs pos="0">
+              <a:schemeClr val="phClr">
+                <a:lumMod val="110000"/>
+                <a:satMod val="105000"/>
+                <a:tint val="67000"/>
+              </a:schemeClr>
+            </a:gs>
+            <a:gs pos="50000">
+              <a:schemeClr val="phClr">
+                <a:lumMod val="105000"/>
+                <a:satMod val="103000"/>
+                <a:tint val="73000"/>
+              </a:schemeClr>
+            </a:gs>
+            <a:gs pos="100000">
+              <a:schemeClr val="phClr">
+                <a:lumMod val="105000"/>
+                <a:satMod val="109000"/>
+                <a:tint val="81000"/>
+              </a:schemeClr>
+            </a:gs>
+          </a:gsLst>
+          <a:lin ang="5400000" scaled="0"/>
+        </a:gradFill>
+        <a:gradFill rotWithShape="1">
+          <a:gsLst>
+            <a:gs pos="0">
+              <a:schemeClr val="phClr">
+                <a:satMod val="103000"/>
+                <a:lumMod val="102000"/>
+                <a:tint val="94000"/>
+              </a:schemeClr>
+            </a:gs>
+            <a:gs pos="50000">
+              <a:schemeClr val="phClr">
+                <a:satMod val="110000"/>
+                <a:lumMod val="100000"/>
+                <a:shade val="100000"/>
+              </a:schemeClr>
+            </a:gs>
+            <a:gs pos="100000">
+              <a:schemeClr val="phClr">
+                <a:lumMod val="99000"/>
+                <a:satMod val="120000"/>
+                <a:shade val="78000"/>
+              </a:schemeClr>
+            </a:gs>
+          </a:gsLst>
+          <a:lin ang="5400000" scaled="0"/>
+        </a:gradFill>
+      </a:fillStyleLst>
+      <a:lnStyleLst>
+        <a:ln w="6350" cap="flat" cmpd="sng" algn="ctr">
+          <a:solidFill>
+            <a:schemeClr val="phClr"/>
+          </a:solidFill>
+          <a:prstDash val="solid"/>
+          <a:miter lim="800000"/>
+        </a:ln>
+        <a:ln w="12700" cap="flat" cmpd="sng" algn="ctr">
+          <a:solidFill>
+            <a:schemeClr val="phClr"/>
+          </a:solidFill>
+          <a:prstDash val="solid"/>
+          <a:miter lim="800000"/>
+        </a:ln>
+        <a:ln w="19050" cap="flat" cmpd="sng" algn="ctr">
+          <a:solidFill>
+            <a:schemeClr val="phClr"/>
+          </a:solidFill>
+          <a:prstDash val="solid"/>
+          <a:miter lim="800000"/>
+        </a:ln>
+      </a:lnStyleLst>
+      <a:effectStyleLst>
+        <a:effectStyle>
+          <a:effectLst/>
+        </a:effectStyle>
+        <a:effectStyle>
+          <a:effectLst/>
+        </a:effectStyle>
+        <a:effectStyle>
+          <a:effectLst>
+            <a:outerShdw blurRad="57150" dist="19050" dir="5400000" algn="ctr" rotWithShape="0">
+              <a:srgbClr val="000000">
+                <a:alpha val="63000"/>
+              </a:srgbClr>
+            </a:outerShdw>
+          </a:effectLst>
+        </a:effectStyle>
+      </a:effectStyleLst>
+      <a:bgFillStyleLst>
+        <a:solidFill>
+          <a:schemeClr val="phClr"/>
+        </a:solidFill>
+        <a:solidFill>
+          <a:schemeClr val="phClr">
+            <a:tint val="95000"/>
+            <a:satMod val="170000"/>
+          </a:schemeClr>
+        </a:solidFill>
+        <a:gradFill rotWithShape="1">
+          <a:gsLst>
+            <a:gs pos="0">
+              <a:schemeClr val="phClr">
+                <a:tint val="93000"/>
+                <a:satMod val="150000"/>
+                <a:shade val="98000"/>
+                <a:lumMod val="102000"/>
+              </a:schemeClr>
+            </a:gs>
+            <a:gs pos="50000">
+              <a:schemeClr val="phClr">
+                <a:tint val="98000"/>
+                <a:satMod val="130000"/>
+                <a:shade val="90000"/>
+                <a:lumMod val="103000"/>
+              </a:schemeClr>
+            </a:gs>
+            <a:gs pos="100000">
+              <a:schemeClr val="phClr">
+                <a:shade val="63000"/>
+                <a:satMod val="120000"/>
+              </a:schemeClr>
+            </a:gs>
+          </a:gsLst>
+          <a:lin ang="5400000" scaled="0"/>
+        </a:gradFill>
+      </a:bgFillStyleLst>
+    </a:fmtScheme>
+  </a:themeElements>
   <a:extLst>
     <a:ext uri="{05A4C25C-085E-4340-85A3-A5531E510DB2}">
       <thm15:themeFamily xmlns:thm15="http://schemas.microsoft.com/office/thememl/2012/main" name="Office Theme" id="{62F939B6-93AF-4DB8-9C6B-D6C7DFDC589F}" vid="{4A3C46E8-61CC-4603-A589-7422A47A8E4A}"/>
